--- a/KHBD_Tin_học/Lớp_4/Tuần_08/Slide_Tin_hoc_Lớp_4_Tiet07_Bai_4_Tim_kiem_thong_tin_tren_Internet_Tiet_1.pptx
+++ b/KHBD_Tin_học/Lớp_4/Tuần_08/Slide_Tin_hoc_Lớp_4_Tiet07_Bai_4_Tim_kiem_thong_tin_tren_Internet_Tiet_1.pptx
@@ -11,6 +11,11 @@
     <p:sldId id="259" r:id="rId2"/>
     <p:sldId id="260" r:id="rId10"/>
     <p:sldId id="261" r:id="rId11"/>
+    <p:sldId id="262" r:id="rId12"/>
+    <p:sldId id="263" r:id="rId13"/>
+    <p:sldId id="264" r:id="rId14"/>
+    <p:sldId id="265" r:id="rId15"/>
+    <p:sldId id="266" r:id="rId16"/>
   </p:sldIdLst>
   <p:sldSz cx="12192000" cy="6858000"/>
   <p:notesSz cx="6858000" cy="9144000"/>
@@ -3394,23 +3399,25 @@
       <p:grpSpPr/>
       <p:sp>
         <p:nvSpPr>
-          <p:cNvPr id="2" name="Rectangle 1"/>
+          <p:cNvPr id="2" name="Rounded Rectangle 1"/>
           <p:cNvSpPr/>
           <p:nvPr/>
         </p:nvSpPr>
         <p:spPr>
           <a:xfrm>
-            <a:off x="0" y="1051560"/>
-            <a:ext cx="12191695" cy="4754880"/>
-          </a:xfrm>
-          <a:prstGeom prst="rect">
+            <a:off x="411480" y="1143000"/>
+            <a:ext cx="11365992" cy="4572000"/>
+          </a:xfrm>
+          <a:prstGeom prst="roundRect">
             <a:avLst/>
           </a:prstGeom>
           <a:solidFill>
-            <a:srgbClr val="F0F8FF"/>
+            <a:srgbClr val="F8FAFC"/>
           </a:solidFill>
-          <a:ln>
-            <a:noFill/>
+          <a:ln w="12700">
+            <a:solidFill>
+              <a:srgbClr val="CBD5E1"/>
+            </a:solidFill>
           </a:ln>
         </p:spPr>
         <p:style>
@@ -3443,16 +3450,14 @@
         </p:nvSpPr>
         <p:spPr>
           <a:xfrm>
-            <a:off x="914400" y="1280160"/>
-            <a:ext cx="3474720" cy="365760"/>
+            <a:off x="777240" y="1463040"/>
+            <a:ext cx="3108960" cy="365759"/>
           </a:xfrm>
           <a:prstGeom prst="roundRect">
-            <a:avLst>
-              <a:gd name="adj" fmla="val 50000"/>
-            </a:avLst>
+            <a:avLst/>
           </a:prstGeom>
           <a:solidFill>
-            <a:srgbClr val="0096D6"/>
+            <a:srgbClr val="1E3A8A"/>
           </a:solidFill>
           <a:ln>
             <a:noFill/>
@@ -3473,20 +3478,10 @@
           </a:fontRef>
         </p:style>
         <p:txBody>
-          <a:bodyPr rtlCol="0" anchor="ctr" wrap="none"/>
-          <a:lstStyle/>
-          <a:p>
-            <a:pPr algn="ctr">
-              <a:defRPr sz="1300" b="1">
-                <a:solidFill>
-                  <a:srgbClr val="FFFFFF"/>
-                </a:solidFill>
-                <a:latin typeface="Arial"/>
-              </a:defRPr>
-            </a:pPr>
-            <a:r>
-              <a:t>TIN HỌC LỚP 4 • TUẦN 8 • TIẾT 7</a:t>
-            </a:r>
+          <a:bodyPr rtlCol="0" anchor="ctr"/>
+          <a:lstStyle/>
+          <a:p>
+            <a:pPr algn="ctr"/>
           </a:p>
         </p:txBody>
       </p:sp>
@@ -3498,8 +3493,8 @@
         </p:nvSpPr>
         <p:spPr>
           <a:xfrm>
-            <a:off x="914400" y="1737360"/>
-            <a:ext cx="5943600" cy="1645920"/>
+            <a:off x="777240" y="1463040"/>
+            <a:ext cx="3108960" cy="365759"/>
           </a:xfrm>
           <a:prstGeom prst="rect">
             <a:avLst/>
@@ -3507,25 +3502,20 @@
           <a:noFill/>
         </p:spPr>
         <p:txBody>
-          <a:bodyPr wrap="square">
+          <a:bodyPr wrap="square" tIns="36576" bIns="36576" lIns="54864" rIns="54864">
             <a:spAutoFit/>
           </a:bodyPr>
           <a:lstStyle/>
           <a:p>
-            <a:pPr algn="l">
-              <a:defRPr sz="3200" b="1">
-                <a:solidFill>
-                  <a:srgbClr val="0066CC"/>
+            <a:pPr algn="ctr"/>
+            <a:r>
+              <a:rPr sz="1200" b="1">
+                <a:solidFill>
+                  <a:srgbClr val="FFFFFF"/>
                 </a:solidFill>
                 <a:latin typeface="Arial"/>
-              </a:defRPr>
-            </a:pPr>
-            <a:r>
-              <a:t>BÀI 4: TÌM KIẾM THÔNG TIN</a:t>
-            </a:r>
-            <a:br/>
-            <a:r>
-              <a:t>TRÊN INTERNET (TIẾT 1)</a:t>
+              </a:rPr>
+              <a:t>TIN HỌC LỚP 4 • TUẦN 8 • TIẾT 7</a:t>
             </a:r>
           </a:p>
         </p:txBody>
@@ -3538,8 +3528,8 @@
         </p:nvSpPr>
         <p:spPr>
           <a:xfrm>
-            <a:off x="914400" y="3474720"/>
-            <a:ext cx="5943600" cy="731520"/>
+            <a:off x="777240" y="2057400"/>
+            <a:ext cx="5486400" cy="1463040"/>
           </a:xfrm>
           <a:prstGeom prst="rect">
             <a:avLst/>
@@ -3547,28 +3537,146 @@
           <a:noFill/>
         </p:spPr>
         <p:txBody>
-          <a:bodyPr wrap="square">
+          <a:bodyPr wrap="square" tIns="36576" bIns="36576" lIns="54864" rIns="54864">
             <a:spAutoFit/>
           </a:bodyPr>
           <a:lstStyle/>
           <a:p>
-            <a:pPr algn="l">
-              <a:defRPr sz="2000" b="0">
-                <a:solidFill>
-                  <a:srgbClr val="464646"/>
+            <a:pPr algn="l"/>
+            <a:r>
+              <a:rPr sz="2800" b="1">
+                <a:solidFill>
+                  <a:srgbClr val="1E3A8A"/>
                 </a:solidFill>
                 <a:latin typeface="Arial"/>
-              </a:defRPr>
-            </a:pPr>
-            <a:r>
-              <a:t>Máy tìm kiếm Google • Xác định Từ khóa • Các bước tìm kiếm</a:t>
-            </a:r>
+              </a:rPr>
+              <a:t>TÌM KIẾM THÔNG TIN
+TRÊN INTERNET</a:t>
+            </a:r>
+          </a:p>
+        </p:txBody>
+      </p:sp>
+      <p:sp>
+        <p:nvSpPr>
+          <p:cNvPr id="6" name="TextBox 5"/>
+          <p:cNvSpPr txBox="1"/>
+          <p:nvPr/>
+        </p:nvSpPr>
+        <p:spPr>
+          <a:xfrm>
+            <a:off x="777240" y="3566160"/>
+            <a:ext cx="5486400" cy="548640"/>
+          </a:xfrm>
+          <a:prstGeom prst="rect">
+            <a:avLst/>
+          </a:prstGeom>
+          <a:noFill/>
+        </p:spPr>
+        <p:txBody>
+          <a:bodyPr wrap="square" tIns="36576" bIns="36576" lIns="54864" rIns="54864">
+            <a:spAutoFit/>
+          </a:bodyPr>
+          <a:lstStyle/>
+          <a:p>
+            <a:pPr algn="l"/>
+            <a:r>
+              <a:rPr sz="1500" b="0">
+                <a:solidFill>
+                  <a:srgbClr val="475569"/>
+                </a:solidFill>
+                <a:latin typeface="Arial"/>
+              </a:rPr>
+              <a:t>Bài 4 (Tiết 1) • Chủ đề 3: Tìm kiếm và trao đổi thông tin
+Bộ sách: Kết nối tri thức với cuộc sống</a:t>
+            </a:r>
+          </a:p>
+        </p:txBody>
+      </p:sp>
+      <p:sp>
+        <p:nvSpPr>
+          <p:cNvPr id="7" name="TextBox 6"/>
+          <p:cNvSpPr txBox="1"/>
+          <p:nvPr/>
+        </p:nvSpPr>
+        <p:spPr>
+          <a:xfrm>
+            <a:off x="777240" y="4206240"/>
+            <a:ext cx="5303520" cy="1097280"/>
+          </a:xfrm>
+          <a:prstGeom prst="rect">
+            <a:avLst/>
+          </a:prstGeom>
+          <a:noFill/>
+        </p:spPr>
+        <p:txBody>
+          <a:bodyPr wrap="square" tIns="36576" bIns="36576" lIns="54864" rIns="54864">
+            <a:spAutoFit/>
+          </a:bodyPr>
+          <a:lstStyle/>
+          <a:p>
+            <a:pPr algn="l"/>
+            <a:r>
+              <a:rPr sz="1400" b="0">
+                <a:solidFill>
+                  <a:srgbClr val="0F172A"/>
+                </a:solidFill>
+                <a:latin typeface="Arial"/>
+              </a:rPr>
+              <a:t>🔑 Hiểu khái niệm Từ khóa (Keyword) &amp; Máy tìm kiếm
+🚀 Nắm chắc Quy trình 4 bước tìm kiếm bằng Google
+🛡️ Thực hành an toàn và tìm thông tin hiệu quả</a:t>
+            </a:r>
+          </a:p>
+        </p:txBody>
+      </p:sp>
+      <p:sp>
+        <p:nvSpPr>
+          <p:cNvPr id="8" name="Rounded Rectangle 7"/>
+          <p:cNvSpPr/>
+          <p:nvPr/>
+        </p:nvSpPr>
+        <p:spPr>
+          <a:xfrm>
+            <a:off x="6492240" y="1417320"/>
+            <a:ext cx="4983480" cy="4023360"/>
+          </a:xfrm>
+          <a:prstGeom prst="roundRect">
+            <a:avLst/>
+          </a:prstGeom>
+          <a:solidFill>
+            <a:srgbClr val="FFFFFF"/>
+          </a:solidFill>
+          <a:ln w="25400">
+            <a:solidFill>
+              <a:srgbClr val="2563EB"/>
+            </a:solidFill>
+          </a:ln>
+        </p:spPr>
+        <p:style>
+          <a:lnRef idx="1">
+            <a:schemeClr val="accent1"/>
+          </a:lnRef>
+          <a:fillRef idx="3">
+            <a:schemeClr val="accent1"/>
+          </a:fillRef>
+          <a:effectRef idx="2">
+            <a:schemeClr val="accent1"/>
+          </a:effectRef>
+          <a:fontRef idx="minor">
+            <a:schemeClr val="lt1"/>
+          </a:fontRef>
+        </p:style>
+        <p:txBody>
+          <a:bodyPr rtlCol="0" anchor="ctr"/>
+          <a:lstStyle/>
+          <a:p>
+            <a:pPr algn="ctr"/>
           </a:p>
         </p:txBody>
       </p:sp>
       <p:pic>
         <p:nvPicPr>
-          <p:cNvPr id="6" name="Picture 5" descr="search_steps_diagram_vn.png"/>
+          <p:cNvPr id="9" name="Picture 8" descr="cover_hero.jpg"/>
           <p:cNvPicPr>
             <a:picLocks noChangeAspect="1"/>
           </p:cNvPicPr>
@@ -3582,8 +3690,8 @@
         </p:blipFill>
         <p:spPr>
           <a:xfrm>
-            <a:off x="6858000" y="1280160"/>
-            <a:ext cx="4754880" cy="4114800"/>
+            <a:off x="6565392" y="1490472"/>
+            <a:ext cx="4837176" cy="3877056"/>
           </a:xfrm>
           <a:prstGeom prst="rect">
             <a:avLst/>
@@ -3595,6 +3703,878 @@
   <p:clrMapOvr>
     <a:masterClrMapping/>
   </p:clrMapOvr>
+  <p:transition spd="med">
+    <p:fade/>
+  </p:transition>
+</p:sld>
+</file>
+
+<file path=ppt/slides/slide10.xml><?xml version="1.0" encoding="utf-8"?>
+<p:sld xmlns:a="http://schemas.openxmlformats.org/drawingml/2006/main" xmlns:p="http://schemas.openxmlformats.org/presentationml/2006/main" xmlns:r="http://schemas.openxmlformats.org/officeDocument/2006/relationships">
+  <p:cSld>
+    <p:spTree>
+      <p:nvGrpSpPr>
+        <p:cNvPr id="1" name=""/>
+        <p:cNvGrpSpPr/>
+        <p:nvPr/>
+      </p:nvGrpSpPr>
+      <p:grpSpPr/>
+      <p:sp>
+        <p:nvSpPr>
+          <p:cNvPr id="2" name="Rounded Rectangle 1"/>
+          <p:cNvSpPr/>
+          <p:nvPr/>
+        </p:nvSpPr>
+        <p:spPr>
+          <a:xfrm>
+            <a:off x="411480" y="1097280"/>
+            <a:ext cx="2807208" cy="329184"/>
+          </a:xfrm>
+          <a:prstGeom prst="roundRect">
+            <a:avLst/>
+          </a:prstGeom>
+          <a:solidFill>
+            <a:srgbClr val="1E3A8A"/>
+          </a:solidFill>
+          <a:ln>
+            <a:noFill/>
+          </a:ln>
+        </p:spPr>
+        <p:style>
+          <a:lnRef idx="1">
+            <a:schemeClr val="accent1"/>
+          </a:lnRef>
+          <a:fillRef idx="3">
+            <a:schemeClr val="accent1"/>
+          </a:fillRef>
+          <a:effectRef idx="2">
+            <a:schemeClr val="accent1"/>
+          </a:effectRef>
+          <a:fontRef idx="minor">
+            <a:schemeClr val="lt1"/>
+          </a:fontRef>
+        </p:style>
+        <p:txBody>
+          <a:bodyPr rtlCol="0" anchor="ctr"/>
+          <a:lstStyle/>
+          <a:p>
+            <a:pPr algn="ctr"/>
+          </a:p>
+        </p:txBody>
+      </p:sp>
+      <p:sp>
+        <p:nvSpPr>
+          <p:cNvPr id="3" name="TextBox 2"/>
+          <p:cNvSpPr txBox="1"/>
+          <p:nvPr/>
+        </p:nvSpPr>
+        <p:spPr>
+          <a:xfrm>
+            <a:off x="411480" y="1097280"/>
+            <a:ext cx="2807208" cy="329184"/>
+          </a:xfrm>
+          <a:prstGeom prst="rect">
+            <a:avLst/>
+          </a:prstGeom>
+          <a:noFill/>
+        </p:spPr>
+        <p:txBody>
+          <a:bodyPr wrap="square" tIns="36576" bIns="36576" lIns="54864" rIns="54864">
+            <a:spAutoFit/>
+          </a:bodyPr>
+          <a:lstStyle/>
+          <a:p>
+            <a:pPr algn="ctr"/>
+            <a:r>
+              <a:rPr sz="1200" b="1">
+                <a:solidFill>
+                  <a:srgbClr val="FFFFFF"/>
+                </a:solidFill>
+                <a:latin typeface="Arial"/>
+              </a:rPr>
+              <a:t>GHI NHỚ TRỌNG TÂM 💡</a:t>
+            </a:r>
+          </a:p>
+        </p:txBody>
+      </p:sp>
+      <p:sp>
+        <p:nvSpPr>
+          <p:cNvPr id="4" name="TextBox 3"/>
+          <p:cNvSpPr txBox="1"/>
+          <p:nvPr/>
+        </p:nvSpPr>
+        <p:spPr>
+          <a:xfrm>
+            <a:off x="411480" y="1481328"/>
+            <a:ext cx="11338560" cy="411480"/>
+          </a:xfrm>
+          <a:prstGeom prst="rect">
+            <a:avLst/>
+          </a:prstGeom>
+          <a:noFill/>
+        </p:spPr>
+        <p:txBody>
+          <a:bodyPr wrap="square" tIns="36576" bIns="36576" lIns="54864" rIns="54864">
+            <a:spAutoFit/>
+          </a:bodyPr>
+          <a:lstStyle/>
+          <a:p>
+            <a:pPr algn="l"/>
+            <a:r>
+              <a:rPr sz="2300" b="1">
+                <a:solidFill>
+                  <a:srgbClr val="1E3A8A"/>
+                </a:solidFill>
+                <a:latin typeface="Arial"/>
+              </a:rPr>
+              <a:t>Tổng kết kiến thức em cần ghi nhớ sau bài học</a:t>
+            </a:r>
+          </a:p>
+        </p:txBody>
+      </p:sp>
+      <p:sp>
+        <p:nvSpPr>
+          <p:cNvPr id="5" name="TextBox 4"/>
+          <p:cNvSpPr txBox="1"/>
+          <p:nvPr/>
+        </p:nvSpPr>
+        <p:spPr>
+          <a:xfrm>
+            <a:off x="411480" y="1874519"/>
+            <a:ext cx="11338560" cy="274319"/>
+          </a:xfrm>
+          <a:prstGeom prst="rect">
+            <a:avLst/>
+          </a:prstGeom>
+          <a:noFill/>
+        </p:spPr>
+        <p:txBody>
+          <a:bodyPr wrap="square" tIns="36576" bIns="36576" lIns="54864" rIns="54864">
+            <a:spAutoFit/>
+          </a:bodyPr>
+          <a:lstStyle/>
+          <a:p>
+            <a:pPr algn="l"/>
+            <a:r>
+              <a:rPr sz="1400" b="0">
+                <a:solidFill>
+                  <a:srgbClr val="475569"/>
+                </a:solidFill>
+                <a:latin typeface="Arial"/>
+              </a:rPr>
+              <a:t>Những nội dung cốt lõi của Tiết 1 - Bài 4 SGK Tin học 4</a:t>
+            </a:r>
+          </a:p>
+        </p:txBody>
+      </p:sp>
+      <p:sp>
+        <p:nvSpPr>
+          <p:cNvPr id="6" name="Rounded Rectangle 5"/>
+          <p:cNvSpPr/>
+          <p:nvPr/>
+        </p:nvSpPr>
+        <p:spPr>
+          <a:xfrm>
+            <a:off x="411480" y="2194560"/>
+            <a:ext cx="11365992" cy="3520440"/>
+          </a:xfrm>
+          <a:prstGeom prst="roundRect">
+            <a:avLst/>
+          </a:prstGeom>
+          <a:solidFill>
+            <a:srgbClr val="FFF7ED"/>
+          </a:solidFill>
+          <a:ln w="25400">
+            <a:solidFill>
+              <a:srgbClr val="EA580C"/>
+            </a:solidFill>
+          </a:ln>
+        </p:spPr>
+        <p:style>
+          <a:lnRef idx="1">
+            <a:schemeClr val="accent1"/>
+          </a:lnRef>
+          <a:fillRef idx="3">
+            <a:schemeClr val="accent1"/>
+          </a:fillRef>
+          <a:effectRef idx="2">
+            <a:schemeClr val="accent1"/>
+          </a:effectRef>
+          <a:fontRef idx="minor">
+            <a:schemeClr val="lt1"/>
+          </a:fontRef>
+        </p:style>
+        <p:txBody>
+          <a:bodyPr rtlCol="0" anchor="ctr"/>
+          <a:lstStyle/>
+          <a:p>
+            <a:pPr algn="ctr"/>
+          </a:p>
+        </p:txBody>
+      </p:sp>
+      <p:sp>
+        <p:nvSpPr>
+          <p:cNvPr id="7" name="Rounded Rectangle 6"/>
+          <p:cNvSpPr/>
+          <p:nvPr/>
+        </p:nvSpPr>
+        <p:spPr>
+          <a:xfrm>
+            <a:off x="411480" y="2194560"/>
+            <a:ext cx="11365992" cy="548640"/>
+          </a:xfrm>
+          <a:prstGeom prst="roundRect">
+            <a:avLst/>
+          </a:prstGeom>
+          <a:solidFill>
+            <a:srgbClr val="EA580C"/>
+          </a:solidFill>
+          <a:ln>
+            <a:noFill/>
+          </a:ln>
+        </p:spPr>
+        <p:style>
+          <a:lnRef idx="1">
+            <a:schemeClr val="accent1"/>
+          </a:lnRef>
+          <a:fillRef idx="3">
+            <a:schemeClr val="accent1"/>
+          </a:fillRef>
+          <a:effectRef idx="2">
+            <a:schemeClr val="accent1"/>
+          </a:effectRef>
+          <a:fontRef idx="minor">
+            <a:schemeClr val="lt1"/>
+          </a:fontRef>
+        </p:style>
+        <p:txBody>
+          <a:bodyPr rtlCol="0" anchor="ctr"/>
+          <a:lstStyle/>
+          <a:p>
+            <a:pPr algn="ctr"/>
+          </a:p>
+        </p:txBody>
+      </p:sp>
+      <p:sp>
+        <p:nvSpPr>
+          <p:cNvPr id="8" name="TextBox 7"/>
+          <p:cNvSpPr txBox="1"/>
+          <p:nvPr/>
+        </p:nvSpPr>
+        <p:spPr>
+          <a:xfrm>
+            <a:off x="594360" y="2267712"/>
+            <a:ext cx="10972800" cy="365759"/>
+          </a:xfrm>
+          <a:prstGeom prst="rect">
+            <a:avLst/>
+          </a:prstGeom>
+          <a:noFill/>
+        </p:spPr>
+        <p:txBody>
+          <a:bodyPr wrap="square" tIns="36576" bIns="36576" lIns="54864" rIns="54864">
+            <a:spAutoFit/>
+          </a:bodyPr>
+          <a:lstStyle/>
+          <a:p>
+            <a:pPr algn="ctr"/>
+            <a:r>
+              <a:rPr sz="1800" b="1">
+                <a:solidFill>
+                  <a:srgbClr val="FFFFFF"/>
+                </a:solidFill>
+                <a:latin typeface="Arial"/>
+              </a:rPr>
+              <a:t>⭐ EM CẦN GHI NHỚ TRỌNG TÂM:</a:t>
+            </a:r>
+          </a:p>
+        </p:txBody>
+      </p:sp>
+      <p:sp>
+        <p:nvSpPr>
+          <p:cNvPr id="9" name="TextBox 8"/>
+          <p:cNvSpPr txBox="1"/>
+          <p:nvPr/>
+        </p:nvSpPr>
+        <p:spPr>
+          <a:xfrm>
+            <a:off x="685800" y="2880360"/>
+            <a:ext cx="7680960" cy="2697479"/>
+          </a:xfrm>
+          <a:prstGeom prst="rect">
+            <a:avLst/>
+          </a:prstGeom>
+          <a:noFill/>
+        </p:spPr>
+        <p:txBody>
+          <a:bodyPr wrap="square" tIns="36576" bIns="36576" lIns="54864" rIns="54864">
+            <a:spAutoFit/>
+          </a:bodyPr>
+          <a:lstStyle/>
+          <a:p>
+            <a:pPr algn="l"/>
+            <a:r>
+              <a:rPr sz="1500" b="0">
+                <a:solidFill>
+                  <a:srgbClr val="0F172A"/>
+                </a:solidFill>
+                <a:latin typeface="Arial"/>
+              </a:rPr>
+              <a:t>1. Máy tìm kiếm (Google, Bing, Cốc Cốc...) giúp chúng ta tìm kiếm thông tin nhanh chóng và thuận tiện trên Internet.
+2. Từ khóa (Keyword) là từ hoặc cụm từ ngắn gọn, chính xác thể hiện nội dung cần tìm — là chiếc chìa khóa quyết định kết quả.
+3. Quy trình 4 bước tìm kiếm: (1) Xác định từ khóa ➔ (2) Mở google.com ➔ (3) Gõ từ khóa &amp; Enter ➔ (4) Chọn siêu liên kết phù hợp.
+4. An toàn số: Luôn cẩn thận khi lựa chọn nguồn tin và không truy cập vào các trang web không an toàn.</a:t>
+            </a:r>
+          </a:p>
+        </p:txBody>
+      </p:sp>
+      <p:sp>
+        <p:nvSpPr>
+          <p:cNvPr id="10" name="Rounded Rectangle 9"/>
+          <p:cNvSpPr/>
+          <p:nvPr/>
+        </p:nvSpPr>
+        <p:spPr>
+          <a:xfrm>
+            <a:off x="8549640" y="2880360"/>
+            <a:ext cx="3063240" cy="2697479"/>
+          </a:xfrm>
+          <a:prstGeom prst="roundRect">
+            <a:avLst/>
+          </a:prstGeom>
+          <a:solidFill>
+            <a:srgbClr val="FFFFFF"/>
+          </a:solidFill>
+          <a:ln w="12700">
+            <a:solidFill>
+              <a:srgbClr val="EA580C"/>
+            </a:solidFill>
+          </a:ln>
+        </p:spPr>
+        <p:style>
+          <a:lnRef idx="1">
+            <a:schemeClr val="accent1"/>
+          </a:lnRef>
+          <a:fillRef idx="3">
+            <a:schemeClr val="accent1"/>
+          </a:fillRef>
+          <a:effectRef idx="2">
+            <a:schemeClr val="accent1"/>
+          </a:effectRef>
+          <a:fontRef idx="minor">
+            <a:schemeClr val="lt1"/>
+          </a:fontRef>
+        </p:style>
+        <p:txBody>
+          <a:bodyPr rtlCol="0" anchor="ctr"/>
+          <a:lstStyle/>
+          <a:p>
+            <a:pPr algn="ctr"/>
+          </a:p>
+        </p:txBody>
+      </p:sp>
+      <p:pic>
+        <p:nvPicPr>
+          <p:cNvPr id="11" name="Picture 10" descr="smart_owl.jpg"/>
+          <p:cNvPicPr>
+            <a:picLocks noChangeAspect="1"/>
+          </p:cNvPicPr>
+          <p:nvPr/>
+        </p:nvPicPr>
+        <p:blipFill>
+          <a:blip r:embed="rId2"/>
+          <a:stretch>
+            <a:fillRect/>
+          </a:stretch>
+        </p:blipFill>
+        <p:spPr>
+          <a:xfrm>
+            <a:off x="8641080" y="2971800"/>
+            <a:ext cx="2880360" cy="2514600"/>
+          </a:xfrm>
+          <a:prstGeom prst="rect">
+            <a:avLst/>
+          </a:prstGeom>
+        </p:spPr>
+      </p:pic>
+    </p:spTree>
+  </p:cSld>
+  <p:clrMapOvr>
+    <a:masterClrMapping/>
+  </p:clrMapOvr>
+  <p:transition spd="med">
+    <p:fade/>
+  </p:transition>
+</p:sld>
+</file>
+
+<file path=ppt/slides/slide11.xml><?xml version="1.0" encoding="utf-8"?>
+<p:sld xmlns:a="http://schemas.openxmlformats.org/drawingml/2006/main" xmlns:p="http://schemas.openxmlformats.org/presentationml/2006/main" xmlns:r="http://schemas.openxmlformats.org/officeDocument/2006/relationships">
+  <p:cSld>
+    <p:spTree>
+      <p:nvGrpSpPr>
+        <p:cNvPr id="1" name=""/>
+        <p:cNvGrpSpPr/>
+        <p:nvPr/>
+      </p:nvGrpSpPr>
+      <p:grpSpPr/>
+      <p:sp>
+        <p:nvSpPr>
+          <p:cNvPr id="2" name="Rounded Rectangle 1"/>
+          <p:cNvSpPr/>
+          <p:nvPr/>
+        </p:nvSpPr>
+        <p:spPr>
+          <a:xfrm>
+            <a:off x="411480" y="1097280"/>
+            <a:ext cx="2807208" cy="329184"/>
+          </a:xfrm>
+          <a:prstGeom prst="roundRect">
+            <a:avLst/>
+          </a:prstGeom>
+          <a:solidFill>
+            <a:srgbClr val="1E3A8A"/>
+          </a:solidFill>
+          <a:ln>
+            <a:noFill/>
+          </a:ln>
+        </p:spPr>
+        <p:style>
+          <a:lnRef idx="1">
+            <a:schemeClr val="accent1"/>
+          </a:lnRef>
+          <a:fillRef idx="3">
+            <a:schemeClr val="accent1"/>
+          </a:fillRef>
+          <a:effectRef idx="2">
+            <a:schemeClr val="accent1"/>
+          </a:effectRef>
+          <a:fontRef idx="minor">
+            <a:schemeClr val="lt1"/>
+          </a:fontRef>
+        </p:style>
+        <p:txBody>
+          <a:bodyPr rtlCol="0" anchor="ctr"/>
+          <a:lstStyle/>
+          <a:p>
+            <a:pPr algn="ctr"/>
+          </a:p>
+        </p:txBody>
+      </p:sp>
+      <p:sp>
+        <p:nvSpPr>
+          <p:cNvPr id="3" name="TextBox 2"/>
+          <p:cNvSpPr txBox="1"/>
+          <p:nvPr/>
+        </p:nvSpPr>
+        <p:spPr>
+          <a:xfrm>
+            <a:off x="411480" y="1097280"/>
+            <a:ext cx="2807208" cy="329184"/>
+          </a:xfrm>
+          <a:prstGeom prst="rect">
+            <a:avLst/>
+          </a:prstGeom>
+          <a:noFill/>
+        </p:spPr>
+        <p:txBody>
+          <a:bodyPr wrap="square" tIns="36576" bIns="36576" lIns="54864" rIns="54864">
+            <a:spAutoFit/>
+          </a:bodyPr>
+          <a:lstStyle/>
+          <a:p>
+            <a:pPr algn="ctr"/>
+            <a:r>
+              <a:rPr sz="1200" b="1">
+                <a:solidFill>
+                  <a:srgbClr val="FFFFFF"/>
+                </a:solidFill>
+                <a:latin typeface="Arial"/>
+              </a:rPr>
+              <a:t>KẾT THÚC TIẾT HỌC 🌟</a:t>
+            </a:r>
+          </a:p>
+        </p:txBody>
+      </p:sp>
+      <p:sp>
+        <p:nvSpPr>
+          <p:cNvPr id="4" name="TextBox 3"/>
+          <p:cNvSpPr txBox="1"/>
+          <p:nvPr/>
+        </p:nvSpPr>
+        <p:spPr>
+          <a:xfrm>
+            <a:off x="411480" y="1481328"/>
+            <a:ext cx="11338560" cy="411480"/>
+          </a:xfrm>
+          <a:prstGeom prst="rect">
+            <a:avLst/>
+          </a:prstGeom>
+          <a:noFill/>
+        </p:spPr>
+        <p:txBody>
+          <a:bodyPr wrap="square" tIns="36576" bIns="36576" lIns="54864" rIns="54864">
+            <a:spAutoFit/>
+          </a:bodyPr>
+          <a:lstStyle/>
+          <a:p>
+            <a:pPr algn="l"/>
+            <a:r>
+              <a:rPr sz="2300" b="1">
+                <a:solidFill>
+                  <a:srgbClr val="1E3A8A"/>
+                </a:solidFill>
+                <a:latin typeface="Arial"/>
+              </a:rPr>
+              <a:t>Chúc mừng các em đã hoàn thành xuất sắc tiết học!</a:t>
+            </a:r>
+          </a:p>
+        </p:txBody>
+      </p:sp>
+      <p:sp>
+        <p:nvSpPr>
+          <p:cNvPr id="5" name="TextBox 4"/>
+          <p:cNvSpPr txBox="1"/>
+          <p:nvPr/>
+        </p:nvSpPr>
+        <p:spPr>
+          <a:xfrm>
+            <a:off x="411480" y="1874519"/>
+            <a:ext cx="11338560" cy="274319"/>
+          </a:xfrm>
+          <a:prstGeom prst="rect">
+            <a:avLst/>
+          </a:prstGeom>
+          <a:noFill/>
+        </p:spPr>
+        <p:txBody>
+          <a:bodyPr wrap="square" tIns="36576" bIns="36576" lIns="54864" rIns="54864">
+            <a:spAutoFit/>
+          </a:bodyPr>
+          <a:lstStyle/>
+          <a:p>
+            <a:pPr algn="l"/>
+            <a:r>
+              <a:rPr sz="1400" b="0">
+                <a:solidFill>
+                  <a:srgbClr val="475569"/>
+                </a:solidFill>
+                <a:latin typeface="Arial"/>
+              </a:rPr>
+              <a:t>Cùng chuẩn bị cho Tiết 2: Thực hành tìm kiếm thông tin nâng cao</a:t>
+            </a:r>
+          </a:p>
+        </p:txBody>
+      </p:sp>
+      <p:sp>
+        <p:nvSpPr>
+          <p:cNvPr id="6" name="Rounded Rectangle 5"/>
+          <p:cNvSpPr/>
+          <p:nvPr/>
+        </p:nvSpPr>
+        <p:spPr>
+          <a:xfrm>
+            <a:off x="411480" y="2194560"/>
+            <a:ext cx="6858000" cy="3520440"/>
+          </a:xfrm>
+          <a:prstGeom prst="roundRect">
+            <a:avLst/>
+          </a:prstGeom>
+          <a:solidFill>
+            <a:srgbClr val="FFFFFF"/>
+          </a:solidFill>
+          <a:ln w="12700">
+            <a:solidFill>
+              <a:srgbClr val="CBD5E1"/>
+            </a:solidFill>
+          </a:ln>
+        </p:spPr>
+        <p:style>
+          <a:lnRef idx="1">
+            <a:schemeClr val="accent1"/>
+          </a:lnRef>
+          <a:fillRef idx="3">
+            <a:schemeClr val="accent1"/>
+          </a:fillRef>
+          <a:effectRef idx="2">
+            <a:schemeClr val="accent1"/>
+          </a:effectRef>
+          <a:fontRef idx="minor">
+            <a:schemeClr val="lt1"/>
+          </a:fontRef>
+        </p:style>
+        <p:txBody>
+          <a:bodyPr rtlCol="0" anchor="ctr"/>
+          <a:lstStyle/>
+          <a:p>
+            <a:pPr algn="ctr"/>
+          </a:p>
+        </p:txBody>
+      </p:sp>
+      <p:sp>
+        <p:nvSpPr>
+          <p:cNvPr id="7" name="TextBox 6"/>
+          <p:cNvSpPr txBox="1"/>
+          <p:nvPr/>
+        </p:nvSpPr>
+        <p:spPr>
+          <a:xfrm>
+            <a:off x="640080" y="2377440"/>
+            <a:ext cx="6400800" cy="411480"/>
+          </a:xfrm>
+          <a:prstGeom prst="rect">
+            <a:avLst/>
+          </a:prstGeom>
+          <a:noFill/>
+        </p:spPr>
+        <p:txBody>
+          <a:bodyPr wrap="square" tIns="36576" bIns="36576" lIns="54864" rIns="54864">
+            <a:spAutoFit/>
+          </a:bodyPr>
+          <a:lstStyle/>
+          <a:p>
+            <a:pPr algn="l"/>
+            <a:r>
+              <a:rPr sz="2000" b="1">
+                <a:solidFill>
+                  <a:srgbClr val="1E3A8A"/>
+                </a:solidFill>
+                <a:latin typeface="Arial"/>
+              </a:rPr>
+              <a:t>🎉 CÁC EM ĐÃ LÀ NHÀ THÁM HIỂM TÀI BA!</a:t>
+            </a:r>
+          </a:p>
+        </p:txBody>
+      </p:sp>
+      <p:sp>
+        <p:nvSpPr>
+          <p:cNvPr id="8" name="TextBox 7"/>
+          <p:cNvSpPr txBox="1"/>
+          <p:nvPr/>
+        </p:nvSpPr>
+        <p:spPr>
+          <a:xfrm>
+            <a:off x="640080" y="2880360"/>
+            <a:ext cx="6400800" cy="822959"/>
+          </a:xfrm>
+          <a:prstGeom prst="rect">
+            <a:avLst/>
+          </a:prstGeom>
+          <a:noFill/>
+        </p:spPr>
+        <p:txBody>
+          <a:bodyPr wrap="square" tIns="36576" bIns="36576" lIns="54864" rIns="54864">
+            <a:spAutoFit/>
+          </a:bodyPr>
+          <a:lstStyle/>
+          <a:p>
+            <a:pPr algn="l"/>
+            <a:r>
+              <a:rPr sz="1600" b="0">
+                <a:solidFill>
+                  <a:srgbClr val="0F172A"/>
+                </a:solidFill>
+                <a:latin typeface="Arial"/>
+              </a:rPr>
+              <a:t>Hôm nay các em đã nắm vững cách chọn từ khóa chuẩn xác và làm chủ 4 bước tìm kiếm thông tin trên Internet!</a:t>
+            </a:r>
+          </a:p>
+        </p:txBody>
+      </p:sp>
+      <p:sp>
+        <p:nvSpPr>
+          <p:cNvPr id="9" name="Rounded Rectangle 8"/>
+          <p:cNvSpPr/>
+          <p:nvPr/>
+        </p:nvSpPr>
+        <p:spPr>
+          <a:xfrm>
+            <a:off x="640080" y="3886200"/>
+            <a:ext cx="6400800" cy="1645919"/>
+          </a:xfrm>
+          <a:prstGeom prst="roundRect">
+            <a:avLst/>
+          </a:prstGeom>
+          <a:solidFill>
+            <a:srgbClr val="F8FAFC"/>
+          </a:solidFill>
+          <a:ln w="12700">
+            <a:solidFill>
+              <a:srgbClr val="2563EB"/>
+            </a:solidFill>
+          </a:ln>
+        </p:spPr>
+        <p:style>
+          <a:lnRef idx="1">
+            <a:schemeClr val="accent1"/>
+          </a:lnRef>
+          <a:fillRef idx="3">
+            <a:schemeClr val="accent1"/>
+          </a:fillRef>
+          <a:effectRef idx="2">
+            <a:schemeClr val="accent1"/>
+          </a:effectRef>
+          <a:fontRef idx="minor">
+            <a:schemeClr val="lt1"/>
+          </a:fontRef>
+        </p:style>
+        <p:txBody>
+          <a:bodyPr rtlCol="0" anchor="ctr"/>
+          <a:lstStyle/>
+          <a:p>
+            <a:pPr algn="ctr"/>
+          </a:p>
+        </p:txBody>
+      </p:sp>
+      <p:sp>
+        <p:nvSpPr>
+          <p:cNvPr id="10" name="TextBox 9"/>
+          <p:cNvSpPr txBox="1"/>
+          <p:nvPr/>
+        </p:nvSpPr>
+        <p:spPr>
+          <a:xfrm>
+            <a:off x="822960" y="3977639"/>
+            <a:ext cx="6035040" cy="320039"/>
+          </a:xfrm>
+          <a:prstGeom prst="rect">
+            <a:avLst/>
+          </a:prstGeom>
+          <a:noFill/>
+        </p:spPr>
+        <p:txBody>
+          <a:bodyPr wrap="square" tIns="36576" bIns="36576" lIns="54864" rIns="54864">
+            <a:spAutoFit/>
+          </a:bodyPr>
+          <a:lstStyle/>
+          <a:p>
+            <a:pPr algn="l"/>
+            <a:r>
+              <a:rPr sz="1600" b="1">
+                <a:solidFill>
+                  <a:srgbClr val="1E3A8A"/>
+                </a:solidFill>
+                <a:latin typeface="Arial"/>
+              </a:rPr>
+              <a:t>📝 DẶN DÒ VỀ NHÀ:</a:t>
+            </a:r>
+          </a:p>
+        </p:txBody>
+      </p:sp>
+      <p:sp>
+        <p:nvSpPr>
+          <p:cNvPr id="11" name="TextBox 10"/>
+          <p:cNvSpPr txBox="1"/>
+          <p:nvPr/>
+        </p:nvSpPr>
+        <p:spPr>
+          <a:xfrm>
+            <a:off x="822960" y="4343400"/>
+            <a:ext cx="6035040" cy="1097280"/>
+          </a:xfrm>
+          <a:prstGeom prst="rect">
+            <a:avLst/>
+          </a:prstGeom>
+          <a:noFill/>
+        </p:spPr>
+        <p:txBody>
+          <a:bodyPr wrap="square" tIns="36576" bIns="36576" lIns="54864" rIns="54864">
+            <a:spAutoFit/>
+          </a:bodyPr>
+          <a:lstStyle/>
+          <a:p>
+            <a:pPr algn="l"/>
+            <a:r>
+              <a:rPr sz="1500" b="0">
+                <a:solidFill>
+                  <a:srgbClr val="0F172A"/>
+                </a:solidFill>
+                <a:latin typeface="Arial"/>
+              </a:rPr>
+              <a:t>• Ôn lại 4 bước tìm kiếm thông tin bằng Google.
+• Cùng bố mẹ thực hành tìm kiếm về 1 danh lam thắng cảnh yêu thích.
+• Đọc trước nội dung Tiết 2 trong SGK Tin học 4.</a:t>
+            </a:r>
+          </a:p>
+        </p:txBody>
+      </p:sp>
+      <p:sp>
+        <p:nvSpPr>
+          <p:cNvPr id="12" name="Rounded Rectangle 11"/>
+          <p:cNvSpPr/>
+          <p:nvPr/>
+        </p:nvSpPr>
+        <p:spPr>
+          <a:xfrm>
+            <a:off x="7452360" y="2194560"/>
+            <a:ext cx="4325112" cy="3520440"/>
+          </a:xfrm>
+          <a:prstGeom prst="roundRect">
+            <a:avLst/>
+          </a:prstGeom>
+          <a:solidFill>
+            <a:srgbClr val="FFFFFF"/>
+          </a:solidFill>
+          <a:ln w="12700">
+            <a:solidFill>
+              <a:srgbClr val="CBD5E1"/>
+            </a:solidFill>
+          </a:ln>
+        </p:spPr>
+        <p:style>
+          <a:lnRef idx="1">
+            <a:schemeClr val="accent1"/>
+          </a:lnRef>
+          <a:fillRef idx="3">
+            <a:schemeClr val="accent1"/>
+          </a:fillRef>
+          <a:effectRef idx="2">
+            <a:schemeClr val="accent1"/>
+          </a:effectRef>
+          <a:fontRef idx="minor">
+            <a:schemeClr val="lt1"/>
+          </a:fontRef>
+        </p:style>
+        <p:txBody>
+          <a:bodyPr rtlCol="0" anchor="ctr"/>
+          <a:lstStyle/>
+          <a:p>
+            <a:pPr algn="ctr"/>
+          </a:p>
+        </p:txBody>
+      </p:sp>
+      <p:pic>
+        <p:nvPicPr>
+          <p:cNvPr id="13" name="Picture 12" descr="mascot_celebrate_trophy.jpg"/>
+          <p:cNvPicPr>
+            <a:picLocks noChangeAspect="1"/>
+          </p:cNvPicPr>
+          <p:nvPr/>
+        </p:nvPicPr>
+        <p:blipFill>
+          <a:blip r:embed="rId2"/>
+          <a:stretch>
+            <a:fillRect/>
+          </a:stretch>
+        </p:blipFill>
+        <p:spPr>
+          <a:xfrm>
+            <a:off x="7543800" y="2286000"/>
+            <a:ext cx="4142232" cy="3337560"/>
+          </a:xfrm>
+          <a:prstGeom prst="rect">
+            <a:avLst/>
+          </a:prstGeom>
+        </p:spPr>
+      </p:pic>
+    </p:spTree>
+  </p:cSld>
+  <p:clrMapOvr>
+    <a:masterClrMapping/>
+  </p:clrMapOvr>
+  <p:transition spd="med">
+    <p:fade/>
+  </p:transition>
 </p:sld>
 </file>
 
@@ -3616,16 +4596,14 @@
         </p:nvSpPr>
         <p:spPr>
           <a:xfrm>
-            <a:off x="731520" y="1115568"/>
-            <a:ext cx="2560320" cy="320040"/>
+            <a:off x="411480" y="1097280"/>
+            <a:ext cx="1856232" cy="329184"/>
           </a:xfrm>
           <a:prstGeom prst="roundRect">
-            <a:avLst>
-              <a:gd name="adj" fmla="val 50000"/>
-            </a:avLst>
+            <a:avLst/>
           </a:prstGeom>
           <a:solidFill>
-            <a:srgbClr val="0096D6"/>
+            <a:srgbClr val="1E3A8A"/>
           </a:solidFill>
           <a:ln>
             <a:noFill/>
@@ -3646,20 +4624,10 @@
           </a:fontRef>
         </p:style>
         <p:txBody>
-          <a:bodyPr rtlCol="0" anchor="ctr" wrap="none"/>
-          <a:lstStyle/>
-          <a:p>
-            <a:pPr algn="ctr">
-              <a:defRPr sz="1300" b="1">
-                <a:solidFill>
-                  <a:srgbClr val="FFFFFF"/>
-                </a:solidFill>
-                <a:latin typeface="Arial"/>
-              </a:defRPr>
-            </a:pPr>
-            <a:r>
-              <a:t>KHỞI ĐỘNG 🔍</a:t>
-            </a:r>
+          <a:bodyPr rtlCol="0" anchor="ctr"/>
+          <a:lstStyle/>
+          <a:p>
+            <a:pPr algn="ctr"/>
           </a:p>
         </p:txBody>
       </p:sp>
@@ -3671,8 +4639,8 @@
         </p:nvSpPr>
         <p:spPr>
           <a:xfrm>
-            <a:off x="731520" y="1463040"/>
-            <a:ext cx="10698480" cy="502920"/>
+            <a:off x="411480" y="1097280"/>
+            <a:ext cx="1856232" cy="329184"/>
           </a:xfrm>
           <a:prstGeom prst="rect">
             <a:avLst/>
@@ -3680,47 +4648,114 @@
           <a:noFill/>
         </p:spPr>
         <p:txBody>
-          <a:bodyPr wrap="square">
+          <a:bodyPr wrap="square" tIns="36576" bIns="36576" lIns="54864" rIns="54864">
             <a:spAutoFit/>
           </a:bodyPr>
           <a:lstStyle/>
           <a:p>
-            <a:pPr algn="l">
-              <a:defRPr sz="2400" b="1">
-                <a:solidFill>
-                  <a:srgbClr val="1A2744"/>
+            <a:pPr algn="ctr"/>
+            <a:r>
+              <a:rPr sz="1200" b="1">
+                <a:solidFill>
+                  <a:srgbClr val="FFFFFF"/>
                 </a:solidFill>
                 <a:latin typeface="Arial"/>
-              </a:defRPr>
-            </a:pPr>
-            <a:r>
-              <a:t>Cần tìm thông tin Lịch sử &amp; Địa lí, em làm thế nào?</a:t>
-            </a:r>
-          </a:p>
-        </p:txBody>
-      </p:sp>
-      <p:sp>
-        <p:nvSpPr>
-          <p:cNvPr id="4" name="Rounded Rectangle 3"/>
+              </a:rPr>
+              <a:t>KHỞI ĐỘNG 🔍</a:t>
+            </a:r>
+          </a:p>
+        </p:txBody>
+      </p:sp>
+      <p:sp>
+        <p:nvSpPr>
+          <p:cNvPr id="4" name="TextBox 3"/>
+          <p:cNvSpPr txBox="1"/>
+          <p:nvPr/>
+        </p:nvSpPr>
+        <p:spPr>
+          <a:xfrm>
+            <a:off x="411480" y="1481328"/>
+            <a:ext cx="11338560" cy="411480"/>
+          </a:xfrm>
+          <a:prstGeom prst="rect">
+            <a:avLst/>
+          </a:prstGeom>
+          <a:noFill/>
+        </p:spPr>
+        <p:txBody>
+          <a:bodyPr wrap="square" tIns="36576" bIns="36576" lIns="54864" rIns="54864">
+            <a:spAutoFit/>
+          </a:bodyPr>
+          <a:lstStyle/>
+          <a:p>
+            <a:pPr algn="l"/>
+            <a:r>
+              <a:rPr sz="2300" b="1">
+                <a:solidFill>
+                  <a:srgbClr val="1E3A8A"/>
+                </a:solidFill>
+                <a:latin typeface="Arial"/>
+              </a:rPr>
+              <a:t>Tình huống: Giúp bạn Khoa và Minh tìm tài liệu Vua Hùng</a:t>
+            </a:r>
+          </a:p>
+        </p:txBody>
+      </p:sp>
+      <p:sp>
+        <p:nvSpPr>
+          <p:cNvPr id="5" name="TextBox 4"/>
+          <p:cNvSpPr txBox="1"/>
+          <p:nvPr/>
+        </p:nvSpPr>
+        <p:spPr>
+          <a:xfrm>
+            <a:off x="411480" y="1874519"/>
+            <a:ext cx="11338560" cy="274319"/>
+          </a:xfrm>
+          <a:prstGeom prst="rect">
+            <a:avLst/>
+          </a:prstGeom>
+          <a:noFill/>
+        </p:spPr>
+        <p:txBody>
+          <a:bodyPr wrap="square" tIns="36576" bIns="36576" lIns="54864" rIns="54864">
+            <a:spAutoFit/>
+          </a:bodyPr>
+          <a:lstStyle/>
+          <a:p>
+            <a:pPr algn="l"/>
+            <a:r>
+              <a:rPr sz="1400" b="0">
+                <a:solidFill>
+                  <a:srgbClr val="475569"/>
+                </a:solidFill>
+                <a:latin typeface="Arial"/>
+              </a:rPr>
+              <a:t>Cùng quan sát đoạn hội thoại mở đầu trong SGK Tin học 4 (trang 20)</a:t>
+            </a:r>
+          </a:p>
+        </p:txBody>
+      </p:sp>
+      <p:sp>
+        <p:nvSpPr>
+          <p:cNvPr id="6" name="Rounded Rectangle 5"/>
           <p:cNvSpPr/>
           <p:nvPr/>
         </p:nvSpPr>
         <p:spPr>
           <a:xfrm>
-            <a:off x="731520" y="2011680"/>
-            <a:ext cx="5486400" cy="3474720"/>
+            <a:off x="411480" y="2194560"/>
+            <a:ext cx="5303520" cy="3520440"/>
           </a:xfrm>
           <a:prstGeom prst="roundRect">
-            <a:avLst>
-              <a:gd name="adj" fmla="val 4000"/>
-            </a:avLst>
+            <a:avLst/>
           </a:prstGeom>
           <a:solidFill>
             <a:srgbClr val="FFFFFF"/>
           </a:solidFill>
-          <a:ln w="25400">
+          <a:ln w="12700">
             <a:solidFill>
-              <a:srgbClr val="0096D6"/>
+              <a:srgbClr val="CBD5E1"/>
             </a:solidFill>
           </a:ln>
         </p:spPr>
@@ -3748,14 +4783,14 @@
       </p:sp>
       <p:sp>
         <p:nvSpPr>
-          <p:cNvPr id="5" name="TextBox 4"/>
+          <p:cNvPr id="7" name="TextBox 6"/>
           <p:cNvSpPr txBox="1"/>
           <p:nvPr/>
         </p:nvSpPr>
         <p:spPr>
           <a:xfrm>
-            <a:off x="1005840" y="2286000"/>
-            <a:ext cx="4937760" cy="2926080"/>
+            <a:off x="594360" y="2331720"/>
+            <a:ext cx="4937760" cy="365759"/>
           </a:xfrm>
           <a:prstGeom prst="rect">
             <a:avLst/>
@@ -3763,47 +4798,190 @@
           <a:noFill/>
         </p:spPr>
         <p:txBody>
-          <a:bodyPr wrap="square">
+          <a:bodyPr wrap="square" tIns="36576" bIns="36576" lIns="54864" rIns="54864">
             <a:spAutoFit/>
           </a:bodyPr>
           <a:lstStyle/>
           <a:p>
-            <a:pPr algn="l">
-              <a:defRPr sz="1900" b="0">
-                <a:solidFill>
-                  <a:srgbClr val="282828"/>
+            <a:pPr algn="l"/>
+            <a:r>
+              <a:rPr sz="1600" b="1">
+                <a:solidFill>
+                  <a:srgbClr val="1E3A8A"/>
                 </a:solidFill>
                 <a:latin typeface="Arial"/>
-              </a:defRPr>
-            </a:pPr>
-            <a:r>
-              <a:t>📖 Tình huống bạn Khoa và Minh (SGK tr.18):</a:t>
-            </a:r>
-            <a:br/>
-            <a:br/>
-            <a:r>
-              <a:t>• Hai bạn cần tìm thông tin về "Các đời vua Hùng" để làm bài tập nhóm.</a:t>
-            </a:r>
-            <a:br/>
-            <a:br/>
-            <a:r>
-              <a:t>• Làm thế nào để tìm được tài liệu nhanh nhất trên Internet?</a:t>
-            </a:r>
-            <a:br/>
-            <a:r>
-              <a:t>👉 Sử dụng MÁY TÌM KIẾM (Search Engine) như Google, Bing!</a:t>
-            </a:r>
-            <a:br/>
-            <a:br/>
-            <a:r>
-              <a:t>Cùng tìm hiểu cách chọn từ khóa thông minh nhé!</a:t>
-            </a:r>
+              </a:rPr>
+              <a:t>💬 ĐỌC TÌNH HUỐNG DẪN DẮT:</a:t>
+            </a:r>
+          </a:p>
+        </p:txBody>
+      </p:sp>
+      <p:sp>
+        <p:nvSpPr>
+          <p:cNvPr id="8" name="TextBox 7"/>
+          <p:cNvSpPr txBox="1"/>
+          <p:nvPr/>
+        </p:nvSpPr>
+        <p:spPr>
+          <a:xfrm>
+            <a:off x="594360" y="2697480"/>
+            <a:ext cx="4937760" cy="1645919"/>
+          </a:xfrm>
+          <a:prstGeom prst="rect">
+            <a:avLst/>
+          </a:prstGeom>
+          <a:noFill/>
+        </p:spPr>
+        <p:txBody>
+          <a:bodyPr wrap="square" tIns="36576" bIns="36576" lIns="54864" rIns="54864">
+            <a:spAutoFit/>
+          </a:bodyPr>
+          <a:lstStyle/>
+          <a:p>
+            <a:pPr algn="l"/>
+            <a:r>
+              <a:rPr sz="1500" b="0">
+                <a:solidFill>
+                  <a:srgbClr val="0F172A"/>
+                </a:solidFill>
+                <a:latin typeface="Arial"/>
+              </a:rPr>
+              <a:t>• Bạn Khoa và Minh đang cần tìm thông tin về các đời Vua Hùng để hoàn thành bài tập nhóm môn Lịch sử &amp; Địa lí.
+• Khoa gợi ý: Cần xác định chủ đề trước, rồi chọn từ khóa phù hợp để tìm kiếm trên Internet.</a:t>
+            </a:r>
+          </a:p>
+        </p:txBody>
+      </p:sp>
+      <p:sp>
+        <p:nvSpPr>
+          <p:cNvPr id="9" name="Rounded Rectangle 8"/>
+          <p:cNvSpPr/>
+          <p:nvPr/>
+        </p:nvSpPr>
+        <p:spPr>
+          <a:xfrm>
+            <a:off x="594360" y="4434840"/>
+            <a:ext cx="4937760" cy="1143000"/>
+          </a:xfrm>
+          <a:prstGeom prst="roundRect">
+            <a:avLst/>
+          </a:prstGeom>
+          <a:solidFill>
+            <a:srgbClr val="FFF7ED"/>
+          </a:solidFill>
+          <a:ln w="12700">
+            <a:solidFill>
+              <a:srgbClr val="EA580C"/>
+            </a:solidFill>
+          </a:ln>
+        </p:spPr>
+        <p:style>
+          <a:lnRef idx="1">
+            <a:schemeClr val="accent1"/>
+          </a:lnRef>
+          <a:fillRef idx="3">
+            <a:schemeClr val="accent1"/>
+          </a:fillRef>
+          <a:effectRef idx="2">
+            <a:schemeClr val="accent1"/>
+          </a:effectRef>
+          <a:fontRef idx="minor">
+            <a:schemeClr val="lt1"/>
+          </a:fontRef>
+        </p:style>
+        <p:txBody>
+          <a:bodyPr rtlCol="0" anchor="ctr"/>
+          <a:lstStyle/>
+          <a:p>
+            <a:pPr algn="ctr"/>
+          </a:p>
+        </p:txBody>
+      </p:sp>
+      <p:sp>
+        <p:nvSpPr>
+          <p:cNvPr id="10" name="TextBox 9"/>
+          <p:cNvSpPr txBox="1"/>
+          <p:nvPr/>
+        </p:nvSpPr>
+        <p:spPr>
+          <a:xfrm>
+            <a:off x="731520" y="4526280"/>
+            <a:ext cx="4663440" cy="960119"/>
+          </a:xfrm>
+          <a:prstGeom prst="rect">
+            <a:avLst/>
+          </a:prstGeom>
+          <a:noFill/>
+        </p:spPr>
+        <p:txBody>
+          <a:bodyPr wrap="square" tIns="36576" bIns="36576" lIns="54864" rIns="54864">
+            <a:spAutoFit/>
+          </a:bodyPr>
+          <a:lstStyle/>
+          <a:p>
+            <a:pPr algn="l"/>
+            <a:r>
+              <a:rPr sz="1400" b="1">
+                <a:solidFill>
+                  <a:srgbClr val="EA580C"/>
+                </a:solidFill>
+                <a:latin typeface="Arial"/>
+              </a:rPr>
+              <a:t>❓ CÂU HỎI THẢO LUẬN:
+Theo em, hai bạn đang cần tìm thông tin theo chủ đề gì?
+Em hãy gợi ý từ khóa ngắn gọn để hai bạn tìm kiếm nhanh nhất?</a:t>
+            </a:r>
+          </a:p>
+        </p:txBody>
+      </p:sp>
+      <p:sp>
+        <p:nvSpPr>
+          <p:cNvPr id="11" name="Rounded Rectangle 10"/>
+          <p:cNvSpPr/>
+          <p:nvPr/>
+        </p:nvSpPr>
+        <p:spPr>
+          <a:xfrm>
+            <a:off x="5897880" y="2194560"/>
+            <a:ext cx="5879592" cy="3520440"/>
+          </a:xfrm>
+          <a:prstGeom prst="roundRect">
+            <a:avLst/>
+          </a:prstGeom>
+          <a:solidFill>
+            <a:srgbClr val="FFFFFF"/>
+          </a:solidFill>
+          <a:ln w="12700">
+            <a:solidFill>
+              <a:srgbClr val="CBD5E1"/>
+            </a:solidFill>
+          </a:ln>
+        </p:spPr>
+        <p:style>
+          <a:lnRef idx="1">
+            <a:schemeClr val="accent1"/>
+          </a:lnRef>
+          <a:fillRef idx="3">
+            <a:schemeClr val="accent1"/>
+          </a:fillRef>
+          <a:effectRef idx="2">
+            <a:schemeClr val="accent1"/>
+          </a:effectRef>
+          <a:fontRef idx="minor">
+            <a:schemeClr val="lt1"/>
+          </a:fontRef>
+        </p:style>
+        <p:txBody>
+          <a:bodyPr rtlCol="0" anchor="ctr"/>
+          <a:lstStyle/>
+          <a:p>
+            <a:pPr algn="ctr"/>
           </a:p>
         </p:txBody>
       </p:sp>
       <p:pic>
         <p:nvPicPr>
-          <p:cNvPr id="6" name="Picture 5" descr="p20.png"/>
+          <p:cNvPr id="12" name="Picture 11" descr="sgk_p20_khoa_minh_hoi_thoai.png"/>
           <p:cNvPicPr>
             <a:picLocks noChangeAspect="1"/>
           </p:cNvPicPr>
@@ -3817,8 +4995,8 @@
         </p:blipFill>
         <p:spPr>
           <a:xfrm>
-            <a:off x="6492240" y="2011680"/>
-            <a:ext cx="4937760" cy="3474720"/>
+            <a:off x="5989320" y="2286000"/>
+            <a:ext cx="5696712" cy="3337560"/>
           </a:xfrm>
           <a:prstGeom prst="rect">
             <a:avLst/>
@@ -3830,6 +5008,9 @@
   <p:clrMapOvr>
     <a:masterClrMapping/>
   </p:clrMapOvr>
+  <p:transition spd="med">
+    <p:push dir="l"/>
+  </p:transition>
 </p:sld>
 </file>
 
@@ -3851,16 +5032,14 @@
         </p:nvSpPr>
         <p:spPr>
           <a:xfrm>
-            <a:off x="731520" y="1115568"/>
-            <a:ext cx="2560320" cy="320040"/>
+            <a:off x="411480" y="1097280"/>
+            <a:ext cx="2926080" cy="329184"/>
           </a:xfrm>
           <a:prstGeom prst="roundRect">
-            <a:avLst>
-              <a:gd name="adj" fmla="val 50000"/>
-            </a:avLst>
+            <a:avLst/>
           </a:prstGeom>
           <a:solidFill>
-            <a:srgbClr val="0096D6"/>
+            <a:srgbClr val="1E3A8A"/>
           </a:solidFill>
           <a:ln>
             <a:noFill/>
@@ -3881,20 +5060,10 @@
           </a:fontRef>
         </p:style>
         <p:txBody>
-          <a:bodyPr rtlCol="0" anchor="ctr" wrap="none"/>
-          <a:lstStyle/>
-          <a:p>
-            <a:pPr algn="ctr">
-              <a:defRPr sz="1300" b="1">
-                <a:solidFill>
-                  <a:srgbClr val="FFFFFF"/>
-                </a:solidFill>
-                <a:latin typeface="Arial"/>
-              </a:defRPr>
-            </a:pPr>
-            <a:r>
-              <a:t>QUY TRÌNH 4 BƯỚC 🚀</a:t>
-            </a:r>
+          <a:bodyPr rtlCol="0" anchor="ctr"/>
+          <a:lstStyle/>
+          <a:p>
+            <a:pPr algn="ctr"/>
           </a:p>
         </p:txBody>
       </p:sp>
@@ -3906,8 +5075,8 @@
         </p:nvSpPr>
         <p:spPr>
           <a:xfrm>
-            <a:off x="731520" y="1463040"/>
-            <a:ext cx="10698480" cy="502920"/>
+            <a:off x="411480" y="1097280"/>
+            <a:ext cx="2926080" cy="329184"/>
           </a:xfrm>
           <a:prstGeom prst="rect">
             <a:avLst/>
@@ -3915,28 +5084,460 @@
           <a:noFill/>
         </p:spPr>
         <p:txBody>
-          <a:bodyPr wrap="square">
+          <a:bodyPr wrap="square" tIns="36576" bIns="36576" lIns="54864" rIns="54864">
             <a:spAutoFit/>
           </a:bodyPr>
           <a:lstStyle/>
           <a:p>
-            <a:pPr algn="l">
-              <a:defRPr sz="2400" b="1">
-                <a:solidFill>
-                  <a:srgbClr val="1A2744"/>
+            <a:pPr algn="ctr"/>
+            <a:r>
+              <a:rPr sz="1200" b="1">
+                <a:solidFill>
+                  <a:srgbClr val="FFFFFF"/>
                 </a:solidFill>
                 <a:latin typeface="Arial"/>
-              </a:defRPr>
-            </a:pPr>
-            <a:r>
-              <a:t>Các bước tìm kiếm thông tin bằng Google</a:t>
-            </a:r>
+              </a:rPr>
+              <a:t>KHÁM PHÁ KIẾN THỨC 🔑</a:t>
+            </a:r>
+          </a:p>
+        </p:txBody>
+      </p:sp>
+      <p:sp>
+        <p:nvSpPr>
+          <p:cNvPr id="4" name="TextBox 3"/>
+          <p:cNvSpPr txBox="1"/>
+          <p:nvPr/>
+        </p:nvSpPr>
+        <p:spPr>
+          <a:xfrm>
+            <a:off x="411480" y="1481328"/>
+            <a:ext cx="11338560" cy="411480"/>
+          </a:xfrm>
+          <a:prstGeom prst="rect">
+            <a:avLst/>
+          </a:prstGeom>
+          <a:noFill/>
+        </p:spPr>
+        <p:txBody>
+          <a:bodyPr wrap="square" tIns="36576" bIns="36576" lIns="54864" rIns="54864">
+            <a:spAutoFit/>
+          </a:bodyPr>
+          <a:lstStyle/>
+          <a:p>
+            <a:pPr algn="l"/>
+            <a:r>
+              <a:rPr sz="2300" b="1">
+                <a:solidFill>
+                  <a:srgbClr val="1E3A8A"/>
+                </a:solidFill>
+                <a:latin typeface="Arial"/>
+              </a:rPr>
+              <a:t>1. Từ khóa (Keyword) là gì?</a:t>
+            </a:r>
+          </a:p>
+        </p:txBody>
+      </p:sp>
+      <p:sp>
+        <p:nvSpPr>
+          <p:cNvPr id="5" name="TextBox 4"/>
+          <p:cNvSpPr txBox="1"/>
+          <p:nvPr/>
+        </p:nvSpPr>
+        <p:spPr>
+          <a:xfrm>
+            <a:off x="411480" y="1874519"/>
+            <a:ext cx="11338560" cy="274319"/>
+          </a:xfrm>
+          <a:prstGeom prst="rect">
+            <a:avLst/>
+          </a:prstGeom>
+          <a:noFill/>
+        </p:spPr>
+        <p:txBody>
+          <a:bodyPr wrap="square" tIns="36576" bIns="36576" lIns="54864" rIns="54864">
+            <a:spAutoFit/>
+          </a:bodyPr>
+          <a:lstStyle/>
+          <a:p>
+            <a:pPr algn="l"/>
+            <a:r>
+              <a:rPr sz="1400" b="0">
+                <a:solidFill>
+                  <a:srgbClr val="475569"/>
+                </a:solidFill>
+                <a:latin typeface="Arial"/>
+              </a:rPr>
+              <a:t>Khái niệm cốt lõi giúp học sinh tìm kiếm chính xác điều mình mong muốn</a:t>
+            </a:r>
+          </a:p>
+        </p:txBody>
+      </p:sp>
+      <p:sp>
+        <p:nvSpPr>
+          <p:cNvPr id="6" name="Rounded Rectangle 5"/>
+          <p:cNvSpPr/>
+          <p:nvPr/>
+        </p:nvSpPr>
+        <p:spPr>
+          <a:xfrm>
+            <a:off x="411480" y="2194560"/>
+            <a:ext cx="6035040" cy="1554479"/>
+          </a:xfrm>
+          <a:prstGeom prst="roundRect">
+            <a:avLst/>
+          </a:prstGeom>
+          <a:solidFill>
+            <a:srgbClr val="FFFFFF"/>
+          </a:solidFill>
+          <a:ln w="25400">
+            <a:solidFill>
+              <a:srgbClr val="2563EB"/>
+            </a:solidFill>
+          </a:ln>
+        </p:spPr>
+        <p:style>
+          <a:lnRef idx="1">
+            <a:schemeClr val="accent1"/>
+          </a:lnRef>
+          <a:fillRef idx="3">
+            <a:schemeClr val="accent1"/>
+          </a:fillRef>
+          <a:effectRef idx="2">
+            <a:schemeClr val="accent1"/>
+          </a:effectRef>
+          <a:fontRef idx="minor">
+            <a:schemeClr val="lt1"/>
+          </a:fontRef>
+        </p:style>
+        <p:txBody>
+          <a:bodyPr rtlCol="0" anchor="ctr"/>
+          <a:lstStyle/>
+          <a:p>
+            <a:pPr algn="ctr"/>
+          </a:p>
+        </p:txBody>
+      </p:sp>
+      <p:sp>
+        <p:nvSpPr>
+          <p:cNvPr id="7" name="Rounded Rectangle 6"/>
+          <p:cNvSpPr/>
+          <p:nvPr/>
+        </p:nvSpPr>
+        <p:spPr>
+          <a:xfrm>
+            <a:off x="411480" y="2194560"/>
+            <a:ext cx="182880" cy="1554479"/>
+          </a:xfrm>
+          <a:prstGeom prst="roundRect">
+            <a:avLst/>
+          </a:prstGeom>
+          <a:solidFill>
+            <a:srgbClr val="2563EB"/>
+          </a:solidFill>
+          <a:ln>
+            <a:noFill/>
+          </a:ln>
+        </p:spPr>
+        <p:style>
+          <a:lnRef idx="1">
+            <a:schemeClr val="accent1"/>
+          </a:lnRef>
+          <a:fillRef idx="3">
+            <a:schemeClr val="accent1"/>
+          </a:fillRef>
+          <a:effectRef idx="2">
+            <a:schemeClr val="accent1"/>
+          </a:effectRef>
+          <a:fontRef idx="minor">
+            <a:schemeClr val="lt1"/>
+          </a:fontRef>
+        </p:style>
+        <p:txBody>
+          <a:bodyPr rtlCol="0" anchor="ctr"/>
+          <a:lstStyle/>
+          <a:p>
+            <a:pPr algn="ctr"/>
+          </a:p>
+        </p:txBody>
+      </p:sp>
+      <p:sp>
+        <p:nvSpPr>
+          <p:cNvPr id="8" name="TextBox 7"/>
+          <p:cNvSpPr txBox="1"/>
+          <p:nvPr/>
+        </p:nvSpPr>
+        <p:spPr>
+          <a:xfrm>
+            <a:off x="777240" y="2331720"/>
+            <a:ext cx="5486400" cy="320040"/>
+          </a:xfrm>
+          <a:prstGeom prst="rect">
+            <a:avLst/>
+          </a:prstGeom>
+          <a:noFill/>
+        </p:spPr>
+        <p:txBody>
+          <a:bodyPr wrap="square" tIns="36576" bIns="36576" lIns="54864" rIns="54864">
+            <a:spAutoFit/>
+          </a:bodyPr>
+          <a:lstStyle/>
+          <a:p>
+            <a:pPr algn="l"/>
+            <a:r>
+              <a:rPr sz="1700" b="1">
+                <a:solidFill>
+                  <a:srgbClr val="1E3A8A"/>
+                </a:solidFill>
+                <a:latin typeface="Arial"/>
+              </a:rPr>
+              <a:t>📌 Khái niệm Từ khóa (Keyword):</a:t>
+            </a:r>
+          </a:p>
+        </p:txBody>
+      </p:sp>
+      <p:sp>
+        <p:nvSpPr>
+          <p:cNvPr id="9" name="TextBox 8"/>
+          <p:cNvSpPr txBox="1"/>
+          <p:nvPr/>
+        </p:nvSpPr>
+        <p:spPr>
+          <a:xfrm>
+            <a:off x="777240" y="2697480"/>
+            <a:ext cx="5486400" cy="914400"/>
+          </a:xfrm>
+          <a:prstGeom prst="rect">
+            <a:avLst/>
+          </a:prstGeom>
+          <a:noFill/>
+        </p:spPr>
+        <p:txBody>
+          <a:bodyPr wrap="square" tIns="36576" bIns="36576" lIns="54864" rIns="54864">
+            <a:spAutoFit/>
+          </a:bodyPr>
+          <a:lstStyle/>
+          <a:p>
+            <a:pPr algn="l"/>
+            <a:r>
+              <a:rPr sz="1600" b="0">
+                <a:solidFill>
+                  <a:srgbClr val="0F172A"/>
+                </a:solidFill>
+                <a:latin typeface="Arial"/>
+              </a:rPr>
+              <a:t>Từ khóa là từ hoặc cụm từ ngắn gọn thể hiện nội dung thông tin chúng ta muốn tìm kiếm trên môi trường số.</a:t>
+            </a:r>
+          </a:p>
+        </p:txBody>
+      </p:sp>
+      <p:sp>
+        <p:nvSpPr>
+          <p:cNvPr id="10" name="Rounded Rectangle 9"/>
+          <p:cNvSpPr/>
+          <p:nvPr/>
+        </p:nvSpPr>
+        <p:spPr>
+          <a:xfrm>
+            <a:off x="411480" y="3931920"/>
+            <a:ext cx="6035040" cy="1783080"/>
+          </a:xfrm>
+          <a:prstGeom prst="roundRect">
+            <a:avLst/>
+          </a:prstGeom>
+          <a:solidFill>
+            <a:srgbClr val="FFFFFF"/>
+          </a:solidFill>
+          <a:ln w="12700">
+            <a:solidFill>
+              <a:srgbClr val="CBD5E1"/>
+            </a:solidFill>
+          </a:ln>
+        </p:spPr>
+        <p:style>
+          <a:lnRef idx="1">
+            <a:schemeClr val="accent1"/>
+          </a:lnRef>
+          <a:fillRef idx="3">
+            <a:schemeClr val="accent1"/>
+          </a:fillRef>
+          <a:effectRef idx="2">
+            <a:schemeClr val="accent1"/>
+          </a:effectRef>
+          <a:fontRef idx="minor">
+            <a:schemeClr val="lt1"/>
+          </a:fontRef>
+        </p:style>
+        <p:txBody>
+          <a:bodyPr rtlCol="0" anchor="ctr"/>
+          <a:lstStyle/>
+          <a:p>
+            <a:pPr algn="ctr"/>
+          </a:p>
+        </p:txBody>
+      </p:sp>
+      <p:sp>
+        <p:nvSpPr>
+          <p:cNvPr id="11" name="Rounded Rectangle 10"/>
+          <p:cNvSpPr/>
+          <p:nvPr/>
+        </p:nvSpPr>
+        <p:spPr>
+          <a:xfrm>
+            <a:off x="411480" y="3931920"/>
+            <a:ext cx="182880" cy="1783080"/>
+          </a:xfrm>
+          <a:prstGeom prst="roundRect">
+            <a:avLst/>
+          </a:prstGeom>
+          <a:solidFill>
+            <a:srgbClr val="EA580C"/>
+          </a:solidFill>
+          <a:ln>
+            <a:noFill/>
+          </a:ln>
+        </p:spPr>
+        <p:style>
+          <a:lnRef idx="1">
+            <a:schemeClr val="accent1"/>
+          </a:lnRef>
+          <a:fillRef idx="3">
+            <a:schemeClr val="accent1"/>
+          </a:fillRef>
+          <a:effectRef idx="2">
+            <a:schemeClr val="accent1"/>
+          </a:effectRef>
+          <a:fontRef idx="minor">
+            <a:schemeClr val="lt1"/>
+          </a:fontRef>
+        </p:style>
+        <p:txBody>
+          <a:bodyPr rtlCol="0" anchor="ctr"/>
+          <a:lstStyle/>
+          <a:p>
+            <a:pPr algn="ctr"/>
+          </a:p>
+        </p:txBody>
+      </p:sp>
+      <p:sp>
+        <p:nvSpPr>
+          <p:cNvPr id="12" name="TextBox 11"/>
+          <p:cNvSpPr txBox="1"/>
+          <p:nvPr/>
+        </p:nvSpPr>
+        <p:spPr>
+          <a:xfrm>
+            <a:off x="777240" y="4069080"/>
+            <a:ext cx="5486400" cy="320039"/>
+          </a:xfrm>
+          <a:prstGeom prst="rect">
+            <a:avLst/>
+          </a:prstGeom>
+          <a:noFill/>
+        </p:spPr>
+        <p:txBody>
+          <a:bodyPr wrap="square" tIns="36576" bIns="36576" lIns="54864" rIns="54864">
+            <a:spAutoFit/>
+          </a:bodyPr>
+          <a:lstStyle/>
+          <a:p>
+            <a:pPr algn="l"/>
+            <a:r>
+              <a:rPr sz="1700" b="1">
+                <a:solidFill>
+                  <a:srgbClr val="EA580C"/>
+                </a:solidFill>
+                <a:latin typeface="Arial"/>
+              </a:rPr>
+              <a:t>💡 Ví dụ lựa chọn từ khóa:</a:t>
+            </a:r>
+          </a:p>
+        </p:txBody>
+      </p:sp>
+      <p:sp>
+        <p:nvSpPr>
+          <p:cNvPr id="13" name="TextBox 12"/>
+          <p:cNvSpPr txBox="1"/>
+          <p:nvPr/>
+        </p:nvSpPr>
+        <p:spPr>
+          <a:xfrm>
+            <a:off x="777240" y="4434840"/>
+            <a:ext cx="5486400" cy="1188719"/>
+          </a:xfrm>
+          <a:prstGeom prst="rect">
+            <a:avLst/>
+          </a:prstGeom>
+          <a:noFill/>
+        </p:spPr>
+        <p:txBody>
+          <a:bodyPr wrap="square" tIns="36576" bIns="36576" lIns="54864" rIns="54864">
+            <a:spAutoFit/>
+          </a:bodyPr>
+          <a:lstStyle/>
+          <a:p>
+            <a:pPr algn="l"/>
+            <a:r>
+              <a:rPr sz="1500" b="0">
+                <a:solidFill>
+                  <a:srgbClr val="0F172A"/>
+                </a:solidFill>
+                <a:latin typeface="Arial"/>
+              </a:rPr>
+              <a:t>• Chủ đề: Tìm hiểu về các vị vua thời Hùng Vương
+• Từ khóa gợi ý: "Các đời vua Hùng" hoặc "Vua Hùng"
+👉 Chú ý: Từ khóa càng rõ ràng, kết quả tìm kiếm càng chính xác!</a:t>
+            </a:r>
+          </a:p>
+        </p:txBody>
+      </p:sp>
+      <p:sp>
+        <p:nvSpPr>
+          <p:cNvPr id="14" name="Rounded Rectangle 13"/>
+          <p:cNvSpPr/>
+          <p:nvPr/>
+        </p:nvSpPr>
+        <p:spPr>
+          <a:xfrm>
+            <a:off x="6675120" y="2194560"/>
+            <a:ext cx="5102352" cy="3520440"/>
+          </a:xfrm>
+          <a:prstGeom prst="roundRect">
+            <a:avLst/>
+          </a:prstGeom>
+          <a:solidFill>
+            <a:srgbClr val="FFFFFF"/>
+          </a:solidFill>
+          <a:ln w="12700">
+            <a:solidFill>
+              <a:srgbClr val="CBD5E1"/>
+            </a:solidFill>
+          </a:ln>
+        </p:spPr>
+        <p:style>
+          <a:lnRef idx="1">
+            <a:schemeClr val="accent1"/>
+          </a:lnRef>
+          <a:fillRef idx="3">
+            <a:schemeClr val="accent1"/>
+          </a:fillRef>
+          <a:effectRef idx="2">
+            <a:schemeClr val="accent1"/>
+          </a:effectRef>
+          <a:fontRef idx="minor">
+            <a:schemeClr val="lt1"/>
+          </a:fontRef>
+        </p:style>
+        <p:txBody>
+          <a:bodyPr rtlCol="0" anchor="ctr"/>
+          <a:lstStyle/>
+          <a:p>
+            <a:pPr algn="ctr"/>
           </a:p>
         </p:txBody>
       </p:sp>
       <p:pic>
         <p:nvPicPr>
-          <p:cNvPr id="4" name="Picture 3" descr="search_steps_diagram_vn.png"/>
+          <p:cNvPr id="15" name="Picture 14" descr="keyword_treasure_key.jpg"/>
           <p:cNvPicPr>
             <a:picLocks noChangeAspect="1"/>
           </p:cNvPicPr>
@@ -3950,8 +5551,8 @@
         </p:blipFill>
         <p:spPr>
           <a:xfrm>
-            <a:off x="731520" y="2011680"/>
-            <a:ext cx="10698480" cy="3566160"/>
+            <a:off x="6766560" y="2286000"/>
+            <a:ext cx="4919472" cy="3337560"/>
           </a:xfrm>
           <a:prstGeom prst="rect">
             <a:avLst/>
@@ -3963,6 +5564,9 @@
   <p:clrMapOvr>
     <a:masterClrMapping/>
   </p:clrMapOvr>
+  <p:transition spd="med">
+    <p:fade/>
+  </p:transition>
 </p:sld>
 </file>
 
@@ -3984,16 +5588,14 @@
         </p:nvSpPr>
         <p:spPr>
           <a:xfrm>
-            <a:off x="731520" y="1115568"/>
-            <a:ext cx="2560320" cy="320040"/>
+            <a:off x="411480" y="1097280"/>
+            <a:ext cx="2688336" cy="329184"/>
           </a:xfrm>
           <a:prstGeom prst="roundRect">
-            <a:avLst>
-              <a:gd name="adj" fmla="val 50000"/>
-            </a:avLst>
+            <a:avLst/>
           </a:prstGeom>
           <a:solidFill>
-            <a:srgbClr val="0096D6"/>
+            <a:srgbClr val="1E3A8A"/>
           </a:solidFill>
           <a:ln>
             <a:noFill/>
@@ -4014,20 +5616,10 @@
           </a:fontRef>
         </p:style>
         <p:txBody>
-          <a:bodyPr rtlCol="0" anchor="ctr" wrap="none"/>
-          <a:lstStyle/>
-          <a:p>
-            <a:pPr algn="ctr">
-              <a:defRPr sz="1300" b="1">
-                <a:solidFill>
-                  <a:srgbClr val="FFFFFF"/>
-                </a:solidFill>
-                <a:latin typeface="Arial"/>
-              </a:defRPr>
-            </a:pPr>
-            <a:r>
-              <a:t>LUYỆN TẬP 🎯</a:t>
-            </a:r>
+          <a:bodyPr rtlCol="0" anchor="ctr"/>
+          <a:lstStyle/>
+          <a:p>
+            <a:pPr algn="ctr"/>
           </a:p>
         </p:txBody>
       </p:sp>
@@ -4039,8 +5631,8 @@
         </p:nvSpPr>
         <p:spPr>
           <a:xfrm>
-            <a:off x="731520" y="1463040"/>
-            <a:ext cx="10698480" cy="502920"/>
+            <a:off x="411480" y="1097280"/>
+            <a:ext cx="2688336" cy="329184"/>
           </a:xfrm>
           <a:prstGeom prst="rect">
             <a:avLst/>
@@ -4048,47 +5640,114 @@
           <a:noFill/>
         </p:spPr>
         <p:txBody>
-          <a:bodyPr wrap="square">
+          <a:bodyPr wrap="square" tIns="36576" bIns="36576" lIns="54864" rIns="54864">
             <a:spAutoFit/>
           </a:bodyPr>
           <a:lstStyle/>
           <a:p>
-            <a:pPr algn="l">
-              <a:defRPr sz="2400" b="1">
-                <a:solidFill>
-                  <a:srgbClr val="1A2744"/>
+            <a:pPr algn="ctr"/>
+            <a:r>
+              <a:rPr sz="1200" b="1">
+                <a:solidFill>
+                  <a:srgbClr val="FFFFFF"/>
                 </a:solidFill>
                 <a:latin typeface="Arial"/>
-              </a:defRPr>
-            </a:pPr>
-            <a:r>
-              <a:t>Bài tập chọn từ khóa chuẩn xác (SGK tr.21)</a:t>
-            </a:r>
-          </a:p>
-        </p:txBody>
-      </p:sp>
-      <p:sp>
-        <p:nvSpPr>
-          <p:cNvPr id="4" name="Rounded Rectangle 3"/>
+              </a:rPr>
+              <a:t>CÔNG CỤ TÌM KIẾM 🌐</a:t>
+            </a:r>
+          </a:p>
+        </p:txBody>
+      </p:sp>
+      <p:sp>
+        <p:nvSpPr>
+          <p:cNvPr id="4" name="TextBox 3"/>
+          <p:cNvSpPr txBox="1"/>
+          <p:nvPr/>
+        </p:nvSpPr>
+        <p:spPr>
+          <a:xfrm>
+            <a:off x="411480" y="1481328"/>
+            <a:ext cx="11338560" cy="411480"/>
+          </a:xfrm>
+          <a:prstGeom prst="rect">
+            <a:avLst/>
+          </a:prstGeom>
+          <a:noFill/>
+        </p:spPr>
+        <p:txBody>
+          <a:bodyPr wrap="square" tIns="36576" bIns="36576" lIns="54864" rIns="54864">
+            <a:spAutoFit/>
+          </a:bodyPr>
+          <a:lstStyle/>
+          <a:p>
+            <a:pPr algn="l"/>
+            <a:r>
+              <a:rPr sz="2300" b="1">
+                <a:solidFill>
+                  <a:srgbClr val="1E3A8A"/>
+                </a:solidFill>
+                <a:latin typeface="Arial"/>
+              </a:rPr>
+              <a:t>2. Máy tìm kiếm (Search Engine) là gì?</a:t>
+            </a:r>
+          </a:p>
+        </p:txBody>
+      </p:sp>
+      <p:sp>
+        <p:nvSpPr>
+          <p:cNvPr id="5" name="TextBox 4"/>
+          <p:cNvSpPr txBox="1"/>
+          <p:nvPr/>
+        </p:nvSpPr>
+        <p:spPr>
+          <a:xfrm>
+            <a:off x="411480" y="1874519"/>
+            <a:ext cx="11338560" cy="274319"/>
+          </a:xfrm>
+          <a:prstGeom prst="rect">
+            <a:avLst/>
+          </a:prstGeom>
+          <a:noFill/>
+        </p:spPr>
+        <p:txBody>
+          <a:bodyPr wrap="square" tIns="36576" bIns="36576" lIns="54864" rIns="54864">
+            <a:spAutoFit/>
+          </a:bodyPr>
+          <a:lstStyle/>
+          <a:p>
+            <a:pPr algn="l"/>
+            <a:r>
+              <a:rPr sz="1400" b="0">
+                <a:solidFill>
+                  <a:srgbClr val="475569"/>
+                </a:solidFill>
+                <a:latin typeface="Arial"/>
+              </a:rPr>
+              <a:t>Những trang web chuyên dụng giúp em khám phá kho tàng tri thức trên Internet</a:t>
+            </a:r>
+          </a:p>
+        </p:txBody>
+      </p:sp>
+      <p:sp>
+        <p:nvSpPr>
+          <p:cNvPr id="6" name="Rounded Rectangle 5"/>
           <p:cNvSpPr/>
           <p:nvPr/>
         </p:nvSpPr>
         <p:spPr>
           <a:xfrm>
-            <a:off x="731520" y="2011680"/>
-            <a:ext cx="10698480" cy="1005840"/>
+            <a:off x="411480" y="2194560"/>
+            <a:ext cx="5303520" cy="1188720"/>
           </a:xfrm>
           <a:prstGeom prst="roundRect">
-            <a:avLst>
-              <a:gd name="adj" fmla="val 4000"/>
-            </a:avLst>
+            <a:avLst/>
           </a:prstGeom>
           <a:solidFill>
-            <a:srgbClr val="F5F8FF"/>
+            <a:srgbClr val="DBEAFE"/>
           </a:solidFill>
-          <a:ln w="25400">
+          <a:ln w="12700">
             <a:solidFill>
-              <a:srgbClr val="0096D6"/>
+              <a:srgbClr val="2563EB"/>
             </a:solidFill>
           </a:ln>
         </p:spPr>
@@ -4116,14 +5775,14 @@
       </p:sp>
       <p:sp>
         <p:nvSpPr>
-          <p:cNvPr id="5" name="TextBox 4"/>
+          <p:cNvPr id="7" name="TextBox 6"/>
           <p:cNvSpPr txBox="1"/>
           <p:nvPr/>
         </p:nvSpPr>
         <p:spPr>
           <a:xfrm>
-            <a:off x="1005840" y="2148840"/>
-            <a:ext cx="10149840" cy="731520"/>
+            <a:off x="594360" y="2267712"/>
+            <a:ext cx="4937760" cy="1051560"/>
           </a:xfrm>
           <a:prstGeom prst="rect">
             <a:avLst/>
@@ -4131,47 +5790,45 @@
           <a:noFill/>
         </p:spPr>
         <p:txBody>
-          <a:bodyPr wrap="square">
+          <a:bodyPr wrap="square" tIns="36576" bIns="36576" lIns="54864" rIns="54864">
             <a:spAutoFit/>
           </a:bodyPr>
           <a:lstStyle/>
           <a:p>
-            <a:pPr algn="l">
-              <a:defRPr sz="1900" b="1">
-                <a:solidFill>
-                  <a:srgbClr val="1A2744"/>
+            <a:pPr algn="l"/>
+            <a:r>
+              <a:rPr sz="1500" b="1">
+                <a:solidFill>
+                  <a:srgbClr val="1E3A8A"/>
                 </a:solidFill>
                 <a:latin typeface="Arial"/>
-              </a:defRPr>
-            </a:pPr>
-            <a:r>
-              <a:t>❓ Đề bài: Muốn tìm hướng dẫn "Cách làm diều giấy", em sẽ chọn từ khóa nào sau đây?</a:t>
-            </a:r>
-          </a:p>
-        </p:txBody>
-      </p:sp>
-      <p:sp>
-        <p:nvSpPr>
-          <p:cNvPr id="6" name="Rounded Rectangle 5"/>
+              </a:rPr>
+              <a:t>🌟 ĐỊNH NGHĨA MÁY TÌM KIẾM:
+Máy tìm kiếm là trang web đặc biệt giúp người sử dụng tìm kiếm thông tin trên Internet nhanh chóng bằng từ khóa.</a:t>
+            </a:r>
+          </a:p>
+        </p:txBody>
+      </p:sp>
+      <p:sp>
+        <p:nvSpPr>
+          <p:cNvPr id="8" name="Rounded Rectangle 7"/>
           <p:cNvSpPr/>
           <p:nvPr/>
         </p:nvSpPr>
         <p:spPr>
           <a:xfrm>
-            <a:off x="731520" y="3200400"/>
-            <a:ext cx="5257800" cy="1005840"/>
+            <a:off x="411480" y="3520440"/>
+            <a:ext cx="5303520" cy="2194560"/>
           </a:xfrm>
           <a:prstGeom prst="roundRect">
-            <a:avLst>
-              <a:gd name="adj" fmla="val 4000"/>
-            </a:avLst>
+            <a:avLst/>
           </a:prstGeom>
           <a:solidFill>
             <a:srgbClr val="FFFFFF"/>
           </a:solidFill>
           <a:ln w="12700">
             <a:solidFill>
-              <a:srgbClr val="646464"/>
+              <a:srgbClr val="CBD5E1"/>
             </a:solidFill>
           </a:ln>
         </p:spPr>
@@ -4197,64 +5854,50 @@
           </a:p>
         </p:txBody>
       </p:sp>
-      <p:sp>
-        <p:nvSpPr>
-          <p:cNvPr id="7" name="TextBox 6"/>
-          <p:cNvSpPr txBox="1"/>
-          <p:nvPr/>
-        </p:nvSpPr>
-        <p:spPr>
-          <a:xfrm>
-            <a:off x="914400" y="3383280"/>
-            <a:ext cx="4846320" cy="640080"/>
-          </a:xfrm>
-          <a:prstGeom prst="rect">
-            <a:avLst/>
-          </a:prstGeom>
-          <a:noFill/>
-        </p:spPr>
-        <p:txBody>
-          <a:bodyPr wrap="square">
-            <a:spAutoFit/>
-          </a:bodyPr>
-          <a:lstStyle/>
-          <a:p>
-            <a:pPr algn="l">
-              <a:defRPr sz="1900" b="1">
-                <a:solidFill>
-                  <a:srgbClr val="646464"/>
-                </a:solidFill>
-                <a:latin typeface="Arial"/>
-              </a:defRPr>
-            </a:pPr>
-            <a:r>
-              <a:t>A. Làm đồ chơi (Quá chung chung)</a:t>
-            </a:r>
-          </a:p>
-        </p:txBody>
-      </p:sp>
-      <p:sp>
-        <p:nvSpPr>
-          <p:cNvPr id="8" name="Rounded Rectangle 7"/>
+      <p:pic>
+        <p:nvPicPr>
+          <p:cNvPr id="9" name="Picture 8" descr="sgk_p21_google_search_ui.png"/>
+          <p:cNvPicPr>
+            <a:picLocks noChangeAspect="1"/>
+          </p:cNvPicPr>
+          <p:nvPr/>
+        </p:nvPicPr>
+        <p:blipFill>
+          <a:blip r:embed="rId2"/>
+          <a:stretch>
+            <a:fillRect/>
+          </a:stretch>
+        </p:blipFill>
+        <p:spPr>
+          <a:xfrm>
+            <a:off x="502920" y="3611880"/>
+            <a:ext cx="5120640" cy="2011680"/>
+          </a:xfrm>
+          <a:prstGeom prst="rect">
+            <a:avLst/>
+          </a:prstGeom>
+        </p:spPr>
+      </p:pic>
+      <p:sp>
+        <p:nvSpPr>
+          <p:cNvPr id="10" name="Rounded Rectangle 9"/>
           <p:cNvSpPr/>
           <p:nvPr/>
         </p:nvSpPr>
         <p:spPr>
           <a:xfrm>
-            <a:off x="6172200" y="3200400"/>
-            <a:ext cx="5257800" cy="1005840"/>
+            <a:off x="5989320" y="2194560"/>
+            <a:ext cx="5788152" cy="1051560"/>
           </a:xfrm>
           <a:prstGeom prst="roundRect">
-            <a:avLst>
-              <a:gd name="adj" fmla="val 4000"/>
-            </a:avLst>
+            <a:avLst/>
           </a:prstGeom>
           <a:solidFill>
             <a:srgbClr val="FFFFFF"/>
           </a:solidFill>
-          <a:ln w="12700">
+          <a:ln w="25400">
             <a:solidFill>
-              <a:srgbClr val="646464"/>
+              <a:srgbClr val="1E3A8A"/>
             </a:solidFill>
           </a:ln>
         </p:spPr>
@@ -4282,63 +5925,23 @@
       </p:sp>
       <p:sp>
         <p:nvSpPr>
-          <p:cNvPr id="9" name="TextBox 8"/>
-          <p:cNvSpPr txBox="1"/>
-          <p:nvPr/>
-        </p:nvSpPr>
-        <p:spPr>
-          <a:xfrm>
-            <a:off x="6355080" y="3383280"/>
-            <a:ext cx="4846320" cy="640080"/>
-          </a:xfrm>
-          <a:prstGeom prst="rect">
-            <a:avLst/>
-          </a:prstGeom>
-          <a:noFill/>
-        </p:spPr>
-        <p:txBody>
-          <a:bodyPr wrap="square">
-            <a:spAutoFit/>
-          </a:bodyPr>
-          <a:lstStyle/>
-          <a:p>
-            <a:pPr algn="l">
-              <a:defRPr sz="1900" b="1">
-                <a:solidFill>
-                  <a:srgbClr val="646464"/>
-                </a:solidFill>
-                <a:latin typeface="Arial"/>
-              </a:defRPr>
-            </a:pPr>
-            <a:r>
-              <a:t>B. Diều (Quá ngắn, nhiều kết quả thừa)</a:t>
-            </a:r>
-          </a:p>
-        </p:txBody>
-      </p:sp>
-      <p:sp>
-        <p:nvSpPr>
-          <p:cNvPr id="10" name="Rounded Rectangle 9"/>
+          <p:cNvPr id="11" name="Rounded Rectangle 10"/>
           <p:cNvSpPr/>
           <p:nvPr/>
         </p:nvSpPr>
         <p:spPr>
           <a:xfrm>
-            <a:off x="731520" y="4389120"/>
-            <a:ext cx="5257800" cy="1005840"/>
+            <a:off x="5989320" y="2194560"/>
+            <a:ext cx="182880" cy="1051560"/>
           </a:xfrm>
           <a:prstGeom prst="roundRect">
-            <a:avLst>
-              <a:gd name="adj" fmla="val 4000"/>
-            </a:avLst>
+            <a:avLst/>
           </a:prstGeom>
           <a:solidFill>
-            <a:srgbClr val="E6FAEB"/>
+            <a:srgbClr val="1E3A8A"/>
           </a:solidFill>
-          <a:ln w="25400">
-            <a:solidFill>
-              <a:srgbClr val="28A745"/>
-            </a:solidFill>
+          <a:ln>
+            <a:noFill/>
           </a:ln>
         </p:spPr>
         <p:style>
@@ -4365,14 +5968,14 @@
       </p:sp>
       <p:sp>
         <p:nvSpPr>
-          <p:cNvPr id="11" name="TextBox 10"/>
+          <p:cNvPr id="12" name="TextBox 11"/>
           <p:cNvSpPr txBox="1"/>
           <p:nvPr/>
         </p:nvSpPr>
         <p:spPr>
           <a:xfrm>
-            <a:off x="914400" y="4572000"/>
-            <a:ext cx="4846320" cy="640080"/>
+            <a:off x="6355080" y="2331720"/>
+            <a:ext cx="5303520" cy="320040"/>
           </a:xfrm>
           <a:prstGeom prst="rect">
             <a:avLst/>
@@ -4380,47 +5983,79 @@
           <a:noFill/>
         </p:spPr>
         <p:txBody>
-          <a:bodyPr wrap="square">
+          <a:bodyPr wrap="square" tIns="36576" bIns="36576" lIns="54864" rIns="54864">
             <a:spAutoFit/>
           </a:bodyPr>
           <a:lstStyle/>
           <a:p>
-            <a:pPr algn="l">
-              <a:defRPr sz="1900" b="1">
-                <a:solidFill>
-                  <a:srgbClr val="28A745"/>
+            <a:pPr algn="l"/>
+            <a:r>
+              <a:rPr sz="1700" b="1">
+                <a:solidFill>
+                  <a:srgbClr val="1E3A8A"/>
                 </a:solidFill>
                 <a:latin typeface="Arial"/>
-              </a:defRPr>
-            </a:pPr>
-            <a:r>
-              <a:t>C. Cách làm diều giấy ✅ (Chính xác nhất!)</a:t>
-            </a:r>
-          </a:p>
-        </p:txBody>
-      </p:sp>
-      <p:sp>
-        <p:nvSpPr>
-          <p:cNvPr id="12" name="Rounded Rectangle 11"/>
+              </a:rPr>
+              <a:t>1. Google (google.com)</a:t>
+            </a:r>
+          </a:p>
+        </p:txBody>
+      </p:sp>
+      <p:sp>
+        <p:nvSpPr>
+          <p:cNvPr id="13" name="TextBox 12"/>
+          <p:cNvSpPr txBox="1"/>
+          <p:nvPr/>
+        </p:nvSpPr>
+        <p:spPr>
+          <a:xfrm>
+            <a:off x="6355080" y="2697480"/>
+            <a:ext cx="5303520" cy="457200"/>
+          </a:xfrm>
+          <a:prstGeom prst="rect">
+            <a:avLst/>
+          </a:prstGeom>
+          <a:noFill/>
+        </p:spPr>
+        <p:txBody>
+          <a:bodyPr wrap="square" tIns="36576" bIns="36576" lIns="54864" rIns="54864">
+            <a:spAutoFit/>
+          </a:bodyPr>
+          <a:lstStyle/>
+          <a:p>
+            <a:pPr algn="l"/>
+            <a:r>
+              <a:rPr sz="1400" b="0">
+                <a:solidFill>
+                  <a:srgbClr val="0F172A"/>
+                </a:solidFill>
+                <a:latin typeface="Arial"/>
+              </a:rPr>
+              <a:t>Phổ biến &amp; thông dụng nhất toàn cầu 🌍</a:t>
+            </a:r>
+          </a:p>
+        </p:txBody>
+      </p:sp>
+      <p:sp>
+        <p:nvSpPr>
+          <p:cNvPr id="14" name="Rounded Rectangle 13"/>
           <p:cNvSpPr/>
           <p:nvPr/>
         </p:nvSpPr>
         <p:spPr>
           <a:xfrm>
-            <a:off x="6172200" y="4389120"/>
-            <a:ext cx="5257800" cy="1005840"/>
+            <a:off x="5989320" y="3410711"/>
+            <a:ext cx="5788152" cy="1051559"/>
           </a:xfrm>
           <a:prstGeom prst="roundRect">
-            <a:avLst>
-              <a:gd name="adj" fmla="val 4000"/>
-            </a:avLst>
+            <a:avLst/>
           </a:prstGeom>
           <a:solidFill>
             <a:srgbClr val="FFFFFF"/>
           </a:solidFill>
-          <a:ln w="12700">
+          <a:ln w="25400">
             <a:solidFill>
-              <a:srgbClr val="646464"/>
+              <a:srgbClr val="2563EB"/>
             </a:solidFill>
           </a:ln>
         </p:spPr>
@@ -4448,14 +6083,57 @@
       </p:sp>
       <p:sp>
         <p:nvSpPr>
-          <p:cNvPr id="13" name="TextBox 12"/>
+          <p:cNvPr id="15" name="Rounded Rectangle 14"/>
+          <p:cNvSpPr/>
+          <p:nvPr/>
+        </p:nvSpPr>
+        <p:spPr>
+          <a:xfrm>
+            <a:off x="5989320" y="3410711"/>
+            <a:ext cx="182880" cy="1051559"/>
+          </a:xfrm>
+          <a:prstGeom prst="roundRect">
+            <a:avLst/>
+          </a:prstGeom>
+          <a:solidFill>
+            <a:srgbClr val="2563EB"/>
+          </a:solidFill>
+          <a:ln>
+            <a:noFill/>
+          </a:ln>
+        </p:spPr>
+        <p:style>
+          <a:lnRef idx="1">
+            <a:schemeClr val="accent1"/>
+          </a:lnRef>
+          <a:fillRef idx="3">
+            <a:schemeClr val="accent1"/>
+          </a:fillRef>
+          <a:effectRef idx="2">
+            <a:schemeClr val="accent1"/>
+          </a:effectRef>
+          <a:fontRef idx="minor">
+            <a:schemeClr val="lt1"/>
+          </a:fontRef>
+        </p:style>
+        <p:txBody>
+          <a:bodyPr rtlCol="0" anchor="ctr"/>
+          <a:lstStyle/>
+          <a:p>
+            <a:pPr algn="ctr"/>
+          </a:p>
+        </p:txBody>
+      </p:sp>
+      <p:sp>
+        <p:nvSpPr>
+          <p:cNvPr id="16" name="TextBox 15"/>
           <p:cNvSpPr txBox="1"/>
           <p:nvPr/>
         </p:nvSpPr>
         <p:spPr>
           <a:xfrm>
-            <a:off x="6355080" y="4572000"/>
-            <a:ext cx="4846320" cy="640080"/>
+            <a:off x="6355080" y="3547871"/>
+            <a:ext cx="5303520" cy="320040"/>
           </a:xfrm>
           <a:prstGeom prst="rect">
             <a:avLst/>
@@ -4463,21 +6141,213 @@
           <a:noFill/>
         </p:spPr>
         <p:txBody>
-          <a:bodyPr wrap="square">
+          <a:bodyPr wrap="square" tIns="36576" bIns="36576" lIns="54864" rIns="54864">
             <a:spAutoFit/>
           </a:bodyPr>
           <a:lstStyle/>
           <a:p>
-            <a:pPr algn="l">
-              <a:defRPr sz="1900" b="1">
-                <a:solidFill>
-                  <a:srgbClr val="646464"/>
+            <a:pPr algn="l"/>
+            <a:r>
+              <a:rPr sz="1700" b="1">
+                <a:solidFill>
+                  <a:srgbClr val="2563EB"/>
                 </a:solidFill>
                 <a:latin typeface="Arial"/>
-              </a:defRPr>
-            </a:pPr>
-            <a:r>
-              <a:t>D. Trò chơi dân gian</a:t>
+              </a:rPr>
+              <a:t>2. Bing (bing.com)</a:t>
+            </a:r>
+          </a:p>
+        </p:txBody>
+      </p:sp>
+      <p:sp>
+        <p:nvSpPr>
+          <p:cNvPr id="17" name="TextBox 16"/>
+          <p:cNvSpPr txBox="1"/>
+          <p:nvPr/>
+        </p:nvSpPr>
+        <p:spPr>
+          <a:xfrm>
+            <a:off x="6355080" y="3913631"/>
+            <a:ext cx="5303520" cy="457200"/>
+          </a:xfrm>
+          <a:prstGeom prst="rect">
+            <a:avLst/>
+          </a:prstGeom>
+          <a:noFill/>
+        </p:spPr>
+        <p:txBody>
+          <a:bodyPr wrap="square" tIns="36576" bIns="36576" lIns="54864" rIns="54864">
+            <a:spAutoFit/>
+          </a:bodyPr>
+          <a:lstStyle/>
+          <a:p>
+            <a:pPr algn="l"/>
+            <a:r>
+              <a:rPr sz="1400" b="0">
+                <a:solidFill>
+                  <a:srgbClr val="0F172A"/>
+                </a:solidFill>
+                <a:latin typeface="Arial"/>
+              </a:rPr>
+              <a:t>Máy tìm kiếm thông minh của Microsoft 💻</a:t>
+            </a:r>
+          </a:p>
+        </p:txBody>
+      </p:sp>
+      <p:sp>
+        <p:nvSpPr>
+          <p:cNvPr id="18" name="Rounded Rectangle 17"/>
+          <p:cNvSpPr/>
+          <p:nvPr/>
+        </p:nvSpPr>
+        <p:spPr>
+          <a:xfrm>
+            <a:off x="5989320" y="4626864"/>
+            <a:ext cx="5788152" cy="1051559"/>
+          </a:xfrm>
+          <a:prstGeom prst="roundRect">
+            <a:avLst/>
+          </a:prstGeom>
+          <a:solidFill>
+            <a:srgbClr val="FFFFFF"/>
+          </a:solidFill>
+          <a:ln w="25400">
+            <a:solidFill>
+              <a:srgbClr val="16A34A"/>
+            </a:solidFill>
+          </a:ln>
+        </p:spPr>
+        <p:style>
+          <a:lnRef idx="1">
+            <a:schemeClr val="accent1"/>
+          </a:lnRef>
+          <a:fillRef idx="3">
+            <a:schemeClr val="accent1"/>
+          </a:fillRef>
+          <a:effectRef idx="2">
+            <a:schemeClr val="accent1"/>
+          </a:effectRef>
+          <a:fontRef idx="minor">
+            <a:schemeClr val="lt1"/>
+          </a:fontRef>
+        </p:style>
+        <p:txBody>
+          <a:bodyPr rtlCol="0" anchor="ctr"/>
+          <a:lstStyle/>
+          <a:p>
+            <a:pPr algn="ctr"/>
+          </a:p>
+        </p:txBody>
+      </p:sp>
+      <p:sp>
+        <p:nvSpPr>
+          <p:cNvPr id="19" name="Rounded Rectangle 18"/>
+          <p:cNvSpPr/>
+          <p:nvPr/>
+        </p:nvSpPr>
+        <p:spPr>
+          <a:xfrm>
+            <a:off x="5989320" y="4626864"/>
+            <a:ext cx="182880" cy="1051559"/>
+          </a:xfrm>
+          <a:prstGeom prst="roundRect">
+            <a:avLst/>
+          </a:prstGeom>
+          <a:solidFill>
+            <a:srgbClr val="16A34A"/>
+          </a:solidFill>
+          <a:ln>
+            <a:noFill/>
+          </a:ln>
+        </p:spPr>
+        <p:style>
+          <a:lnRef idx="1">
+            <a:schemeClr val="accent1"/>
+          </a:lnRef>
+          <a:fillRef idx="3">
+            <a:schemeClr val="accent1"/>
+          </a:fillRef>
+          <a:effectRef idx="2">
+            <a:schemeClr val="accent1"/>
+          </a:effectRef>
+          <a:fontRef idx="minor">
+            <a:schemeClr val="lt1"/>
+          </a:fontRef>
+        </p:style>
+        <p:txBody>
+          <a:bodyPr rtlCol="0" anchor="ctr"/>
+          <a:lstStyle/>
+          <a:p>
+            <a:pPr algn="ctr"/>
+          </a:p>
+        </p:txBody>
+      </p:sp>
+      <p:sp>
+        <p:nvSpPr>
+          <p:cNvPr id="20" name="TextBox 19"/>
+          <p:cNvSpPr txBox="1"/>
+          <p:nvPr/>
+        </p:nvSpPr>
+        <p:spPr>
+          <a:xfrm>
+            <a:off x="6355080" y="4764024"/>
+            <a:ext cx="5303520" cy="320039"/>
+          </a:xfrm>
+          <a:prstGeom prst="rect">
+            <a:avLst/>
+          </a:prstGeom>
+          <a:noFill/>
+        </p:spPr>
+        <p:txBody>
+          <a:bodyPr wrap="square" tIns="36576" bIns="36576" lIns="54864" rIns="54864">
+            <a:spAutoFit/>
+          </a:bodyPr>
+          <a:lstStyle/>
+          <a:p>
+            <a:pPr algn="l"/>
+            <a:r>
+              <a:rPr sz="1700" b="1">
+                <a:solidFill>
+                  <a:srgbClr val="16A34A"/>
+                </a:solidFill>
+                <a:latin typeface="Arial"/>
+              </a:rPr>
+              <a:t>3. Cốc Cốc (coccoc.com)</a:t>
+            </a:r>
+          </a:p>
+        </p:txBody>
+      </p:sp>
+      <p:sp>
+        <p:nvSpPr>
+          <p:cNvPr id="21" name="TextBox 20"/>
+          <p:cNvSpPr txBox="1"/>
+          <p:nvPr/>
+        </p:nvSpPr>
+        <p:spPr>
+          <a:xfrm>
+            <a:off x="6355080" y="5129783"/>
+            <a:ext cx="5303520" cy="457200"/>
+          </a:xfrm>
+          <a:prstGeom prst="rect">
+            <a:avLst/>
+          </a:prstGeom>
+          <a:noFill/>
+        </p:spPr>
+        <p:txBody>
+          <a:bodyPr wrap="square" tIns="36576" bIns="36576" lIns="54864" rIns="54864">
+            <a:spAutoFit/>
+          </a:bodyPr>
+          <a:lstStyle/>
+          <a:p>
+            <a:pPr algn="l"/>
+            <a:r>
+              <a:rPr sz="1400" b="0">
+                <a:solidFill>
+                  <a:srgbClr val="0F172A"/>
+                </a:solidFill>
+                <a:latin typeface="Arial"/>
+              </a:rPr>
+              <a:t>Trình duyệt &amp; máy tìm kiếm tối ưu cho người Việt 🇻🇳</a:t>
             </a:r>
           </a:p>
         </p:txBody>
@@ -4487,6 +6357,9 @@
   <p:clrMapOvr>
     <a:masterClrMapping/>
   </p:clrMapOvr>
+  <p:transition spd="med">
+    <p:fade/>
+  </p:transition>
 </p:sld>
 </file>
 
@@ -4508,16 +6381,14 @@
         </p:nvSpPr>
         <p:spPr>
           <a:xfrm>
-            <a:off x="731520" y="1115568"/>
-            <a:ext cx="2560320" cy="320040"/>
+            <a:off x="411480" y="1097280"/>
+            <a:ext cx="3044952" cy="329184"/>
           </a:xfrm>
           <a:prstGeom prst="roundRect">
-            <a:avLst>
-              <a:gd name="adj" fmla="val 50000"/>
-            </a:avLst>
+            <a:avLst/>
           </a:prstGeom>
           <a:solidFill>
-            <a:srgbClr val="0096D6"/>
+            <a:srgbClr val="1E3A8A"/>
           </a:solidFill>
           <a:ln>
             <a:noFill/>
@@ -4538,20 +6409,10 @@
           </a:fontRef>
         </p:style>
         <p:txBody>
-          <a:bodyPr rtlCol="0" anchor="ctr" wrap="none"/>
-          <a:lstStyle/>
-          <a:p>
-            <a:pPr algn="ctr">
-              <a:defRPr sz="1300" b="1">
-                <a:solidFill>
-                  <a:srgbClr val="FFFFFF"/>
-                </a:solidFill>
-                <a:latin typeface="Arial"/>
-              </a:defRPr>
-            </a:pPr>
-            <a:r>
-              <a:t>GHI NHỚ 💡</a:t>
-            </a:r>
+          <a:bodyPr rtlCol="0" anchor="ctr"/>
+          <a:lstStyle/>
+          <a:p>
+            <a:pPr algn="ctr"/>
           </a:p>
         </p:txBody>
       </p:sp>
@@ -4563,8 +6424,8 @@
         </p:nvSpPr>
         <p:spPr>
           <a:xfrm>
-            <a:off x="731520" y="1463040"/>
-            <a:ext cx="10698480" cy="502920"/>
+            <a:off x="411480" y="1097280"/>
+            <a:ext cx="3044952" cy="329184"/>
           </a:xfrm>
           <a:prstGeom prst="rect">
             <a:avLst/>
@@ -4572,47 +6433,114 @@
           <a:noFill/>
         </p:spPr>
         <p:txBody>
-          <a:bodyPr wrap="square">
+          <a:bodyPr wrap="square" tIns="36576" bIns="36576" lIns="54864" rIns="54864">
             <a:spAutoFit/>
           </a:bodyPr>
           <a:lstStyle/>
           <a:p>
-            <a:pPr algn="l">
-              <a:defRPr sz="2400" b="1">
-                <a:solidFill>
-                  <a:srgbClr val="1A2744"/>
+            <a:pPr algn="ctr"/>
+            <a:r>
+              <a:rPr sz="1200" b="1">
+                <a:solidFill>
+                  <a:srgbClr val="FFFFFF"/>
                 </a:solidFill>
                 <a:latin typeface="Arial"/>
-              </a:defRPr>
-            </a:pPr>
-            <a:r>
-              <a:t>Những kiến thức trọng tâm em cần nhớ</a:t>
-            </a:r>
-          </a:p>
-        </p:txBody>
-      </p:sp>
-      <p:sp>
-        <p:nvSpPr>
-          <p:cNvPr id="4" name="Rounded Rectangle 3"/>
+              </a:rPr>
+              <a:t>QUY TRÌNH THỰC HIỆN 🚀</a:t>
+            </a:r>
+          </a:p>
+        </p:txBody>
+      </p:sp>
+      <p:sp>
+        <p:nvSpPr>
+          <p:cNvPr id="4" name="TextBox 3"/>
+          <p:cNvSpPr txBox="1"/>
+          <p:nvPr/>
+        </p:nvSpPr>
+        <p:spPr>
+          <a:xfrm>
+            <a:off x="411480" y="1481328"/>
+            <a:ext cx="11338560" cy="411480"/>
+          </a:xfrm>
+          <a:prstGeom prst="rect">
+            <a:avLst/>
+          </a:prstGeom>
+          <a:noFill/>
+        </p:spPr>
+        <p:txBody>
+          <a:bodyPr wrap="square" tIns="36576" bIns="36576" lIns="54864" rIns="54864">
+            <a:spAutoFit/>
+          </a:bodyPr>
+          <a:lstStyle/>
+          <a:p>
+            <a:pPr algn="l"/>
+            <a:r>
+              <a:rPr sz="2300" b="1">
+                <a:solidFill>
+                  <a:srgbClr val="1E3A8A"/>
+                </a:solidFill>
+                <a:latin typeface="Arial"/>
+              </a:rPr>
+              <a:t>3. Quy trình 4 bước tìm kiếm thông tin bằng Google</a:t>
+            </a:r>
+          </a:p>
+        </p:txBody>
+      </p:sp>
+      <p:sp>
+        <p:nvSpPr>
+          <p:cNvPr id="5" name="TextBox 4"/>
+          <p:cNvSpPr txBox="1"/>
+          <p:nvPr/>
+        </p:nvSpPr>
+        <p:spPr>
+          <a:xfrm>
+            <a:off x="411480" y="1874519"/>
+            <a:ext cx="11338560" cy="274319"/>
+          </a:xfrm>
+          <a:prstGeom prst="rect">
+            <a:avLst/>
+          </a:prstGeom>
+          <a:noFill/>
+        </p:spPr>
+        <p:txBody>
+          <a:bodyPr wrap="square" tIns="36576" bIns="36576" lIns="54864" rIns="54864">
+            <a:spAutoFit/>
+          </a:bodyPr>
+          <a:lstStyle/>
+          <a:p>
+            <a:pPr algn="l"/>
+            <a:r>
+              <a:rPr sz="1400" b="0">
+                <a:solidFill>
+                  <a:srgbClr val="475569"/>
+                </a:solidFill>
+                <a:latin typeface="Arial"/>
+              </a:rPr>
+              <a:t>Ghi nhớ các bước tuần tự để thao tác thành thạo trên phòng máy</a:t>
+            </a:r>
+          </a:p>
+        </p:txBody>
+      </p:sp>
+      <p:sp>
+        <p:nvSpPr>
+          <p:cNvPr id="6" name="Rounded Rectangle 5"/>
           <p:cNvSpPr/>
           <p:nvPr/>
         </p:nvSpPr>
         <p:spPr>
           <a:xfrm>
-            <a:off x="1097280" y="2011680"/>
-            <a:ext cx="9966960" cy="3474720"/>
+            <a:off x="411480" y="2194560"/>
+            <a:ext cx="2606040" cy="2240279"/>
           </a:xfrm>
           <a:prstGeom prst="roundRect">
-            <a:avLst>
-              <a:gd name="adj" fmla="val 4000"/>
-            </a:avLst>
+            <a:avLst/>
           </a:prstGeom>
           <a:solidFill>
-            <a:srgbClr val="FFF3CD"/>
+            <a:srgbClr val="FFFFFF"/>
           </a:solidFill>
-          <a:ln w="31750">
+          <a:ln w="25400">
             <a:solidFill>
-              <a:srgbClr val="FF9800"/>
+              <a:srgbClr val="1E3A8A"/>
             </a:solidFill>
           </a:ln>
         </p:spPr>
@@ -4640,22 +6568,20 @@
       </p:sp>
       <p:sp>
         <p:nvSpPr>
-          <p:cNvPr id="5" name="Rounded Rectangle 4"/>
+          <p:cNvPr id="7" name="Rounded Rectangle 6"/>
           <p:cNvSpPr/>
           <p:nvPr/>
         </p:nvSpPr>
         <p:spPr>
           <a:xfrm>
-            <a:off x="1280160" y="2148840"/>
-            <a:ext cx="9601200" cy="411480"/>
+            <a:off x="411480" y="2194560"/>
+            <a:ext cx="2606040" cy="438912"/>
           </a:xfrm>
           <a:prstGeom prst="roundRect">
-            <a:avLst>
-              <a:gd name="adj" fmla="val 8000"/>
-            </a:avLst>
+            <a:avLst/>
           </a:prstGeom>
           <a:solidFill>
-            <a:srgbClr val="FF9800"/>
+            <a:srgbClr val="1E3A8A"/>
           </a:solidFill>
           <a:ln>
             <a:noFill/>
@@ -4685,14 +6611,14 @@
       </p:sp>
       <p:sp>
         <p:nvSpPr>
-          <p:cNvPr id="6" name="TextBox 5"/>
+          <p:cNvPr id="8" name="TextBox 7"/>
           <p:cNvSpPr txBox="1"/>
           <p:nvPr/>
         </p:nvSpPr>
         <p:spPr>
           <a:xfrm>
-            <a:off x="1371600" y="2167128"/>
-            <a:ext cx="9418320" cy="365760"/>
+            <a:off x="411480" y="2249424"/>
+            <a:ext cx="2606040" cy="320040"/>
           </a:xfrm>
           <a:prstGeom prst="rect">
             <a:avLst/>
@@ -4700,35 +6626,34 @@
           <a:noFill/>
         </p:spPr>
         <p:txBody>
-          <a:bodyPr wrap="square">
+          <a:bodyPr wrap="square" tIns="36576" bIns="36576" lIns="54864" rIns="54864">
             <a:spAutoFit/>
           </a:bodyPr>
           <a:lstStyle/>
           <a:p>
-            <a:pPr algn="ctr">
-              <a:defRPr sz="1800" b="1">
+            <a:pPr algn="ctr"/>
+            <a:r>
+              <a:rPr sz="1500" b="1">
                 <a:solidFill>
                   <a:srgbClr val="FFFFFF"/>
                 </a:solidFill>
                 <a:latin typeface="Arial"/>
-              </a:defRPr>
-            </a:pPr>
-            <a:r>
-              <a:t>HỘP KẾT LUẬN — TÌM KIẾM THÔNG TIN 🌟</a:t>
-            </a:r>
-          </a:p>
-        </p:txBody>
-      </p:sp>
-      <p:sp>
-        <p:nvSpPr>
-          <p:cNvPr id="7" name="TextBox 6"/>
+              </a:rPr>
+              <a:t>BƯỚC 1</a:t>
+            </a:r>
+          </a:p>
+        </p:txBody>
+      </p:sp>
+      <p:sp>
+        <p:nvSpPr>
+          <p:cNvPr id="9" name="TextBox 8"/>
           <p:cNvSpPr txBox="1"/>
           <p:nvPr/>
         </p:nvSpPr>
         <p:spPr>
           <a:xfrm>
-            <a:off x="1463040" y="2651760"/>
-            <a:ext cx="9235440" cy="2743200"/>
+            <a:off x="548640" y="2743200"/>
+            <a:ext cx="2331720" cy="457200"/>
           </a:xfrm>
           <a:prstGeom prst="rect">
             <a:avLst/>
@@ -4736,81 +6661,715 @@
           <a:noFill/>
         </p:spPr>
         <p:txBody>
-          <a:bodyPr wrap="square">
+          <a:bodyPr wrap="square" tIns="36576" bIns="36576" lIns="54864" rIns="54864">
             <a:spAutoFit/>
           </a:bodyPr>
           <a:lstStyle/>
           <a:p>
-            <a:pPr>
-              <a:spcAft>
-                <a:spcPts val="800"/>
-              </a:spcAft>
-              <a:defRPr sz="1700" b="1">
-                <a:solidFill>
-                  <a:srgbClr val="B45000"/>
+            <a:pPr algn="ctr"/>
+            <a:r>
+              <a:rPr sz="1600" b="1">
+                <a:solidFill>
+                  <a:srgbClr val="1E3A8A"/>
                 </a:solidFill>
                 <a:latin typeface="Arial"/>
-              </a:defRPr>
-            </a:pPr>
-            <a:r>
-              <a:t>⭐  Máy tìm kiếm (Google, Bing) là công cụ tìm kiếm thông tin phổ biến trên Internet.</a:t>
-            </a:r>
-          </a:p>
-          <a:p>
-            <a:pPr>
-              <a:spcAft>
-                <a:spcPts val="800"/>
-              </a:spcAft>
-              <a:defRPr sz="1700" b="1">
-                <a:solidFill>
-                  <a:srgbClr val="B45000"/>
+              </a:rPr>
+              <a:t>Xác định từ khóa</a:t>
+            </a:r>
+          </a:p>
+        </p:txBody>
+      </p:sp>
+      <p:sp>
+        <p:nvSpPr>
+          <p:cNvPr id="10" name="TextBox 9"/>
+          <p:cNvSpPr txBox="1"/>
+          <p:nvPr/>
+        </p:nvSpPr>
+        <p:spPr>
+          <a:xfrm>
+            <a:off x="548640" y="3291840"/>
+            <a:ext cx="2331720" cy="1051560"/>
+          </a:xfrm>
+          <a:prstGeom prst="rect">
+            <a:avLst/>
+          </a:prstGeom>
+          <a:noFill/>
+        </p:spPr>
+        <p:txBody>
+          <a:bodyPr wrap="square" tIns="36576" bIns="36576" lIns="54864" rIns="54864">
+            <a:spAutoFit/>
+          </a:bodyPr>
+          <a:lstStyle/>
+          <a:p>
+            <a:pPr algn="ctr"/>
+            <a:r>
+              <a:rPr sz="1400" b="0">
+                <a:solidFill>
+                  <a:srgbClr val="0F172A"/>
                 </a:solidFill>
                 <a:latin typeface="Arial"/>
-              </a:defRPr>
-            </a:pPr>
-            <a:r>
-              <a:t>⭐  Từ khóa là từ hoặc cụm từ thể hiện nội dung chính em cần tìm.</a:t>
-            </a:r>
-          </a:p>
-          <a:p>
-            <a:pPr>
-              <a:spcAft>
-                <a:spcPts val="800"/>
-              </a:spcAft>
-              <a:defRPr sz="1700" b="1">
-                <a:solidFill>
-                  <a:srgbClr val="B45000"/>
+              </a:rPr>
+              <a:t>Xác định rõ ràng từ khóa về nội dung em cần tìm kiếm.</a:t>
+            </a:r>
+          </a:p>
+        </p:txBody>
+      </p:sp>
+      <p:sp>
+        <p:nvSpPr>
+          <p:cNvPr id="11" name="Rounded Rectangle 10"/>
+          <p:cNvSpPr/>
+          <p:nvPr/>
+        </p:nvSpPr>
+        <p:spPr>
+          <a:xfrm>
+            <a:off x="3328416" y="2194560"/>
+            <a:ext cx="2606040" cy="2240279"/>
+          </a:xfrm>
+          <a:prstGeom prst="roundRect">
+            <a:avLst/>
+          </a:prstGeom>
+          <a:solidFill>
+            <a:srgbClr val="FFFFFF"/>
+          </a:solidFill>
+          <a:ln w="25400">
+            <a:solidFill>
+              <a:srgbClr val="2563EB"/>
+            </a:solidFill>
+          </a:ln>
+        </p:spPr>
+        <p:style>
+          <a:lnRef idx="1">
+            <a:schemeClr val="accent1"/>
+          </a:lnRef>
+          <a:fillRef idx="3">
+            <a:schemeClr val="accent1"/>
+          </a:fillRef>
+          <a:effectRef idx="2">
+            <a:schemeClr val="accent1"/>
+          </a:effectRef>
+          <a:fontRef idx="minor">
+            <a:schemeClr val="lt1"/>
+          </a:fontRef>
+        </p:style>
+        <p:txBody>
+          <a:bodyPr rtlCol="0" anchor="ctr"/>
+          <a:lstStyle/>
+          <a:p>
+            <a:pPr algn="ctr"/>
+          </a:p>
+        </p:txBody>
+      </p:sp>
+      <p:sp>
+        <p:nvSpPr>
+          <p:cNvPr id="12" name="Rounded Rectangle 11"/>
+          <p:cNvSpPr/>
+          <p:nvPr/>
+        </p:nvSpPr>
+        <p:spPr>
+          <a:xfrm>
+            <a:off x="3328416" y="2194560"/>
+            <a:ext cx="2606040" cy="438912"/>
+          </a:xfrm>
+          <a:prstGeom prst="roundRect">
+            <a:avLst/>
+          </a:prstGeom>
+          <a:solidFill>
+            <a:srgbClr val="2563EB"/>
+          </a:solidFill>
+          <a:ln>
+            <a:noFill/>
+          </a:ln>
+        </p:spPr>
+        <p:style>
+          <a:lnRef idx="1">
+            <a:schemeClr val="accent1"/>
+          </a:lnRef>
+          <a:fillRef idx="3">
+            <a:schemeClr val="accent1"/>
+          </a:fillRef>
+          <a:effectRef idx="2">
+            <a:schemeClr val="accent1"/>
+          </a:effectRef>
+          <a:fontRef idx="minor">
+            <a:schemeClr val="lt1"/>
+          </a:fontRef>
+        </p:style>
+        <p:txBody>
+          <a:bodyPr rtlCol="0" anchor="ctr"/>
+          <a:lstStyle/>
+          <a:p>
+            <a:pPr algn="ctr"/>
+          </a:p>
+        </p:txBody>
+      </p:sp>
+      <p:sp>
+        <p:nvSpPr>
+          <p:cNvPr id="13" name="TextBox 12"/>
+          <p:cNvSpPr txBox="1"/>
+          <p:nvPr/>
+        </p:nvSpPr>
+        <p:spPr>
+          <a:xfrm>
+            <a:off x="3328416" y="2249424"/>
+            <a:ext cx="2606040" cy="320040"/>
+          </a:xfrm>
+          <a:prstGeom prst="rect">
+            <a:avLst/>
+          </a:prstGeom>
+          <a:noFill/>
+        </p:spPr>
+        <p:txBody>
+          <a:bodyPr wrap="square" tIns="36576" bIns="36576" lIns="54864" rIns="54864">
+            <a:spAutoFit/>
+          </a:bodyPr>
+          <a:lstStyle/>
+          <a:p>
+            <a:pPr algn="ctr"/>
+            <a:r>
+              <a:rPr sz="1500" b="1">
+                <a:solidFill>
+                  <a:srgbClr val="FFFFFF"/>
                 </a:solidFill>
                 <a:latin typeface="Arial"/>
-              </a:defRPr>
-            </a:pPr>
-            <a:r>
-              <a:t>⭐  Chọn từ khóa ngắn gọn, chính xác sẽ cho kết quả nhanh và đúng nhu cầu.</a:t>
-            </a:r>
-          </a:p>
-          <a:p>
-            <a:pPr>
-              <a:spcAft>
-                <a:spcPts val="800"/>
-              </a:spcAft>
-              <a:defRPr sz="1700" b="1">
-                <a:solidFill>
-                  <a:srgbClr val="B45000"/>
+              </a:rPr>
+              <a:t>BƯỚC 2</a:t>
+            </a:r>
+          </a:p>
+        </p:txBody>
+      </p:sp>
+      <p:sp>
+        <p:nvSpPr>
+          <p:cNvPr id="14" name="TextBox 13"/>
+          <p:cNvSpPr txBox="1"/>
+          <p:nvPr/>
+        </p:nvSpPr>
+        <p:spPr>
+          <a:xfrm>
+            <a:off x="3465576" y="2743200"/>
+            <a:ext cx="2331720" cy="457200"/>
+          </a:xfrm>
+          <a:prstGeom prst="rect">
+            <a:avLst/>
+          </a:prstGeom>
+          <a:noFill/>
+        </p:spPr>
+        <p:txBody>
+          <a:bodyPr wrap="square" tIns="36576" bIns="36576" lIns="54864" rIns="54864">
+            <a:spAutoFit/>
+          </a:bodyPr>
+          <a:lstStyle/>
+          <a:p>
+            <a:pPr algn="ctr"/>
+            <a:r>
+              <a:rPr sz="1600" b="1">
+                <a:solidFill>
+                  <a:srgbClr val="2563EB"/>
                 </a:solidFill>
                 <a:latin typeface="Arial"/>
-              </a:defRPr>
-            </a:pPr>
-            <a:r>
-              <a:t>⭐  Chỉ truy cập các trang web an toàn và có sự đồng hành của người lớn!</a:t>
-            </a:r>
-          </a:p>
-        </p:txBody>
-      </p:sp>
+              </a:rPr>
+              <a:t>Mở máy tìm kiếm</a:t>
+            </a:r>
+          </a:p>
+        </p:txBody>
+      </p:sp>
+      <p:sp>
+        <p:nvSpPr>
+          <p:cNvPr id="15" name="TextBox 14"/>
+          <p:cNvSpPr txBox="1"/>
+          <p:nvPr/>
+        </p:nvSpPr>
+        <p:spPr>
+          <a:xfrm>
+            <a:off x="3465576" y="3291840"/>
+            <a:ext cx="2331720" cy="1051560"/>
+          </a:xfrm>
+          <a:prstGeom prst="rect">
+            <a:avLst/>
+          </a:prstGeom>
+          <a:noFill/>
+        </p:spPr>
+        <p:txBody>
+          <a:bodyPr wrap="square" tIns="36576" bIns="36576" lIns="54864" rIns="54864">
+            <a:spAutoFit/>
+          </a:bodyPr>
+          <a:lstStyle/>
+          <a:p>
+            <a:pPr algn="ctr"/>
+            <a:r>
+              <a:rPr sz="1400" b="0">
+                <a:solidFill>
+                  <a:srgbClr val="0F172A"/>
+                </a:solidFill>
+                <a:latin typeface="Arial"/>
+              </a:rPr>
+              <a:t>Mở trình duyệt web và gõ địa chỉ: google.com</a:t>
+            </a:r>
+          </a:p>
+        </p:txBody>
+      </p:sp>
+      <p:sp>
+        <p:nvSpPr>
+          <p:cNvPr id="16" name="Rounded Rectangle 15"/>
+          <p:cNvSpPr/>
+          <p:nvPr/>
+        </p:nvSpPr>
+        <p:spPr>
+          <a:xfrm>
+            <a:off x="6245352" y="2194560"/>
+            <a:ext cx="2606040" cy="2240279"/>
+          </a:xfrm>
+          <a:prstGeom prst="roundRect">
+            <a:avLst/>
+          </a:prstGeom>
+          <a:solidFill>
+            <a:srgbClr val="FFFFFF"/>
+          </a:solidFill>
+          <a:ln w="25400">
+            <a:solidFill>
+              <a:srgbClr val="EA580C"/>
+            </a:solidFill>
+          </a:ln>
+        </p:spPr>
+        <p:style>
+          <a:lnRef idx="1">
+            <a:schemeClr val="accent1"/>
+          </a:lnRef>
+          <a:fillRef idx="3">
+            <a:schemeClr val="accent1"/>
+          </a:fillRef>
+          <a:effectRef idx="2">
+            <a:schemeClr val="accent1"/>
+          </a:effectRef>
+          <a:fontRef idx="minor">
+            <a:schemeClr val="lt1"/>
+          </a:fontRef>
+        </p:style>
+        <p:txBody>
+          <a:bodyPr rtlCol="0" anchor="ctr"/>
+          <a:lstStyle/>
+          <a:p>
+            <a:pPr algn="ctr"/>
+          </a:p>
+        </p:txBody>
+      </p:sp>
+      <p:sp>
+        <p:nvSpPr>
+          <p:cNvPr id="17" name="Rounded Rectangle 16"/>
+          <p:cNvSpPr/>
+          <p:nvPr/>
+        </p:nvSpPr>
+        <p:spPr>
+          <a:xfrm>
+            <a:off x="6245352" y="2194560"/>
+            <a:ext cx="2606040" cy="438912"/>
+          </a:xfrm>
+          <a:prstGeom prst="roundRect">
+            <a:avLst/>
+          </a:prstGeom>
+          <a:solidFill>
+            <a:srgbClr val="EA580C"/>
+          </a:solidFill>
+          <a:ln>
+            <a:noFill/>
+          </a:ln>
+        </p:spPr>
+        <p:style>
+          <a:lnRef idx="1">
+            <a:schemeClr val="accent1"/>
+          </a:lnRef>
+          <a:fillRef idx="3">
+            <a:schemeClr val="accent1"/>
+          </a:fillRef>
+          <a:effectRef idx="2">
+            <a:schemeClr val="accent1"/>
+          </a:effectRef>
+          <a:fontRef idx="minor">
+            <a:schemeClr val="lt1"/>
+          </a:fontRef>
+        </p:style>
+        <p:txBody>
+          <a:bodyPr rtlCol="0" anchor="ctr"/>
+          <a:lstStyle/>
+          <a:p>
+            <a:pPr algn="ctr"/>
+          </a:p>
+        </p:txBody>
+      </p:sp>
+      <p:sp>
+        <p:nvSpPr>
+          <p:cNvPr id="18" name="TextBox 17"/>
+          <p:cNvSpPr txBox="1"/>
+          <p:nvPr/>
+        </p:nvSpPr>
+        <p:spPr>
+          <a:xfrm>
+            <a:off x="6245352" y="2249424"/>
+            <a:ext cx="2606040" cy="320040"/>
+          </a:xfrm>
+          <a:prstGeom prst="rect">
+            <a:avLst/>
+          </a:prstGeom>
+          <a:noFill/>
+        </p:spPr>
+        <p:txBody>
+          <a:bodyPr wrap="square" tIns="36576" bIns="36576" lIns="54864" rIns="54864">
+            <a:spAutoFit/>
+          </a:bodyPr>
+          <a:lstStyle/>
+          <a:p>
+            <a:pPr algn="ctr"/>
+            <a:r>
+              <a:rPr sz="1500" b="1">
+                <a:solidFill>
+                  <a:srgbClr val="FFFFFF"/>
+                </a:solidFill>
+                <a:latin typeface="Arial"/>
+              </a:rPr>
+              <a:t>BƯỚC 3</a:t>
+            </a:r>
+          </a:p>
+        </p:txBody>
+      </p:sp>
+      <p:sp>
+        <p:nvSpPr>
+          <p:cNvPr id="19" name="TextBox 18"/>
+          <p:cNvSpPr txBox="1"/>
+          <p:nvPr/>
+        </p:nvSpPr>
+        <p:spPr>
+          <a:xfrm>
+            <a:off x="6382512" y="2743200"/>
+            <a:ext cx="2331720" cy="457200"/>
+          </a:xfrm>
+          <a:prstGeom prst="rect">
+            <a:avLst/>
+          </a:prstGeom>
+          <a:noFill/>
+        </p:spPr>
+        <p:txBody>
+          <a:bodyPr wrap="square" tIns="36576" bIns="36576" lIns="54864" rIns="54864">
+            <a:spAutoFit/>
+          </a:bodyPr>
+          <a:lstStyle/>
+          <a:p>
+            <a:pPr algn="ctr"/>
+            <a:r>
+              <a:rPr sz="1600" b="1">
+                <a:solidFill>
+                  <a:srgbClr val="EA580C"/>
+                </a:solidFill>
+                <a:latin typeface="Arial"/>
+              </a:rPr>
+              <a:t>Gõ từ khóa &amp; Enter</a:t>
+            </a:r>
+          </a:p>
+        </p:txBody>
+      </p:sp>
+      <p:sp>
+        <p:nvSpPr>
+          <p:cNvPr id="20" name="TextBox 19"/>
+          <p:cNvSpPr txBox="1"/>
+          <p:nvPr/>
+        </p:nvSpPr>
+        <p:spPr>
+          <a:xfrm>
+            <a:off x="6382512" y="3291840"/>
+            <a:ext cx="2331720" cy="1051560"/>
+          </a:xfrm>
+          <a:prstGeom prst="rect">
+            <a:avLst/>
+          </a:prstGeom>
+          <a:noFill/>
+        </p:spPr>
+        <p:txBody>
+          <a:bodyPr wrap="square" tIns="36576" bIns="36576" lIns="54864" rIns="54864">
+            <a:spAutoFit/>
+          </a:bodyPr>
+          <a:lstStyle/>
+          <a:p>
+            <a:pPr algn="ctr"/>
+            <a:r>
+              <a:rPr sz="1400" b="0">
+                <a:solidFill>
+                  <a:srgbClr val="0F172A"/>
+                </a:solidFill>
+                <a:latin typeface="Arial"/>
+              </a:rPr>
+              <a:t>Gõ từ khóa vào ô tìm kiếm, sau đó nhấn phím Enter.</a:t>
+            </a:r>
+          </a:p>
+        </p:txBody>
+      </p:sp>
+      <p:sp>
+        <p:nvSpPr>
+          <p:cNvPr id="21" name="Rounded Rectangle 20"/>
+          <p:cNvSpPr/>
+          <p:nvPr/>
+        </p:nvSpPr>
+        <p:spPr>
+          <a:xfrm>
+            <a:off x="9162288" y="2194560"/>
+            <a:ext cx="2606040" cy="2240279"/>
+          </a:xfrm>
+          <a:prstGeom prst="roundRect">
+            <a:avLst/>
+          </a:prstGeom>
+          <a:solidFill>
+            <a:srgbClr val="FFFFFF"/>
+          </a:solidFill>
+          <a:ln w="25400">
+            <a:solidFill>
+              <a:srgbClr val="16A34A"/>
+            </a:solidFill>
+          </a:ln>
+        </p:spPr>
+        <p:style>
+          <a:lnRef idx="1">
+            <a:schemeClr val="accent1"/>
+          </a:lnRef>
+          <a:fillRef idx="3">
+            <a:schemeClr val="accent1"/>
+          </a:fillRef>
+          <a:effectRef idx="2">
+            <a:schemeClr val="accent1"/>
+          </a:effectRef>
+          <a:fontRef idx="minor">
+            <a:schemeClr val="lt1"/>
+          </a:fontRef>
+        </p:style>
+        <p:txBody>
+          <a:bodyPr rtlCol="0" anchor="ctr"/>
+          <a:lstStyle/>
+          <a:p>
+            <a:pPr algn="ctr"/>
+          </a:p>
+        </p:txBody>
+      </p:sp>
+      <p:sp>
+        <p:nvSpPr>
+          <p:cNvPr id="22" name="Rounded Rectangle 21"/>
+          <p:cNvSpPr/>
+          <p:nvPr/>
+        </p:nvSpPr>
+        <p:spPr>
+          <a:xfrm>
+            <a:off x="9162288" y="2194560"/>
+            <a:ext cx="2606040" cy="438912"/>
+          </a:xfrm>
+          <a:prstGeom prst="roundRect">
+            <a:avLst/>
+          </a:prstGeom>
+          <a:solidFill>
+            <a:srgbClr val="16A34A"/>
+          </a:solidFill>
+          <a:ln>
+            <a:noFill/>
+          </a:ln>
+        </p:spPr>
+        <p:style>
+          <a:lnRef idx="1">
+            <a:schemeClr val="accent1"/>
+          </a:lnRef>
+          <a:fillRef idx="3">
+            <a:schemeClr val="accent1"/>
+          </a:fillRef>
+          <a:effectRef idx="2">
+            <a:schemeClr val="accent1"/>
+          </a:effectRef>
+          <a:fontRef idx="minor">
+            <a:schemeClr val="lt1"/>
+          </a:fontRef>
+        </p:style>
+        <p:txBody>
+          <a:bodyPr rtlCol="0" anchor="ctr"/>
+          <a:lstStyle/>
+          <a:p>
+            <a:pPr algn="ctr"/>
+          </a:p>
+        </p:txBody>
+      </p:sp>
+      <p:sp>
+        <p:nvSpPr>
+          <p:cNvPr id="23" name="TextBox 22"/>
+          <p:cNvSpPr txBox="1"/>
+          <p:nvPr/>
+        </p:nvSpPr>
+        <p:spPr>
+          <a:xfrm>
+            <a:off x="9162288" y="2249424"/>
+            <a:ext cx="2606040" cy="320040"/>
+          </a:xfrm>
+          <a:prstGeom prst="rect">
+            <a:avLst/>
+          </a:prstGeom>
+          <a:noFill/>
+        </p:spPr>
+        <p:txBody>
+          <a:bodyPr wrap="square" tIns="36576" bIns="36576" lIns="54864" rIns="54864">
+            <a:spAutoFit/>
+          </a:bodyPr>
+          <a:lstStyle/>
+          <a:p>
+            <a:pPr algn="ctr"/>
+            <a:r>
+              <a:rPr sz="1500" b="1">
+                <a:solidFill>
+                  <a:srgbClr val="FFFFFF"/>
+                </a:solidFill>
+                <a:latin typeface="Arial"/>
+              </a:rPr>
+              <a:t>BƯỚC 4</a:t>
+            </a:r>
+          </a:p>
+        </p:txBody>
+      </p:sp>
+      <p:sp>
+        <p:nvSpPr>
+          <p:cNvPr id="24" name="TextBox 23"/>
+          <p:cNvSpPr txBox="1"/>
+          <p:nvPr/>
+        </p:nvSpPr>
+        <p:spPr>
+          <a:xfrm>
+            <a:off x="9299448" y="2743200"/>
+            <a:ext cx="2331720" cy="457200"/>
+          </a:xfrm>
+          <a:prstGeom prst="rect">
+            <a:avLst/>
+          </a:prstGeom>
+          <a:noFill/>
+        </p:spPr>
+        <p:txBody>
+          <a:bodyPr wrap="square" tIns="36576" bIns="36576" lIns="54864" rIns="54864">
+            <a:spAutoFit/>
+          </a:bodyPr>
+          <a:lstStyle/>
+          <a:p>
+            <a:pPr algn="ctr"/>
+            <a:r>
+              <a:rPr sz="1600" b="1">
+                <a:solidFill>
+                  <a:srgbClr val="16A34A"/>
+                </a:solidFill>
+                <a:latin typeface="Arial"/>
+              </a:rPr>
+              <a:t>Chọn siêu liên kết</a:t>
+            </a:r>
+          </a:p>
+        </p:txBody>
+      </p:sp>
+      <p:sp>
+        <p:nvSpPr>
+          <p:cNvPr id="25" name="TextBox 24"/>
+          <p:cNvSpPr txBox="1"/>
+          <p:nvPr/>
+        </p:nvSpPr>
+        <p:spPr>
+          <a:xfrm>
+            <a:off x="9299448" y="3291840"/>
+            <a:ext cx="2331720" cy="1051560"/>
+          </a:xfrm>
+          <a:prstGeom prst="rect">
+            <a:avLst/>
+          </a:prstGeom>
+          <a:noFill/>
+        </p:spPr>
+        <p:txBody>
+          <a:bodyPr wrap="square" tIns="36576" bIns="36576" lIns="54864" rIns="54864">
+            <a:spAutoFit/>
+          </a:bodyPr>
+          <a:lstStyle/>
+          <a:p>
+            <a:pPr algn="ctr"/>
+            <a:r>
+              <a:rPr sz="1400" b="0">
+                <a:solidFill>
+                  <a:srgbClr val="0F172A"/>
+                </a:solidFill>
+                <a:latin typeface="Arial"/>
+              </a:rPr>
+              <a:t>Nháy chuột vào liên kết thích hợp trong danh sách kết quả.</a:t>
+            </a:r>
+          </a:p>
+        </p:txBody>
+      </p:sp>
+      <p:sp>
+        <p:nvSpPr>
+          <p:cNvPr id="26" name="Rounded Rectangle 25"/>
+          <p:cNvSpPr/>
+          <p:nvPr/>
+        </p:nvSpPr>
+        <p:spPr>
+          <a:xfrm>
+            <a:off x="411480" y="4617720"/>
+            <a:ext cx="11365992" cy="1097280"/>
+          </a:xfrm>
+          <a:prstGeom prst="roundRect">
+            <a:avLst/>
+          </a:prstGeom>
+          <a:solidFill>
+            <a:srgbClr val="FFFFFF"/>
+          </a:solidFill>
+          <a:ln w="12700">
+            <a:solidFill>
+              <a:srgbClr val="CBD5E1"/>
+            </a:solidFill>
+          </a:ln>
+        </p:spPr>
+        <p:style>
+          <a:lnRef idx="1">
+            <a:schemeClr val="accent1"/>
+          </a:lnRef>
+          <a:fillRef idx="3">
+            <a:schemeClr val="accent1"/>
+          </a:fillRef>
+          <a:effectRef idx="2">
+            <a:schemeClr val="accent1"/>
+          </a:effectRef>
+          <a:fontRef idx="minor">
+            <a:schemeClr val="lt1"/>
+          </a:fontRef>
+        </p:style>
+        <p:txBody>
+          <a:bodyPr rtlCol="0" anchor="ctr"/>
+          <a:lstStyle/>
+          <a:p>
+            <a:pPr algn="ctr"/>
+          </a:p>
+        </p:txBody>
+      </p:sp>
+      <p:pic>
+        <p:nvPicPr>
+          <p:cNvPr id="27" name="Picture 26" descr="search_steps_diagram_vn.png"/>
+          <p:cNvPicPr>
+            <a:picLocks noChangeAspect="1"/>
+          </p:cNvPicPr>
+          <p:nvPr/>
+        </p:nvPicPr>
+        <p:blipFill>
+          <a:blip r:embed="rId2"/>
+          <a:stretch>
+            <a:fillRect/>
+          </a:stretch>
+        </p:blipFill>
+        <p:spPr>
+          <a:xfrm>
+            <a:off x="594360" y="4663440"/>
+            <a:ext cx="11000232" cy="1005839"/>
+          </a:xfrm>
+          <a:prstGeom prst="rect">
+            <a:avLst/>
+          </a:prstGeom>
+        </p:spPr>
+      </p:pic>
     </p:spTree>
   </p:cSld>
   <p:clrMapOvr>
     <a:masterClrMapping/>
   </p:clrMapOvr>
+  <p:transition spd="med">
+    <p:push dir="l"/>
+  </p:transition>
 </p:sld>
 </file>
 
@@ -4826,20 +7385,20 @@
       <p:grpSpPr/>
       <p:sp>
         <p:nvSpPr>
-          <p:cNvPr id="2" name="Rectangle 1"/>
+          <p:cNvPr id="2" name="Rounded Rectangle 1"/>
           <p:cNvSpPr/>
           <p:nvPr/>
         </p:nvSpPr>
         <p:spPr>
           <a:xfrm>
-            <a:off x="0" y="1051560"/>
-            <a:ext cx="12191695" cy="4754880"/>
-          </a:xfrm>
-          <a:prstGeom prst="rect">
+            <a:off x="411480" y="1097280"/>
+            <a:ext cx="2331720" cy="329184"/>
+          </a:xfrm>
+          <a:prstGeom prst="roundRect">
             <a:avLst/>
           </a:prstGeom>
           <a:solidFill>
-            <a:srgbClr val="F0F8FF"/>
+            <a:srgbClr val="1E3A8A"/>
           </a:solidFill>
           <a:ln>
             <a:noFill/>
@@ -4875,8 +7434,8 @@
         </p:nvSpPr>
         <p:spPr>
           <a:xfrm>
-            <a:off x="914400" y="1828800"/>
-            <a:ext cx="6400800" cy="1371600"/>
+            <a:off x="411480" y="1097280"/>
+            <a:ext cx="2331720" cy="329184"/>
           </a:xfrm>
           <a:prstGeom prst="rect">
             <a:avLst/>
@@ -4884,21 +7443,20 @@
           <a:noFill/>
         </p:spPr>
         <p:txBody>
-          <a:bodyPr wrap="square">
+          <a:bodyPr wrap="square" tIns="36576" bIns="36576" lIns="54864" rIns="54864">
             <a:spAutoFit/>
           </a:bodyPr>
           <a:lstStyle/>
           <a:p>
-            <a:pPr algn="l">
-              <a:defRPr sz="3200" b="1">
-                <a:solidFill>
-                  <a:srgbClr val="0066CC"/>
+            <a:pPr algn="ctr"/>
+            <a:r>
+              <a:rPr sz="1200" b="1">
+                <a:solidFill>
+                  <a:srgbClr val="FFFFFF"/>
                 </a:solidFill>
                 <a:latin typeface="Arial"/>
-              </a:defRPr>
-            </a:pPr>
-            <a:r>
-              <a:t>BẠN LÀ NHÀ THÁM HIỂM INTERNET! 🌐</a:t>
+              </a:rPr>
+              <a:t>THỰC HÀNH MẪU 🌊</a:t>
             </a:r>
           </a:p>
         </p:txBody>
@@ -4911,8 +7469,8 @@
         </p:nvSpPr>
         <p:spPr>
           <a:xfrm>
-            <a:off x="914400" y="3200400"/>
-            <a:ext cx="6400800" cy="1828800"/>
+            <a:off x="411480" y="1481328"/>
+            <a:ext cx="11338560" cy="411480"/>
           </a:xfrm>
           <a:prstGeom prst="rect">
             <a:avLst/>
@@ -4920,33 +7478,305 @@
           <a:noFill/>
         </p:spPr>
         <p:txBody>
-          <a:bodyPr wrap="square">
+          <a:bodyPr wrap="square" tIns="36576" bIns="36576" lIns="54864" rIns="54864">
             <a:spAutoFit/>
           </a:bodyPr>
           <a:lstStyle/>
           <a:p>
-            <a:pPr algn="l">
-              <a:defRPr sz="2200" b="0">
-                <a:solidFill>
-                  <a:srgbClr val="3C3C3C"/>
+            <a:pPr algn="l"/>
+            <a:r>
+              <a:rPr sz="2300" b="1">
+                <a:solidFill>
+                  <a:srgbClr val="1E3A8A"/>
                 </a:solidFill>
                 <a:latin typeface="Arial"/>
-              </a:defRPr>
-            </a:pPr>
-            <a:r>
-              <a:t>Hãy thực hành tìm kiếm những kiến thức bổ ích cho các môn học nhé!</a:t>
-            </a:r>
-            <a:br/>
-            <a:br/>
-            <a:r>
-              <a:t>Hẹn gặp lại các em ở Tiết 2! 🌟</a:t>
-            </a:r>
+              </a:rPr>
+              <a:t>4. Thực hành mẫu: Tìm kiếm thông tin về Hồ Gươm</a:t>
+            </a:r>
+          </a:p>
+        </p:txBody>
+      </p:sp>
+      <p:sp>
+        <p:nvSpPr>
+          <p:cNvPr id="5" name="TextBox 4"/>
+          <p:cNvSpPr txBox="1"/>
+          <p:nvPr/>
+        </p:nvSpPr>
+        <p:spPr>
+          <a:xfrm>
+            <a:off x="411480" y="1874519"/>
+            <a:ext cx="11338560" cy="274319"/>
+          </a:xfrm>
+          <a:prstGeom prst="rect">
+            <a:avLst/>
+          </a:prstGeom>
+          <a:noFill/>
+        </p:spPr>
+        <p:txBody>
+          <a:bodyPr wrap="square" tIns="36576" bIns="36576" lIns="54864" rIns="54864">
+            <a:spAutoFit/>
+          </a:bodyPr>
+          <a:lstStyle/>
+          <a:p>
+            <a:pPr algn="l"/>
+            <a:r>
+              <a:rPr sz="1400" b="0">
+                <a:solidFill>
+                  <a:srgbClr val="475569"/>
+                </a:solidFill>
+                <a:latin typeface="Arial"/>
+              </a:rPr>
+              <a:t>Quan sát các thao tác thực tế và trang kết quả tìm kiếm Google (SGK tr.22 - 23)</a:t>
+            </a:r>
+          </a:p>
+        </p:txBody>
+      </p:sp>
+      <p:sp>
+        <p:nvSpPr>
+          <p:cNvPr id="6" name="Rounded Rectangle 5"/>
+          <p:cNvSpPr/>
+          <p:nvPr/>
+        </p:nvSpPr>
+        <p:spPr>
+          <a:xfrm>
+            <a:off x="411480" y="2194560"/>
+            <a:ext cx="4572000" cy="3520440"/>
+          </a:xfrm>
+          <a:prstGeom prst="roundRect">
+            <a:avLst/>
+          </a:prstGeom>
+          <a:solidFill>
+            <a:srgbClr val="FFFFFF"/>
+          </a:solidFill>
+          <a:ln w="12700">
+            <a:solidFill>
+              <a:srgbClr val="CBD5E1"/>
+            </a:solidFill>
+          </a:ln>
+        </p:spPr>
+        <p:style>
+          <a:lnRef idx="1">
+            <a:schemeClr val="accent1"/>
+          </a:lnRef>
+          <a:fillRef idx="3">
+            <a:schemeClr val="accent1"/>
+          </a:fillRef>
+          <a:effectRef idx="2">
+            <a:schemeClr val="accent1"/>
+          </a:effectRef>
+          <a:fontRef idx="minor">
+            <a:schemeClr val="lt1"/>
+          </a:fontRef>
+        </p:style>
+        <p:txBody>
+          <a:bodyPr rtlCol="0" anchor="ctr"/>
+          <a:lstStyle/>
+          <a:p>
+            <a:pPr algn="ctr"/>
+          </a:p>
+        </p:txBody>
+      </p:sp>
+      <p:sp>
+        <p:nvSpPr>
+          <p:cNvPr id="7" name="TextBox 6"/>
+          <p:cNvSpPr txBox="1"/>
+          <p:nvPr/>
+        </p:nvSpPr>
+        <p:spPr>
+          <a:xfrm>
+            <a:off x="594360" y="2331720"/>
+            <a:ext cx="4206240" cy="320040"/>
+          </a:xfrm>
+          <a:prstGeom prst="rect">
+            <a:avLst/>
+          </a:prstGeom>
+          <a:noFill/>
+        </p:spPr>
+        <p:txBody>
+          <a:bodyPr wrap="square" tIns="36576" bIns="36576" lIns="54864" rIns="54864">
+            <a:spAutoFit/>
+          </a:bodyPr>
+          <a:lstStyle/>
+          <a:p>
+            <a:pPr algn="l"/>
+            <a:r>
+              <a:rPr sz="1600" b="1">
+                <a:solidFill>
+                  <a:srgbClr val="1E3A8A"/>
+                </a:solidFill>
+                <a:latin typeface="Arial"/>
+              </a:rPr>
+              <a:t>🎯 CÁC BƯỚC THỰC HÀNH:</a:t>
+            </a:r>
+          </a:p>
+        </p:txBody>
+      </p:sp>
+      <p:sp>
+        <p:nvSpPr>
+          <p:cNvPr id="8" name="TextBox 7"/>
+          <p:cNvSpPr txBox="1"/>
+          <p:nvPr/>
+        </p:nvSpPr>
+        <p:spPr>
+          <a:xfrm>
+            <a:off x="594360" y="2697480"/>
+            <a:ext cx="4206240" cy="2194559"/>
+          </a:xfrm>
+          <a:prstGeom prst="rect">
+            <a:avLst/>
+          </a:prstGeom>
+          <a:noFill/>
+        </p:spPr>
+        <p:txBody>
+          <a:bodyPr wrap="square" tIns="36576" bIns="36576" lIns="54864" rIns="54864">
+            <a:spAutoFit/>
+          </a:bodyPr>
+          <a:lstStyle/>
+          <a:p>
+            <a:pPr algn="l"/>
+            <a:r>
+              <a:rPr sz="1500" b="0">
+                <a:solidFill>
+                  <a:srgbClr val="0F172A"/>
+                </a:solidFill>
+                <a:latin typeface="Arial"/>
+              </a:rPr>
+              <a:t>1. Từ khóa: "Hồ Gươm"
+2. Truy cập: google.com
+3. Kết quả trả về: Hơn 5.000.000 trang web chỉ trong 0,47 giây!
+4. Xem chi tiết: Nháy chuột vào bài viết của vietnamtourism.gov.vn (trang chính thức của Tổng cục Du lịch).</a:t>
+            </a:r>
+          </a:p>
+        </p:txBody>
+      </p:sp>
+      <p:sp>
+        <p:nvSpPr>
+          <p:cNvPr id="9" name="Rounded Rectangle 8"/>
+          <p:cNvSpPr/>
+          <p:nvPr/>
+        </p:nvSpPr>
+        <p:spPr>
+          <a:xfrm>
+            <a:off x="594360" y="4937760"/>
+            <a:ext cx="4206240" cy="640080"/>
+          </a:xfrm>
+          <a:prstGeom prst="roundRect">
+            <a:avLst/>
+          </a:prstGeom>
+          <a:solidFill>
+            <a:srgbClr val="DBEAFE"/>
+          </a:solidFill>
+          <a:ln w="12700">
+            <a:solidFill>
+              <a:srgbClr val="2563EB"/>
+            </a:solidFill>
+          </a:ln>
+        </p:spPr>
+        <p:style>
+          <a:lnRef idx="1">
+            <a:schemeClr val="accent1"/>
+          </a:lnRef>
+          <a:fillRef idx="3">
+            <a:schemeClr val="accent1"/>
+          </a:fillRef>
+          <a:effectRef idx="2">
+            <a:schemeClr val="accent1"/>
+          </a:effectRef>
+          <a:fontRef idx="minor">
+            <a:schemeClr val="lt1"/>
+          </a:fontRef>
+        </p:style>
+        <p:txBody>
+          <a:bodyPr rtlCol="0" anchor="ctr"/>
+          <a:lstStyle/>
+          <a:p>
+            <a:pPr algn="ctr"/>
+          </a:p>
+        </p:txBody>
+      </p:sp>
+      <p:sp>
+        <p:nvSpPr>
+          <p:cNvPr id="10" name="TextBox 9"/>
+          <p:cNvSpPr txBox="1"/>
+          <p:nvPr/>
+        </p:nvSpPr>
+        <p:spPr>
+          <a:xfrm>
+            <a:off x="685800" y="4983480"/>
+            <a:ext cx="4023360" cy="548639"/>
+          </a:xfrm>
+          <a:prstGeom prst="rect">
+            <a:avLst/>
+          </a:prstGeom>
+          <a:noFill/>
+        </p:spPr>
+        <p:txBody>
+          <a:bodyPr wrap="square" tIns="36576" bIns="36576" lIns="54864" rIns="54864">
+            <a:spAutoFit/>
+          </a:bodyPr>
+          <a:lstStyle/>
+          <a:p>
+            <a:pPr algn="l"/>
+            <a:r>
+              <a:rPr sz="1300" b="1">
+                <a:solidFill>
+                  <a:srgbClr val="1E3A8A"/>
+                </a:solidFill>
+                <a:latin typeface="Arial"/>
+              </a:rPr>
+              <a:t>💡 Mẹo nhỏ: Ưu tiên chọn các trang có đuôi .gov.vn hoặc .edu.vn để có thông tin tin cậy!</a:t>
+            </a:r>
+          </a:p>
+        </p:txBody>
+      </p:sp>
+      <p:sp>
+        <p:nvSpPr>
+          <p:cNvPr id="11" name="Rounded Rectangle 10"/>
+          <p:cNvSpPr/>
+          <p:nvPr/>
+        </p:nvSpPr>
+        <p:spPr>
+          <a:xfrm>
+            <a:off x="5166360" y="2194560"/>
+            <a:ext cx="6611112" cy="3520440"/>
+          </a:xfrm>
+          <a:prstGeom prst="roundRect">
+            <a:avLst/>
+          </a:prstGeom>
+          <a:solidFill>
+            <a:srgbClr val="FFFFFF"/>
+          </a:solidFill>
+          <a:ln w="12700">
+            <a:solidFill>
+              <a:srgbClr val="CBD5E1"/>
+            </a:solidFill>
+          </a:ln>
+        </p:spPr>
+        <p:style>
+          <a:lnRef idx="1">
+            <a:schemeClr val="accent1"/>
+          </a:lnRef>
+          <a:fillRef idx="3">
+            <a:schemeClr val="accent1"/>
+          </a:fillRef>
+          <a:effectRef idx="2">
+            <a:schemeClr val="accent1"/>
+          </a:effectRef>
+          <a:fontRef idx="minor">
+            <a:schemeClr val="lt1"/>
+          </a:fontRef>
+        </p:style>
+        <p:txBody>
+          <a:bodyPr rtlCol="0" anchor="ctr"/>
+          <a:lstStyle/>
+          <a:p>
+            <a:pPr algn="ctr"/>
           </a:p>
         </p:txBody>
       </p:sp>
       <p:pic>
         <p:nvPicPr>
-          <p:cNvPr id="5" name="Picture 4" descr="mascot_celebrate_trophy.jpg"/>
+          <p:cNvPr id="12" name="Picture 11" descr="sgk_p22_hinh13_ket_qua_ho_guom.png"/>
           <p:cNvPicPr>
             <a:picLocks noChangeAspect="1"/>
           </p:cNvPicPr>
@@ -4960,8 +7790,8 @@
         </p:blipFill>
         <p:spPr>
           <a:xfrm>
-            <a:off x="7772400" y="1371600"/>
-            <a:ext cx="3840480" cy="4114800"/>
+            <a:off x="5257800" y="2286000"/>
+            <a:ext cx="6428232" cy="3337560"/>
           </a:xfrm>
           <a:prstGeom prst="rect">
             <a:avLst/>
@@ -4973,6 +7803,2083 @@
   <p:clrMapOvr>
     <a:masterClrMapping/>
   </p:clrMapOvr>
+  <p:transition spd="med">
+    <p:fade/>
+  </p:transition>
+</p:sld>
+</file>
+
+<file path=ppt/slides/slide7.xml><?xml version="1.0" encoding="utf-8"?>
+<p:sld xmlns:a="http://schemas.openxmlformats.org/drawingml/2006/main" xmlns:p="http://schemas.openxmlformats.org/presentationml/2006/main" xmlns:r="http://schemas.openxmlformats.org/officeDocument/2006/relationships">
+  <p:cSld>
+    <p:spTree>
+      <p:nvGrpSpPr>
+        <p:cNvPr id="1" name=""/>
+        <p:cNvGrpSpPr/>
+        <p:nvPr/>
+      </p:nvGrpSpPr>
+      <p:grpSpPr/>
+      <p:sp>
+        <p:nvSpPr>
+          <p:cNvPr id="2" name="Rounded Rectangle 1"/>
+          <p:cNvSpPr/>
+          <p:nvPr/>
+        </p:nvSpPr>
+        <p:spPr>
+          <a:xfrm>
+            <a:off x="411480" y="1097280"/>
+            <a:ext cx="1856232" cy="329184"/>
+          </a:xfrm>
+          <a:prstGeom prst="roundRect">
+            <a:avLst/>
+          </a:prstGeom>
+          <a:solidFill>
+            <a:srgbClr val="1E3A8A"/>
+          </a:solidFill>
+          <a:ln>
+            <a:noFill/>
+          </a:ln>
+        </p:spPr>
+        <p:style>
+          <a:lnRef idx="1">
+            <a:schemeClr val="accent1"/>
+          </a:lnRef>
+          <a:fillRef idx="3">
+            <a:schemeClr val="accent1"/>
+          </a:fillRef>
+          <a:effectRef idx="2">
+            <a:schemeClr val="accent1"/>
+          </a:effectRef>
+          <a:fontRef idx="minor">
+            <a:schemeClr val="lt1"/>
+          </a:fontRef>
+        </p:style>
+        <p:txBody>
+          <a:bodyPr rtlCol="0" anchor="ctr"/>
+          <a:lstStyle/>
+          <a:p>
+            <a:pPr algn="ctr"/>
+          </a:p>
+        </p:txBody>
+      </p:sp>
+      <p:sp>
+        <p:nvSpPr>
+          <p:cNvPr id="3" name="TextBox 2"/>
+          <p:cNvSpPr txBox="1"/>
+          <p:nvPr/>
+        </p:nvSpPr>
+        <p:spPr>
+          <a:xfrm>
+            <a:off x="411480" y="1097280"/>
+            <a:ext cx="1856232" cy="329184"/>
+          </a:xfrm>
+          <a:prstGeom prst="rect">
+            <a:avLst/>
+          </a:prstGeom>
+          <a:noFill/>
+        </p:spPr>
+        <p:txBody>
+          <a:bodyPr wrap="square" tIns="36576" bIns="36576" lIns="54864" rIns="54864">
+            <a:spAutoFit/>
+          </a:bodyPr>
+          <a:lstStyle/>
+          <a:p>
+            <a:pPr algn="ctr"/>
+            <a:r>
+              <a:rPr sz="1200" b="1">
+                <a:solidFill>
+                  <a:srgbClr val="FFFFFF"/>
+                </a:solidFill>
+                <a:latin typeface="Arial"/>
+              </a:rPr>
+              <a:t>LUYỆN TẬP 🎯</a:t>
+            </a:r>
+          </a:p>
+        </p:txBody>
+      </p:sp>
+      <p:sp>
+        <p:nvSpPr>
+          <p:cNvPr id="4" name="TextBox 3"/>
+          <p:cNvSpPr txBox="1"/>
+          <p:nvPr/>
+        </p:nvSpPr>
+        <p:spPr>
+          <a:xfrm>
+            <a:off x="411480" y="1481328"/>
+            <a:ext cx="11338560" cy="411480"/>
+          </a:xfrm>
+          <a:prstGeom prst="rect">
+            <a:avLst/>
+          </a:prstGeom>
+          <a:noFill/>
+        </p:spPr>
+        <p:txBody>
+          <a:bodyPr wrap="square" tIns="36576" bIns="36576" lIns="54864" rIns="54864">
+            <a:spAutoFit/>
+          </a:bodyPr>
+          <a:lstStyle/>
+          <a:p>
+            <a:pPr algn="l"/>
+            <a:r>
+              <a:rPr sz="2300" b="1">
+                <a:solidFill>
+                  <a:srgbClr val="1E3A8A"/>
+                </a:solidFill>
+                <a:latin typeface="Arial"/>
+              </a:rPr>
+              <a:t>Bài tập 1: Thử tài chọn từ khóa chính xác nhất</a:t>
+            </a:r>
+          </a:p>
+        </p:txBody>
+      </p:sp>
+      <p:sp>
+        <p:nvSpPr>
+          <p:cNvPr id="5" name="TextBox 4"/>
+          <p:cNvSpPr txBox="1"/>
+          <p:nvPr/>
+        </p:nvSpPr>
+        <p:spPr>
+          <a:xfrm>
+            <a:off x="411480" y="1874519"/>
+            <a:ext cx="11338560" cy="274319"/>
+          </a:xfrm>
+          <a:prstGeom prst="rect">
+            <a:avLst/>
+          </a:prstGeom>
+          <a:noFill/>
+        </p:spPr>
+        <p:txBody>
+          <a:bodyPr wrap="square" tIns="36576" bIns="36576" lIns="54864" rIns="54864">
+            <a:spAutoFit/>
+          </a:bodyPr>
+          <a:lstStyle/>
+          <a:p>
+            <a:pPr algn="l"/>
+            <a:r>
+              <a:rPr sz="1400" b="0">
+                <a:solidFill>
+                  <a:srgbClr val="475569"/>
+                </a:solidFill>
+                <a:latin typeface="Arial"/>
+              </a:rPr>
+              <a:t>Đọc kỹ yêu cầu và cùng thảo luận nhóm đôi để đưa ra phương án đúng nhất</a:t>
+            </a:r>
+          </a:p>
+        </p:txBody>
+      </p:sp>
+      <p:sp>
+        <p:nvSpPr>
+          <p:cNvPr id="6" name="Rounded Rectangle 5"/>
+          <p:cNvSpPr/>
+          <p:nvPr/>
+        </p:nvSpPr>
+        <p:spPr>
+          <a:xfrm>
+            <a:off x="411480" y="2194560"/>
+            <a:ext cx="8046720" cy="868679"/>
+          </a:xfrm>
+          <a:prstGeom prst="roundRect">
+            <a:avLst/>
+          </a:prstGeom>
+          <a:solidFill>
+            <a:srgbClr val="DBEAFE"/>
+          </a:solidFill>
+          <a:ln w="25400">
+            <a:solidFill>
+              <a:srgbClr val="1E3A8A"/>
+            </a:solidFill>
+          </a:ln>
+        </p:spPr>
+        <p:style>
+          <a:lnRef idx="1">
+            <a:schemeClr val="accent1"/>
+          </a:lnRef>
+          <a:fillRef idx="3">
+            <a:schemeClr val="accent1"/>
+          </a:fillRef>
+          <a:effectRef idx="2">
+            <a:schemeClr val="accent1"/>
+          </a:effectRef>
+          <a:fontRef idx="minor">
+            <a:schemeClr val="lt1"/>
+          </a:fontRef>
+        </p:style>
+        <p:txBody>
+          <a:bodyPr rtlCol="0" anchor="ctr"/>
+          <a:lstStyle/>
+          <a:p>
+            <a:pPr algn="ctr"/>
+          </a:p>
+        </p:txBody>
+      </p:sp>
+      <p:sp>
+        <p:nvSpPr>
+          <p:cNvPr id="7" name="TextBox 6"/>
+          <p:cNvSpPr txBox="1"/>
+          <p:nvPr/>
+        </p:nvSpPr>
+        <p:spPr>
+          <a:xfrm>
+            <a:off x="594360" y="2267712"/>
+            <a:ext cx="7680960" cy="685800"/>
+          </a:xfrm>
+          <a:prstGeom prst="rect">
+            <a:avLst/>
+          </a:prstGeom>
+          <a:noFill/>
+        </p:spPr>
+        <p:txBody>
+          <a:bodyPr wrap="square" tIns="36576" bIns="36576" lIns="54864" rIns="54864">
+            <a:spAutoFit/>
+          </a:bodyPr>
+          <a:lstStyle/>
+          <a:p>
+            <a:pPr algn="l"/>
+            <a:r>
+              <a:rPr sz="1600" b="1">
+                <a:solidFill>
+                  <a:srgbClr val="1E3A8A"/>
+                </a:solidFill>
+                <a:latin typeface="Arial"/>
+              </a:rPr>
+              <a:t>❓ CÂU HỎI (SGK Trang 21):
+Nếu muốn tìm kiếm thông tin về Bảo tàng Dân tộc học Việt Nam, từ khóa nào sau đây là phù hợp nhất?</a:t>
+            </a:r>
+          </a:p>
+        </p:txBody>
+      </p:sp>
+      <p:sp>
+        <p:nvSpPr>
+          <p:cNvPr id="8" name="Rounded Rectangle 7"/>
+          <p:cNvSpPr/>
+          <p:nvPr/>
+        </p:nvSpPr>
+        <p:spPr>
+          <a:xfrm>
+            <a:off x="8641080" y="2194560"/>
+            <a:ext cx="3136392" cy="3520440"/>
+          </a:xfrm>
+          <a:prstGeom prst="roundRect">
+            <a:avLst/>
+          </a:prstGeom>
+          <a:solidFill>
+            <a:srgbClr val="FFFFFF"/>
+          </a:solidFill>
+          <a:ln w="12700">
+            <a:solidFill>
+              <a:srgbClr val="CBD5E1"/>
+            </a:solidFill>
+          </a:ln>
+        </p:spPr>
+        <p:style>
+          <a:lnRef idx="1">
+            <a:schemeClr val="accent1"/>
+          </a:lnRef>
+          <a:fillRef idx="3">
+            <a:schemeClr val="accent1"/>
+          </a:fillRef>
+          <a:effectRef idx="2">
+            <a:schemeClr val="accent1"/>
+          </a:effectRef>
+          <a:fontRef idx="minor">
+            <a:schemeClr val="lt1"/>
+          </a:fontRef>
+        </p:style>
+        <p:txBody>
+          <a:bodyPr rtlCol="0" anchor="ctr"/>
+          <a:lstStyle/>
+          <a:p>
+            <a:pPr algn="ctr"/>
+          </a:p>
+        </p:txBody>
+      </p:sp>
+      <p:pic>
+        <p:nvPicPr>
+          <p:cNvPr id="9" name="Picture 8" descr="museum_icon.jpg"/>
+          <p:cNvPicPr>
+            <a:picLocks noChangeAspect="1"/>
+          </p:cNvPicPr>
+          <p:nvPr/>
+        </p:nvPicPr>
+        <p:blipFill>
+          <a:blip r:embed="rId2"/>
+          <a:stretch>
+            <a:fillRect/>
+          </a:stretch>
+        </p:blipFill>
+        <p:spPr>
+          <a:xfrm>
+            <a:off x="8732520" y="2286000"/>
+            <a:ext cx="2953512" cy="3337560"/>
+          </a:xfrm>
+          <a:prstGeom prst="rect">
+            <a:avLst/>
+          </a:prstGeom>
+        </p:spPr>
+      </p:pic>
+      <p:sp>
+        <p:nvSpPr>
+          <p:cNvPr id="10" name="Rounded Rectangle 9"/>
+          <p:cNvSpPr/>
+          <p:nvPr/>
+        </p:nvSpPr>
+        <p:spPr>
+          <a:xfrm>
+            <a:off x="411480" y="3200400"/>
+            <a:ext cx="8046720" cy="566928"/>
+          </a:xfrm>
+          <a:prstGeom prst="roundRect">
+            <a:avLst/>
+          </a:prstGeom>
+          <a:solidFill>
+            <a:srgbClr val="FFFFFF"/>
+          </a:solidFill>
+          <a:ln w="12700">
+            <a:solidFill>
+              <a:srgbClr val="CBD5E1"/>
+            </a:solidFill>
+          </a:ln>
+        </p:spPr>
+        <p:style>
+          <a:lnRef idx="1">
+            <a:schemeClr val="accent1"/>
+          </a:lnRef>
+          <a:fillRef idx="3">
+            <a:schemeClr val="accent1"/>
+          </a:fillRef>
+          <a:effectRef idx="2">
+            <a:schemeClr val="accent1"/>
+          </a:effectRef>
+          <a:fontRef idx="minor">
+            <a:schemeClr val="lt1"/>
+          </a:fontRef>
+        </p:style>
+        <p:txBody>
+          <a:bodyPr rtlCol="0" anchor="ctr"/>
+          <a:lstStyle/>
+          <a:p>
+            <a:pPr algn="ctr"/>
+          </a:p>
+        </p:txBody>
+      </p:sp>
+      <p:sp>
+        <p:nvSpPr>
+          <p:cNvPr id="11" name="TextBox 10"/>
+          <p:cNvSpPr txBox="1"/>
+          <p:nvPr/>
+        </p:nvSpPr>
+        <p:spPr>
+          <a:xfrm>
+            <a:off x="594360" y="3246120"/>
+            <a:ext cx="7680960" cy="256032"/>
+          </a:xfrm>
+          <a:prstGeom prst="rect">
+            <a:avLst/>
+          </a:prstGeom>
+          <a:noFill/>
+        </p:spPr>
+        <p:txBody>
+          <a:bodyPr wrap="square" tIns="36576" bIns="36576" lIns="54864" rIns="54864">
+            <a:spAutoFit/>
+          </a:bodyPr>
+          <a:lstStyle/>
+          <a:p>
+            <a:pPr algn="l"/>
+            <a:r>
+              <a:rPr sz="1500" b="1">
+                <a:solidFill>
+                  <a:srgbClr val="0F172A"/>
+                </a:solidFill>
+                <a:latin typeface="Arial"/>
+              </a:rPr>
+              <a:t>A. Bảo tàng</a:t>
+            </a:r>
+          </a:p>
+        </p:txBody>
+      </p:sp>
+      <p:sp>
+        <p:nvSpPr>
+          <p:cNvPr id="12" name="TextBox 11"/>
+          <p:cNvSpPr txBox="1"/>
+          <p:nvPr/>
+        </p:nvSpPr>
+        <p:spPr>
+          <a:xfrm>
+            <a:off x="594360" y="3493008"/>
+            <a:ext cx="7680960" cy="228600"/>
+          </a:xfrm>
+          <a:prstGeom prst="rect">
+            <a:avLst/>
+          </a:prstGeom>
+          <a:noFill/>
+        </p:spPr>
+        <p:txBody>
+          <a:bodyPr wrap="square" tIns="36576" bIns="36576" lIns="54864" rIns="54864">
+            <a:spAutoFit/>
+          </a:bodyPr>
+          <a:lstStyle/>
+          <a:p>
+            <a:pPr algn="l"/>
+            <a:r>
+              <a:rPr sz="1300" b="0">
+                <a:solidFill>
+                  <a:srgbClr val="0F172A"/>
+                </a:solidFill>
+                <a:latin typeface="Arial"/>
+              </a:rPr>
+              <a:t>Chưa phù hợp: Quá rộng, ra hàng nghìn bảo tàng khác nhau ❌</a:t>
+            </a:r>
+          </a:p>
+        </p:txBody>
+      </p:sp>
+      <p:sp>
+        <p:nvSpPr>
+          <p:cNvPr id="13" name="Rounded Rectangle 12"/>
+          <p:cNvSpPr/>
+          <p:nvPr/>
+        </p:nvSpPr>
+        <p:spPr>
+          <a:xfrm>
+            <a:off x="411480" y="3840480"/>
+            <a:ext cx="8046720" cy="566928"/>
+          </a:xfrm>
+          <a:prstGeom prst="roundRect">
+            <a:avLst/>
+          </a:prstGeom>
+          <a:solidFill>
+            <a:srgbClr val="FFF7ED"/>
+          </a:solidFill>
+          <a:ln w="25400">
+            <a:solidFill>
+              <a:srgbClr val="EA580C"/>
+            </a:solidFill>
+          </a:ln>
+        </p:spPr>
+        <p:style>
+          <a:lnRef idx="1">
+            <a:schemeClr val="accent1"/>
+          </a:lnRef>
+          <a:fillRef idx="3">
+            <a:schemeClr val="accent1"/>
+          </a:fillRef>
+          <a:effectRef idx="2">
+            <a:schemeClr val="accent1"/>
+          </a:effectRef>
+          <a:fontRef idx="minor">
+            <a:schemeClr val="lt1"/>
+          </a:fontRef>
+        </p:style>
+        <p:txBody>
+          <a:bodyPr rtlCol="0" anchor="ctr"/>
+          <a:lstStyle/>
+          <a:p>
+            <a:pPr algn="ctr"/>
+          </a:p>
+        </p:txBody>
+      </p:sp>
+      <p:sp>
+        <p:nvSpPr>
+          <p:cNvPr id="14" name="TextBox 13"/>
+          <p:cNvSpPr txBox="1"/>
+          <p:nvPr/>
+        </p:nvSpPr>
+        <p:spPr>
+          <a:xfrm>
+            <a:off x="594360" y="3886200"/>
+            <a:ext cx="7680960" cy="256032"/>
+          </a:xfrm>
+          <a:prstGeom prst="rect">
+            <a:avLst/>
+          </a:prstGeom>
+          <a:noFill/>
+        </p:spPr>
+        <p:txBody>
+          <a:bodyPr wrap="square" tIns="36576" bIns="36576" lIns="54864" rIns="54864">
+            <a:spAutoFit/>
+          </a:bodyPr>
+          <a:lstStyle/>
+          <a:p>
+            <a:pPr algn="l"/>
+            <a:r>
+              <a:rPr sz="1500" b="1">
+                <a:solidFill>
+                  <a:srgbClr val="EA580C"/>
+                </a:solidFill>
+                <a:latin typeface="Arial"/>
+              </a:rPr>
+              <a:t>B. Bảo tàng Dân tộc học Việt Nam</a:t>
+            </a:r>
+          </a:p>
+        </p:txBody>
+      </p:sp>
+      <p:sp>
+        <p:nvSpPr>
+          <p:cNvPr id="15" name="TextBox 14"/>
+          <p:cNvSpPr txBox="1"/>
+          <p:nvPr/>
+        </p:nvSpPr>
+        <p:spPr>
+          <a:xfrm>
+            <a:off x="594360" y="4133088"/>
+            <a:ext cx="7680960" cy="228600"/>
+          </a:xfrm>
+          <a:prstGeom prst="rect">
+            <a:avLst/>
+          </a:prstGeom>
+          <a:noFill/>
+        </p:spPr>
+        <p:txBody>
+          <a:bodyPr wrap="square" tIns="36576" bIns="36576" lIns="54864" rIns="54864">
+            <a:spAutoFit/>
+          </a:bodyPr>
+          <a:lstStyle/>
+          <a:p>
+            <a:pPr algn="l"/>
+            <a:r>
+              <a:rPr sz="1300" b="1">
+                <a:solidFill>
+                  <a:srgbClr val="EA580C"/>
+                </a:solidFill>
+                <a:latin typeface="Arial"/>
+              </a:rPr>
+              <a:t>ĐÁP ÁN CHÍNH XÁC NHẤT: Đầy đủ, rõ ràng và đúng trọng tâm! 🏆 ✅</a:t>
+            </a:r>
+          </a:p>
+        </p:txBody>
+      </p:sp>
+      <p:sp>
+        <p:nvSpPr>
+          <p:cNvPr id="16" name="Rounded Rectangle 15"/>
+          <p:cNvSpPr/>
+          <p:nvPr/>
+        </p:nvSpPr>
+        <p:spPr>
+          <a:xfrm>
+            <a:off x="411480" y="4480560"/>
+            <a:ext cx="8046720" cy="566928"/>
+          </a:xfrm>
+          <a:prstGeom prst="roundRect">
+            <a:avLst/>
+          </a:prstGeom>
+          <a:solidFill>
+            <a:srgbClr val="FFFFFF"/>
+          </a:solidFill>
+          <a:ln w="12700">
+            <a:solidFill>
+              <a:srgbClr val="CBD5E1"/>
+            </a:solidFill>
+          </a:ln>
+        </p:spPr>
+        <p:style>
+          <a:lnRef idx="1">
+            <a:schemeClr val="accent1"/>
+          </a:lnRef>
+          <a:fillRef idx="3">
+            <a:schemeClr val="accent1"/>
+          </a:fillRef>
+          <a:effectRef idx="2">
+            <a:schemeClr val="accent1"/>
+          </a:effectRef>
+          <a:fontRef idx="minor">
+            <a:schemeClr val="lt1"/>
+          </a:fontRef>
+        </p:style>
+        <p:txBody>
+          <a:bodyPr rtlCol="0" anchor="ctr"/>
+          <a:lstStyle/>
+          <a:p>
+            <a:pPr algn="ctr"/>
+          </a:p>
+        </p:txBody>
+      </p:sp>
+      <p:sp>
+        <p:nvSpPr>
+          <p:cNvPr id="17" name="TextBox 16"/>
+          <p:cNvSpPr txBox="1"/>
+          <p:nvPr/>
+        </p:nvSpPr>
+        <p:spPr>
+          <a:xfrm>
+            <a:off x="594360" y="4526280"/>
+            <a:ext cx="7680960" cy="256032"/>
+          </a:xfrm>
+          <a:prstGeom prst="rect">
+            <a:avLst/>
+          </a:prstGeom>
+          <a:noFill/>
+        </p:spPr>
+        <p:txBody>
+          <a:bodyPr wrap="square" tIns="36576" bIns="36576" lIns="54864" rIns="54864">
+            <a:spAutoFit/>
+          </a:bodyPr>
+          <a:lstStyle/>
+          <a:p>
+            <a:pPr algn="l"/>
+            <a:r>
+              <a:rPr sz="1500" b="1">
+                <a:solidFill>
+                  <a:srgbClr val="0F172A"/>
+                </a:solidFill>
+                <a:latin typeface="Arial"/>
+              </a:rPr>
+              <a:t>C. Bảo tàng Việt Nam</a:t>
+            </a:r>
+          </a:p>
+        </p:txBody>
+      </p:sp>
+      <p:sp>
+        <p:nvSpPr>
+          <p:cNvPr id="18" name="TextBox 17"/>
+          <p:cNvSpPr txBox="1"/>
+          <p:nvPr/>
+        </p:nvSpPr>
+        <p:spPr>
+          <a:xfrm>
+            <a:off x="594360" y="4773168"/>
+            <a:ext cx="7680960" cy="228600"/>
+          </a:xfrm>
+          <a:prstGeom prst="rect">
+            <a:avLst/>
+          </a:prstGeom>
+          <a:noFill/>
+        </p:spPr>
+        <p:txBody>
+          <a:bodyPr wrap="square" tIns="36576" bIns="36576" lIns="54864" rIns="54864">
+            <a:spAutoFit/>
+          </a:bodyPr>
+          <a:lstStyle/>
+          <a:p>
+            <a:pPr algn="l"/>
+            <a:r>
+              <a:rPr sz="1300" b="0">
+                <a:solidFill>
+                  <a:srgbClr val="0F172A"/>
+                </a:solidFill>
+                <a:latin typeface="Arial"/>
+              </a:rPr>
+              <a:t>Chưa phù hợp: Không chỉ rõ bảo tàng dân tộc học nào ❌</a:t>
+            </a:r>
+          </a:p>
+        </p:txBody>
+      </p:sp>
+      <p:sp>
+        <p:nvSpPr>
+          <p:cNvPr id="19" name="Rounded Rectangle 18"/>
+          <p:cNvSpPr/>
+          <p:nvPr/>
+        </p:nvSpPr>
+        <p:spPr>
+          <a:xfrm>
+            <a:off x="411480" y="5120640"/>
+            <a:ext cx="8046720" cy="566928"/>
+          </a:xfrm>
+          <a:prstGeom prst="roundRect">
+            <a:avLst/>
+          </a:prstGeom>
+          <a:solidFill>
+            <a:srgbClr val="FFFFFF"/>
+          </a:solidFill>
+          <a:ln w="12700">
+            <a:solidFill>
+              <a:srgbClr val="CBD5E1"/>
+            </a:solidFill>
+          </a:ln>
+        </p:spPr>
+        <p:style>
+          <a:lnRef idx="1">
+            <a:schemeClr val="accent1"/>
+          </a:lnRef>
+          <a:fillRef idx="3">
+            <a:schemeClr val="accent1"/>
+          </a:fillRef>
+          <a:effectRef idx="2">
+            <a:schemeClr val="accent1"/>
+          </a:effectRef>
+          <a:fontRef idx="minor">
+            <a:schemeClr val="lt1"/>
+          </a:fontRef>
+        </p:style>
+        <p:txBody>
+          <a:bodyPr rtlCol="0" anchor="ctr"/>
+          <a:lstStyle/>
+          <a:p>
+            <a:pPr algn="ctr"/>
+          </a:p>
+        </p:txBody>
+      </p:sp>
+      <p:sp>
+        <p:nvSpPr>
+          <p:cNvPr id="20" name="TextBox 19"/>
+          <p:cNvSpPr txBox="1"/>
+          <p:nvPr/>
+        </p:nvSpPr>
+        <p:spPr>
+          <a:xfrm>
+            <a:off x="594360" y="5166359"/>
+            <a:ext cx="7680960" cy="256032"/>
+          </a:xfrm>
+          <a:prstGeom prst="rect">
+            <a:avLst/>
+          </a:prstGeom>
+          <a:noFill/>
+        </p:spPr>
+        <p:txBody>
+          <a:bodyPr wrap="square" tIns="36576" bIns="36576" lIns="54864" rIns="54864">
+            <a:spAutoFit/>
+          </a:bodyPr>
+          <a:lstStyle/>
+          <a:p>
+            <a:pPr algn="l"/>
+            <a:r>
+              <a:rPr sz="1500" b="1">
+                <a:solidFill>
+                  <a:srgbClr val="0F172A"/>
+                </a:solidFill>
+                <a:latin typeface="Arial"/>
+              </a:rPr>
+              <a:t>D. Các dân tộc ở Việt Nam</a:t>
+            </a:r>
+          </a:p>
+        </p:txBody>
+      </p:sp>
+      <p:sp>
+        <p:nvSpPr>
+          <p:cNvPr id="21" name="TextBox 20"/>
+          <p:cNvSpPr txBox="1"/>
+          <p:nvPr/>
+        </p:nvSpPr>
+        <p:spPr>
+          <a:xfrm>
+            <a:off x="594360" y="5413248"/>
+            <a:ext cx="7680960" cy="228600"/>
+          </a:xfrm>
+          <a:prstGeom prst="rect">
+            <a:avLst/>
+          </a:prstGeom>
+          <a:noFill/>
+        </p:spPr>
+        <p:txBody>
+          <a:bodyPr wrap="square" tIns="36576" bIns="36576" lIns="54864" rIns="54864">
+            <a:spAutoFit/>
+          </a:bodyPr>
+          <a:lstStyle/>
+          <a:p>
+            <a:pPr algn="l"/>
+            <a:r>
+              <a:rPr sz="1300" b="0">
+                <a:solidFill>
+                  <a:srgbClr val="0F172A"/>
+                </a:solidFill>
+                <a:latin typeface="Arial"/>
+              </a:rPr>
+              <a:t>Chưa phù hợp: Sẽ tìm về con người, văn hóa thay vì bảo tàng ❌</a:t>
+            </a:r>
+          </a:p>
+        </p:txBody>
+      </p:sp>
+    </p:spTree>
+  </p:cSld>
+  <p:clrMapOvr>
+    <a:masterClrMapping/>
+  </p:clrMapOvr>
+  <p:transition spd="med">
+    <p:push dir="l"/>
+  </p:transition>
+</p:sld>
+</file>
+
+<file path=ppt/slides/slide8.xml><?xml version="1.0" encoding="utf-8"?>
+<p:sld xmlns:a="http://schemas.openxmlformats.org/drawingml/2006/main" xmlns:p="http://schemas.openxmlformats.org/presentationml/2006/main" xmlns:r="http://schemas.openxmlformats.org/officeDocument/2006/relationships">
+  <p:cSld>
+    <p:spTree>
+      <p:nvGrpSpPr>
+        <p:cNvPr id="1" name=""/>
+        <p:cNvGrpSpPr/>
+        <p:nvPr/>
+      </p:nvGrpSpPr>
+      <p:grpSpPr/>
+      <p:sp>
+        <p:nvSpPr>
+          <p:cNvPr id="2" name="Rounded Rectangle 1"/>
+          <p:cNvSpPr/>
+          <p:nvPr/>
+        </p:nvSpPr>
+        <p:spPr>
+          <a:xfrm>
+            <a:off x="411480" y="1097280"/>
+            <a:ext cx="2807208" cy="329184"/>
+          </a:xfrm>
+          <a:prstGeom prst="roundRect">
+            <a:avLst/>
+          </a:prstGeom>
+          <a:solidFill>
+            <a:srgbClr val="1E3A8A"/>
+          </a:solidFill>
+          <a:ln>
+            <a:noFill/>
+          </a:ln>
+        </p:spPr>
+        <p:style>
+          <a:lnRef idx="1">
+            <a:schemeClr val="accent1"/>
+          </a:lnRef>
+          <a:fillRef idx="3">
+            <a:schemeClr val="accent1"/>
+          </a:fillRef>
+          <a:effectRef idx="2">
+            <a:schemeClr val="accent1"/>
+          </a:effectRef>
+          <a:fontRef idx="minor">
+            <a:schemeClr val="lt1"/>
+          </a:fontRef>
+        </p:style>
+        <p:txBody>
+          <a:bodyPr rtlCol="0" anchor="ctr"/>
+          <a:lstStyle/>
+          <a:p>
+            <a:pPr algn="ctr"/>
+          </a:p>
+        </p:txBody>
+      </p:sp>
+      <p:sp>
+        <p:nvSpPr>
+          <p:cNvPr id="3" name="TextBox 2"/>
+          <p:cNvSpPr txBox="1"/>
+          <p:nvPr/>
+        </p:nvSpPr>
+        <p:spPr>
+          <a:xfrm>
+            <a:off x="411480" y="1097280"/>
+            <a:ext cx="2807208" cy="329184"/>
+          </a:xfrm>
+          <a:prstGeom prst="rect">
+            <a:avLst/>
+          </a:prstGeom>
+          <a:noFill/>
+        </p:spPr>
+        <p:txBody>
+          <a:bodyPr wrap="square" tIns="36576" bIns="36576" lIns="54864" rIns="54864">
+            <a:spAutoFit/>
+          </a:bodyPr>
+          <a:lstStyle/>
+          <a:p>
+            <a:pPr algn="ctr"/>
+            <a:r>
+              <a:rPr sz="1200" b="1">
+                <a:solidFill>
+                  <a:srgbClr val="FFFFFF"/>
+                </a:solidFill>
+                <a:latin typeface="Arial"/>
+              </a:rPr>
+              <a:t>TRÒ CHƠI GHÉP NỐI 🧩</a:t>
+            </a:r>
+          </a:p>
+        </p:txBody>
+      </p:sp>
+      <p:sp>
+        <p:nvSpPr>
+          <p:cNvPr id="4" name="TextBox 3"/>
+          <p:cNvSpPr txBox="1"/>
+          <p:nvPr/>
+        </p:nvSpPr>
+        <p:spPr>
+          <a:xfrm>
+            <a:off x="411480" y="1481328"/>
+            <a:ext cx="11338560" cy="411480"/>
+          </a:xfrm>
+          <a:prstGeom prst="rect">
+            <a:avLst/>
+          </a:prstGeom>
+          <a:noFill/>
+        </p:spPr>
+        <p:txBody>
+          <a:bodyPr wrap="square" tIns="36576" bIns="36576" lIns="54864" rIns="54864">
+            <a:spAutoFit/>
+          </a:bodyPr>
+          <a:lstStyle/>
+          <a:p>
+            <a:pPr algn="l"/>
+            <a:r>
+              <a:rPr sz="2300" b="1">
+                <a:solidFill>
+                  <a:srgbClr val="1E3A8A"/>
+                </a:solidFill>
+                <a:latin typeface="Arial"/>
+              </a:rPr>
+              <a:t>Bài tập 2: Ghép nối Chủ đề &amp; Từ khóa tương ứng</a:t>
+            </a:r>
+          </a:p>
+        </p:txBody>
+      </p:sp>
+      <p:sp>
+        <p:nvSpPr>
+          <p:cNvPr id="5" name="TextBox 4"/>
+          <p:cNvSpPr txBox="1"/>
+          <p:nvPr/>
+        </p:nvSpPr>
+        <p:spPr>
+          <a:xfrm>
+            <a:off x="411480" y="1874519"/>
+            <a:ext cx="11338560" cy="274319"/>
+          </a:xfrm>
+          <a:prstGeom prst="rect">
+            <a:avLst/>
+          </a:prstGeom>
+          <a:noFill/>
+        </p:spPr>
+        <p:txBody>
+          <a:bodyPr wrap="square" tIns="36576" bIns="36576" lIns="54864" rIns="54864">
+            <a:spAutoFit/>
+          </a:bodyPr>
+          <a:lstStyle/>
+          <a:p>
+            <a:pPr algn="l"/>
+            <a:r>
+              <a:rPr sz="1400" b="0">
+                <a:solidFill>
+                  <a:srgbClr val="475569"/>
+                </a:solidFill>
+                <a:latin typeface="Arial"/>
+              </a:rPr>
+              <a:t>Cùng nối chủ đề bài học ở Cột A với từ khóa tìm kiếm phù hợp nhất ở Cột B</a:t>
+            </a:r>
+          </a:p>
+        </p:txBody>
+      </p:sp>
+      <p:sp>
+        <p:nvSpPr>
+          <p:cNvPr id="6" name="Rounded Rectangle 5"/>
+          <p:cNvSpPr/>
+          <p:nvPr/>
+        </p:nvSpPr>
+        <p:spPr>
+          <a:xfrm>
+            <a:off x="411480" y="2240280"/>
+            <a:ext cx="3474720" cy="960119"/>
+          </a:xfrm>
+          <a:prstGeom prst="roundRect">
+            <a:avLst/>
+          </a:prstGeom>
+          <a:solidFill>
+            <a:srgbClr val="FFFFFF"/>
+          </a:solidFill>
+          <a:ln w="25400">
+            <a:solidFill>
+              <a:srgbClr val="1E3A8A"/>
+            </a:solidFill>
+          </a:ln>
+        </p:spPr>
+        <p:style>
+          <a:lnRef idx="1">
+            <a:schemeClr val="accent1"/>
+          </a:lnRef>
+          <a:fillRef idx="3">
+            <a:schemeClr val="accent1"/>
+          </a:fillRef>
+          <a:effectRef idx="2">
+            <a:schemeClr val="accent1"/>
+          </a:effectRef>
+          <a:fontRef idx="minor">
+            <a:schemeClr val="lt1"/>
+          </a:fontRef>
+        </p:style>
+        <p:txBody>
+          <a:bodyPr rtlCol="0" anchor="ctr"/>
+          <a:lstStyle/>
+          <a:p>
+            <a:pPr algn="ctr"/>
+          </a:p>
+        </p:txBody>
+      </p:sp>
+      <p:sp>
+        <p:nvSpPr>
+          <p:cNvPr id="7" name="TextBox 6"/>
+          <p:cNvSpPr txBox="1"/>
+          <p:nvPr/>
+        </p:nvSpPr>
+        <p:spPr>
+          <a:xfrm>
+            <a:off x="548640" y="2423160"/>
+            <a:ext cx="3200400" cy="594359"/>
+          </a:xfrm>
+          <a:prstGeom prst="rect">
+            <a:avLst/>
+          </a:prstGeom>
+          <a:noFill/>
+        </p:spPr>
+        <p:txBody>
+          <a:bodyPr wrap="square" tIns="36576" bIns="36576" lIns="54864" rIns="54864">
+            <a:spAutoFit/>
+          </a:bodyPr>
+          <a:lstStyle/>
+          <a:p>
+            <a:pPr algn="l"/>
+            <a:r>
+              <a:rPr sz="1500" b="1">
+                <a:solidFill>
+                  <a:srgbClr val="1E3A8A"/>
+                </a:solidFill>
+                <a:latin typeface="Arial"/>
+              </a:rPr>
+              <a:t>Chủ đề 1: Tìm hiểu các vua thời Hùng Vương</a:t>
+            </a:r>
+          </a:p>
+        </p:txBody>
+      </p:sp>
+      <p:sp>
+        <p:nvSpPr>
+          <p:cNvPr id="8" name="TextBox 7"/>
+          <p:cNvSpPr txBox="1"/>
+          <p:nvPr/>
+        </p:nvSpPr>
+        <p:spPr>
+          <a:xfrm>
+            <a:off x="3931920" y="2468880"/>
+            <a:ext cx="731520" cy="502919"/>
+          </a:xfrm>
+          <a:prstGeom prst="rect">
+            <a:avLst/>
+          </a:prstGeom>
+          <a:noFill/>
+        </p:spPr>
+        <p:txBody>
+          <a:bodyPr wrap="square" tIns="36576" bIns="36576" lIns="54864" rIns="54864">
+            <a:spAutoFit/>
+          </a:bodyPr>
+          <a:lstStyle/>
+          <a:p>
+            <a:pPr algn="ctr"/>
+            <a:r>
+              <a:rPr sz="2000" b="1">
+                <a:solidFill>
+                  <a:srgbClr val="1E3A8A"/>
+                </a:solidFill>
+                <a:latin typeface="Arial"/>
+              </a:rPr>
+              <a:t>──►</a:t>
+            </a:r>
+          </a:p>
+        </p:txBody>
+      </p:sp>
+      <p:sp>
+        <p:nvSpPr>
+          <p:cNvPr id="9" name="Rounded Rectangle 8"/>
+          <p:cNvSpPr/>
+          <p:nvPr/>
+        </p:nvSpPr>
+        <p:spPr>
+          <a:xfrm>
+            <a:off x="4709160" y="2240280"/>
+            <a:ext cx="3291840" cy="960119"/>
+          </a:xfrm>
+          <a:prstGeom prst="roundRect">
+            <a:avLst/>
+          </a:prstGeom>
+          <a:solidFill>
+            <a:srgbClr val="FFFFFF"/>
+          </a:solidFill>
+          <a:ln w="25400">
+            <a:solidFill>
+              <a:srgbClr val="1E3A8A"/>
+            </a:solidFill>
+          </a:ln>
+        </p:spPr>
+        <p:style>
+          <a:lnRef idx="1">
+            <a:schemeClr val="accent1"/>
+          </a:lnRef>
+          <a:fillRef idx="3">
+            <a:schemeClr val="accent1"/>
+          </a:fillRef>
+          <a:effectRef idx="2">
+            <a:schemeClr val="accent1"/>
+          </a:effectRef>
+          <a:fontRef idx="minor">
+            <a:schemeClr val="lt1"/>
+          </a:fontRef>
+        </p:style>
+        <p:txBody>
+          <a:bodyPr rtlCol="0" anchor="ctr"/>
+          <a:lstStyle/>
+          <a:p>
+            <a:pPr algn="ctr"/>
+          </a:p>
+        </p:txBody>
+      </p:sp>
+      <p:sp>
+        <p:nvSpPr>
+          <p:cNvPr id="10" name="TextBox 9"/>
+          <p:cNvSpPr txBox="1"/>
+          <p:nvPr/>
+        </p:nvSpPr>
+        <p:spPr>
+          <a:xfrm>
+            <a:off x="4846320" y="2468880"/>
+            <a:ext cx="3017520" cy="502919"/>
+          </a:xfrm>
+          <a:prstGeom prst="rect">
+            <a:avLst/>
+          </a:prstGeom>
+          <a:noFill/>
+        </p:spPr>
+        <p:txBody>
+          <a:bodyPr wrap="square" tIns="36576" bIns="36576" lIns="54864" rIns="54864">
+            <a:spAutoFit/>
+          </a:bodyPr>
+          <a:lstStyle/>
+          <a:p>
+            <a:pPr algn="l"/>
+            <a:r>
+              <a:rPr sz="1600" b="1">
+                <a:solidFill>
+                  <a:srgbClr val="1E3A8A"/>
+                </a:solidFill>
+                <a:latin typeface="Arial"/>
+              </a:rPr>
+              <a:t>Từ khóa: "Các đời vua Hùng"</a:t>
+            </a:r>
+          </a:p>
+        </p:txBody>
+      </p:sp>
+      <p:sp>
+        <p:nvSpPr>
+          <p:cNvPr id="11" name="Rounded Rectangle 10"/>
+          <p:cNvSpPr/>
+          <p:nvPr/>
+        </p:nvSpPr>
+        <p:spPr>
+          <a:xfrm>
+            <a:off x="411480" y="3383280"/>
+            <a:ext cx="3474720" cy="960119"/>
+          </a:xfrm>
+          <a:prstGeom prst="roundRect">
+            <a:avLst/>
+          </a:prstGeom>
+          <a:solidFill>
+            <a:srgbClr val="FFFFFF"/>
+          </a:solidFill>
+          <a:ln w="25400">
+            <a:solidFill>
+              <a:srgbClr val="2563EB"/>
+            </a:solidFill>
+          </a:ln>
+        </p:spPr>
+        <p:style>
+          <a:lnRef idx="1">
+            <a:schemeClr val="accent1"/>
+          </a:lnRef>
+          <a:fillRef idx="3">
+            <a:schemeClr val="accent1"/>
+          </a:fillRef>
+          <a:effectRef idx="2">
+            <a:schemeClr val="accent1"/>
+          </a:effectRef>
+          <a:fontRef idx="minor">
+            <a:schemeClr val="lt1"/>
+          </a:fontRef>
+        </p:style>
+        <p:txBody>
+          <a:bodyPr rtlCol="0" anchor="ctr"/>
+          <a:lstStyle/>
+          <a:p>
+            <a:pPr algn="ctr"/>
+          </a:p>
+        </p:txBody>
+      </p:sp>
+      <p:sp>
+        <p:nvSpPr>
+          <p:cNvPr id="12" name="TextBox 11"/>
+          <p:cNvSpPr txBox="1"/>
+          <p:nvPr/>
+        </p:nvSpPr>
+        <p:spPr>
+          <a:xfrm>
+            <a:off x="548640" y="3566160"/>
+            <a:ext cx="3200400" cy="594360"/>
+          </a:xfrm>
+          <a:prstGeom prst="rect">
+            <a:avLst/>
+          </a:prstGeom>
+          <a:noFill/>
+        </p:spPr>
+        <p:txBody>
+          <a:bodyPr wrap="square" tIns="36576" bIns="36576" lIns="54864" rIns="54864">
+            <a:spAutoFit/>
+          </a:bodyPr>
+          <a:lstStyle/>
+          <a:p>
+            <a:pPr algn="l"/>
+            <a:r>
+              <a:rPr sz="1500" b="1">
+                <a:solidFill>
+                  <a:srgbClr val="2563EB"/>
+                </a:solidFill>
+                <a:latin typeface="Arial"/>
+              </a:rPr>
+              <a:t>Chủ đề 2: Tìm hiểu danh lam thắng cảnh Hà Nội</a:t>
+            </a:r>
+          </a:p>
+        </p:txBody>
+      </p:sp>
+      <p:sp>
+        <p:nvSpPr>
+          <p:cNvPr id="13" name="TextBox 12"/>
+          <p:cNvSpPr txBox="1"/>
+          <p:nvPr/>
+        </p:nvSpPr>
+        <p:spPr>
+          <a:xfrm>
+            <a:off x="3931920" y="3611880"/>
+            <a:ext cx="731520" cy="502919"/>
+          </a:xfrm>
+          <a:prstGeom prst="rect">
+            <a:avLst/>
+          </a:prstGeom>
+          <a:noFill/>
+        </p:spPr>
+        <p:txBody>
+          <a:bodyPr wrap="square" tIns="36576" bIns="36576" lIns="54864" rIns="54864">
+            <a:spAutoFit/>
+          </a:bodyPr>
+          <a:lstStyle/>
+          <a:p>
+            <a:pPr algn="ctr"/>
+            <a:r>
+              <a:rPr sz="2000" b="1">
+                <a:solidFill>
+                  <a:srgbClr val="2563EB"/>
+                </a:solidFill>
+                <a:latin typeface="Arial"/>
+              </a:rPr>
+              <a:t>──►</a:t>
+            </a:r>
+          </a:p>
+        </p:txBody>
+      </p:sp>
+      <p:sp>
+        <p:nvSpPr>
+          <p:cNvPr id="14" name="Rounded Rectangle 13"/>
+          <p:cNvSpPr/>
+          <p:nvPr/>
+        </p:nvSpPr>
+        <p:spPr>
+          <a:xfrm>
+            <a:off x="4709160" y="3383280"/>
+            <a:ext cx="3291840" cy="960119"/>
+          </a:xfrm>
+          <a:prstGeom prst="roundRect">
+            <a:avLst/>
+          </a:prstGeom>
+          <a:solidFill>
+            <a:srgbClr val="FFFFFF"/>
+          </a:solidFill>
+          <a:ln w="25400">
+            <a:solidFill>
+              <a:srgbClr val="2563EB"/>
+            </a:solidFill>
+          </a:ln>
+        </p:spPr>
+        <p:style>
+          <a:lnRef idx="1">
+            <a:schemeClr val="accent1"/>
+          </a:lnRef>
+          <a:fillRef idx="3">
+            <a:schemeClr val="accent1"/>
+          </a:fillRef>
+          <a:effectRef idx="2">
+            <a:schemeClr val="accent1"/>
+          </a:effectRef>
+          <a:fontRef idx="minor">
+            <a:schemeClr val="lt1"/>
+          </a:fontRef>
+        </p:style>
+        <p:txBody>
+          <a:bodyPr rtlCol="0" anchor="ctr"/>
+          <a:lstStyle/>
+          <a:p>
+            <a:pPr algn="ctr"/>
+          </a:p>
+        </p:txBody>
+      </p:sp>
+      <p:sp>
+        <p:nvSpPr>
+          <p:cNvPr id="15" name="TextBox 14"/>
+          <p:cNvSpPr txBox="1"/>
+          <p:nvPr/>
+        </p:nvSpPr>
+        <p:spPr>
+          <a:xfrm>
+            <a:off x="4846320" y="3611880"/>
+            <a:ext cx="3017520" cy="502919"/>
+          </a:xfrm>
+          <a:prstGeom prst="rect">
+            <a:avLst/>
+          </a:prstGeom>
+          <a:noFill/>
+        </p:spPr>
+        <p:txBody>
+          <a:bodyPr wrap="square" tIns="36576" bIns="36576" lIns="54864" rIns="54864">
+            <a:spAutoFit/>
+          </a:bodyPr>
+          <a:lstStyle/>
+          <a:p>
+            <a:pPr algn="l"/>
+            <a:r>
+              <a:rPr sz="1600" b="1">
+                <a:solidFill>
+                  <a:srgbClr val="2563EB"/>
+                </a:solidFill>
+                <a:latin typeface="Arial"/>
+              </a:rPr>
+              <a:t>Từ khóa: "Hồ Gươm Hà Nội"</a:t>
+            </a:r>
+          </a:p>
+        </p:txBody>
+      </p:sp>
+      <p:sp>
+        <p:nvSpPr>
+          <p:cNvPr id="16" name="Rounded Rectangle 15"/>
+          <p:cNvSpPr/>
+          <p:nvPr/>
+        </p:nvSpPr>
+        <p:spPr>
+          <a:xfrm>
+            <a:off x="411480" y="4526280"/>
+            <a:ext cx="3474720" cy="960119"/>
+          </a:xfrm>
+          <a:prstGeom prst="roundRect">
+            <a:avLst/>
+          </a:prstGeom>
+          <a:solidFill>
+            <a:srgbClr val="FFFFFF"/>
+          </a:solidFill>
+          <a:ln w="25400">
+            <a:solidFill>
+              <a:srgbClr val="16A34A"/>
+            </a:solidFill>
+          </a:ln>
+        </p:spPr>
+        <p:style>
+          <a:lnRef idx="1">
+            <a:schemeClr val="accent1"/>
+          </a:lnRef>
+          <a:fillRef idx="3">
+            <a:schemeClr val="accent1"/>
+          </a:fillRef>
+          <a:effectRef idx="2">
+            <a:schemeClr val="accent1"/>
+          </a:effectRef>
+          <a:fontRef idx="minor">
+            <a:schemeClr val="lt1"/>
+          </a:fontRef>
+        </p:style>
+        <p:txBody>
+          <a:bodyPr rtlCol="0" anchor="ctr"/>
+          <a:lstStyle/>
+          <a:p>
+            <a:pPr algn="ctr"/>
+          </a:p>
+        </p:txBody>
+      </p:sp>
+      <p:sp>
+        <p:nvSpPr>
+          <p:cNvPr id="17" name="TextBox 16"/>
+          <p:cNvSpPr txBox="1"/>
+          <p:nvPr/>
+        </p:nvSpPr>
+        <p:spPr>
+          <a:xfrm>
+            <a:off x="548640" y="4709160"/>
+            <a:ext cx="3200400" cy="594360"/>
+          </a:xfrm>
+          <a:prstGeom prst="rect">
+            <a:avLst/>
+          </a:prstGeom>
+          <a:noFill/>
+        </p:spPr>
+        <p:txBody>
+          <a:bodyPr wrap="square" tIns="36576" bIns="36576" lIns="54864" rIns="54864">
+            <a:spAutoFit/>
+          </a:bodyPr>
+          <a:lstStyle/>
+          <a:p>
+            <a:pPr algn="l"/>
+            <a:r>
+              <a:rPr sz="1500" b="1">
+                <a:solidFill>
+                  <a:srgbClr val="16A34A"/>
+                </a:solidFill>
+                <a:latin typeface="Arial"/>
+              </a:rPr>
+              <a:t>Chủ đề 3: Tìm hiểu vai trò của không khí</a:t>
+            </a:r>
+          </a:p>
+        </p:txBody>
+      </p:sp>
+      <p:sp>
+        <p:nvSpPr>
+          <p:cNvPr id="18" name="TextBox 17"/>
+          <p:cNvSpPr txBox="1"/>
+          <p:nvPr/>
+        </p:nvSpPr>
+        <p:spPr>
+          <a:xfrm>
+            <a:off x="3931920" y="4754880"/>
+            <a:ext cx="731520" cy="502919"/>
+          </a:xfrm>
+          <a:prstGeom prst="rect">
+            <a:avLst/>
+          </a:prstGeom>
+          <a:noFill/>
+        </p:spPr>
+        <p:txBody>
+          <a:bodyPr wrap="square" tIns="36576" bIns="36576" lIns="54864" rIns="54864">
+            <a:spAutoFit/>
+          </a:bodyPr>
+          <a:lstStyle/>
+          <a:p>
+            <a:pPr algn="ctr"/>
+            <a:r>
+              <a:rPr sz="2000" b="1">
+                <a:solidFill>
+                  <a:srgbClr val="16A34A"/>
+                </a:solidFill>
+                <a:latin typeface="Arial"/>
+              </a:rPr>
+              <a:t>──►</a:t>
+            </a:r>
+          </a:p>
+        </p:txBody>
+      </p:sp>
+      <p:sp>
+        <p:nvSpPr>
+          <p:cNvPr id="19" name="Rounded Rectangle 18"/>
+          <p:cNvSpPr/>
+          <p:nvPr/>
+        </p:nvSpPr>
+        <p:spPr>
+          <a:xfrm>
+            <a:off x="4709160" y="4526280"/>
+            <a:ext cx="3291840" cy="960119"/>
+          </a:xfrm>
+          <a:prstGeom prst="roundRect">
+            <a:avLst/>
+          </a:prstGeom>
+          <a:solidFill>
+            <a:srgbClr val="FFFFFF"/>
+          </a:solidFill>
+          <a:ln w="25400">
+            <a:solidFill>
+              <a:srgbClr val="16A34A"/>
+            </a:solidFill>
+          </a:ln>
+        </p:spPr>
+        <p:style>
+          <a:lnRef idx="1">
+            <a:schemeClr val="accent1"/>
+          </a:lnRef>
+          <a:fillRef idx="3">
+            <a:schemeClr val="accent1"/>
+          </a:fillRef>
+          <a:effectRef idx="2">
+            <a:schemeClr val="accent1"/>
+          </a:effectRef>
+          <a:fontRef idx="minor">
+            <a:schemeClr val="lt1"/>
+          </a:fontRef>
+        </p:style>
+        <p:txBody>
+          <a:bodyPr rtlCol="0" anchor="ctr"/>
+          <a:lstStyle/>
+          <a:p>
+            <a:pPr algn="ctr"/>
+          </a:p>
+        </p:txBody>
+      </p:sp>
+      <p:sp>
+        <p:nvSpPr>
+          <p:cNvPr id="20" name="TextBox 19"/>
+          <p:cNvSpPr txBox="1"/>
+          <p:nvPr/>
+        </p:nvSpPr>
+        <p:spPr>
+          <a:xfrm>
+            <a:off x="4846320" y="4754880"/>
+            <a:ext cx="3017520" cy="502919"/>
+          </a:xfrm>
+          <a:prstGeom prst="rect">
+            <a:avLst/>
+          </a:prstGeom>
+          <a:noFill/>
+        </p:spPr>
+        <p:txBody>
+          <a:bodyPr wrap="square" tIns="36576" bIns="36576" lIns="54864" rIns="54864">
+            <a:spAutoFit/>
+          </a:bodyPr>
+          <a:lstStyle/>
+          <a:p>
+            <a:pPr algn="l"/>
+            <a:r>
+              <a:rPr sz="1600" b="1">
+                <a:solidFill>
+                  <a:srgbClr val="16A34A"/>
+                </a:solidFill>
+                <a:latin typeface="Arial"/>
+              </a:rPr>
+              <a:t>Từ khóa: "Vai trò của không khí"</a:t>
+            </a:r>
+          </a:p>
+        </p:txBody>
+      </p:sp>
+      <p:sp>
+        <p:nvSpPr>
+          <p:cNvPr id="21" name="Rounded Rectangle 20"/>
+          <p:cNvSpPr/>
+          <p:nvPr/>
+        </p:nvSpPr>
+        <p:spPr>
+          <a:xfrm>
+            <a:off x="8183879" y="2194560"/>
+            <a:ext cx="3593592" cy="3520440"/>
+          </a:xfrm>
+          <a:prstGeom prst="roundRect">
+            <a:avLst/>
+          </a:prstGeom>
+          <a:solidFill>
+            <a:srgbClr val="FFFFFF"/>
+          </a:solidFill>
+          <a:ln w="12700">
+            <a:solidFill>
+              <a:srgbClr val="CBD5E1"/>
+            </a:solidFill>
+          </a:ln>
+        </p:spPr>
+        <p:style>
+          <a:lnRef idx="1">
+            <a:schemeClr val="accent1"/>
+          </a:lnRef>
+          <a:fillRef idx="3">
+            <a:schemeClr val="accent1"/>
+          </a:fillRef>
+          <a:effectRef idx="2">
+            <a:schemeClr val="accent1"/>
+          </a:effectRef>
+          <a:fontRef idx="minor">
+            <a:schemeClr val="lt1"/>
+          </a:fontRef>
+        </p:style>
+        <p:txBody>
+          <a:bodyPr rtlCol="0" anchor="ctr"/>
+          <a:lstStyle/>
+          <a:p>
+            <a:pPr algn="ctr"/>
+          </a:p>
+        </p:txBody>
+      </p:sp>
+      <p:pic>
+        <p:nvPicPr>
+          <p:cNvPr id="22" name="Picture 21" descr="sgk_p23_hinh14_trang_web_ho_guom.png"/>
+          <p:cNvPicPr>
+            <a:picLocks noChangeAspect="1"/>
+          </p:cNvPicPr>
+          <p:nvPr/>
+        </p:nvPicPr>
+        <p:blipFill>
+          <a:blip r:embed="rId2"/>
+          <a:stretch>
+            <a:fillRect/>
+          </a:stretch>
+        </p:blipFill>
+        <p:spPr>
+          <a:xfrm>
+            <a:off x="8275320" y="2286000"/>
+            <a:ext cx="3410712" cy="3337560"/>
+          </a:xfrm>
+          <a:prstGeom prst="rect">
+            <a:avLst/>
+          </a:prstGeom>
+        </p:spPr>
+      </p:pic>
+    </p:spTree>
+  </p:cSld>
+  <p:clrMapOvr>
+    <a:masterClrMapping/>
+  </p:clrMapOvr>
+  <p:transition spd="med">
+    <p:fade/>
+  </p:transition>
+</p:sld>
+</file>
+
+<file path=ppt/slides/slide9.xml><?xml version="1.0" encoding="utf-8"?>
+<p:sld xmlns:a="http://schemas.openxmlformats.org/drawingml/2006/main" xmlns:p="http://schemas.openxmlformats.org/presentationml/2006/main" xmlns:r="http://schemas.openxmlformats.org/officeDocument/2006/relationships">
+  <p:cSld>
+    <p:spTree>
+      <p:nvGrpSpPr>
+        <p:cNvPr id="1" name=""/>
+        <p:cNvGrpSpPr/>
+        <p:nvPr/>
+      </p:nvGrpSpPr>
+      <p:grpSpPr/>
+      <p:sp>
+        <p:nvSpPr>
+          <p:cNvPr id="2" name="Rounded Rectangle 1"/>
+          <p:cNvSpPr/>
+          <p:nvPr/>
+        </p:nvSpPr>
+        <p:spPr>
+          <a:xfrm>
+            <a:off x="411480" y="1097280"/>
+            <a:ext cx="3044952" cy="329184"/>
+          </a:xfrm>
+          <a:prstGeom prst="roundRect">
+            <a:avLst/>
+          </a:prstGeom>
+          <a:solidFill>
+            <a:srgbClr val="1E3A8A"/>
+          </a:solidFill>
+          <a:ln>
+            <a:noFill/>
+          </a:ln>
+        </p:spPr>
+        <p:style>
+          <a:lnRef idx="1">
+            <a:schemeClr val="accent1"/>
+          </a:lnRef>
+          <a:fillRef idx="3">
+            <a:schemeClr val="accent1"/>
+          </a:fillRef>
+          <a:effectRef idx="2">
+            <a:schemeClr val="accent1"/>
+          </a:effectRef>
+          <a:fontRef idx="minor">
+            <a:schemeClr val="lt1"/>
+          </a:fontRef>
+        </p:style>
+        <p:txBody>
+          <a:bodyPr rtlCol="0" anchor="ctr"/>
+          <a:lstStyle/>
+          <a:p>
+            <a:pPr algn="ctr"/>
+          </a:p>
+        </p:txBody>
+      </p:sp>
+      <p:sp>
+        <p:nvSpPr>
+          <p:cNvPr id="3" name="TextBox 2"/>
+          <p:cNvSpPr txBox="1"/>
+          <p:nvPr/>
+        </p:nvSpPr>
+        <p:spPr>
+          <a:xfrm>
+            <a:off x="411480" y="1097280"/>
+            <a:ext cx="3044952" cy="329184"/>
+          </a:xfrm>
+          <a:prstGeom prst="rect">
+            <a:avLst/>
+          </a:prstGeom>
+          <a:noFill/>
+        </p:spPr>
+        <p:txBody>
+          <a:bodyPr wrap="square" tIns="36576" bIns="36576" lIns="54864" rIns="54864">
+            <a:spAutoFit/>
+          </a:bodyPr>
+          <a:lstStyle/>
+          <a:p>
+            <a:pPr algn="ctr"/>
+            <a:r>
+              <a:rPr sz="1200" b="1">
+                <a:solidFill>
+                  <a:srgbClr val="FFFFFF"/>
+                </a:solidFill>
+                <a:latin typeface="Arial"/>
+              </a:rPr>
+              <a:t>VẬN DỤNG &amp; AN TOÀN 🛡️</a:t>
+            </a:r>
+          </a:p>
+        </p:txBody>
+      </p:sp>
+      <p:sp>
+        <p:nvSpPr>
+          <p:cNvPr id="4" name="TextBox 3"/>
+          <p:cNvSpPr txBox="1"/>
+          <p:nvPr/>
+        </p:nvSpPr>
+        <p:spPr>
+          <a:xfrm>
+            <a:off x="411480" y="1481328"/>
+            <a:ext cx="11338560" cy="411480"/>
+          </a:xfrm>
+          <a:prstGeom prst="rect">
+            <a:avLst/>
+          </a:prstGeom>
+          <a:noFill/>
+        </p:spPr>
+        <p:txBody>
+          <a:bodyPr wrap="square" tIns="36576" bIns="36576" lIns="54864" rIns="54864">
+            <a:spAutoFit/>
+          </a:bodyPr>
+          <a:lstStyle/>
+          <a:p>
+            <a:pPr algn="l"/>
+            <a:r>
+              <a:rPr sz="2300" b="1">
+                <a:solidFill>
+                  <a:srgbClr val="1E3A8A"/>
+                </a:solidFill>
+                <a:latin typeface="Arial"/>
+              </a:rPr>
+              <a:t>5. Thử thách: Em là nhà thám hiểm Internet an toàn</a:t>
+            </a:r>
+          </a:p>
+        </p:txBody>
+      </p:sp>
+      <p:sp>
+        <p:nvSpPr>
+          <p:cNvPr id="5" name="TextBox 4"/>
+          <p:cNvSpPr txBox="1"/>
+          <p:nvPr/>
+        </p:nvSpPr>
+        <p:spPr>
+          <a:xfrm>
+            <a:off x="411480" y="1874519"/>
+            <a:ext cx="11338560" cy="274319"/>
+          </a:xfrm>
+          <a:prstGeom prst="rect">
+            <a:avLst/>
+          </a:prstGeom>
+          <a:noFill/>
+        </p:spPr>
+        <p:txBody>
+          <a:bodyPr wrap="square" tIns="36576" bIns="36576" lIns="54864" rIns="54864">
+            <a:spAutoFit/>
+          </a:bodyPr>
+          <a:lstStyle/>
+          <a:p>
+            <a:pPr algn="l"/>
+            <a:r>
+              <a:rPr sz="1400" b="0">
+                <a:solidFill>
+                  <a:srgbClr val="475569"/>
+                </a:solidFill>
+                <a:latin typeface="Arial"/>
+              </a:rPr>
+              <a:t>Vận dụng kiến thức để tìm kiếm địa danh yêu thích và tuân thủ nguyên tắc an toàn</a:t>
+            </a:r>
+          </a:p>
+        </p:txBody>
+      </p:sp>
+      <p:sp>
+        <p:nvSpPr>
+          <p:cNvPr id="6" name="Rounded Rectangle 5"/>
+          <p:cNvSpPr/>
+          <p:nvPr/>
+        </p:nvSpPr>
+        <p:spPr>
+          <a:xfrm>
+            <a:off x="411480" y="2194560"/>
+            <a:ext cx="6858000" cy="3520440"/>
+          </a:xfrm>
+          <a:prstGeom prst="roundRect">
+            <a:avLst/>
+          </a:prstGeom>
+          <a:solidFill>
+            <a:srgbClr val="FFFFFF"/>
+          </a:solidFill>
+          <a:ln w="12700">
+            <a:solidFill>
+              <a:srgbClr val="CBD5E1"/>
+            </a:solidFill>
+          </a:ln>
+        </p:spPr>
+        <p:style>
+          <a:lnRef idx="1">
+            <a:schemeClr val="accent1"/>
+          </a:lnRef>
+          <a:fillRef idx="3">
+            <a:schemeClr val="accent1"/>
+          </a:fillRef>
+          <a:effectRef idx="2">
+            <a:schemeClr val="accent1"/>
+          </a:effectRef>
+          <a:fontRef idx="minor">
+            <a:schemeClr val="lt1"/>
+          </a:fontRef>
+        </p:style>
+        <p:txBody>
+          <a:bodyPr rtlCol="0" anchor="ctr"/>
+          <a:lstStyle/>
+          <a:p>
+            <a:pPr algn="ctr"/>
+          </a:p>
+        </p:txBody>
+      </p:sp>
+      <p:sp>
+        <p:nvSpPr>
+          <p:cNvPr id="7" name="TextBox 6"/>
+          <p:cNvSpPr txBox="1"/>
+          <p:nvPr/>
+        </p:nvSpPr>
+        <p:spPr>
+          <a:xfrm>
+            <a:off x="640080" y="2331720"/>
+            <a:ext cx="6400800" cy="320040"/>
+          </a:xfrm>
+          <a:prstGeom prst="rect">
+            <a:avLst/>
+          </a:prstGeom>
+          <a:noFill/>
+        </p:spPr>
+        <p:txBody>
+          <a:bodyPr wrap="square" tIns="36576" bIns="36576" lIns="54864" rIns="54864">
+            <a:spAutoFit/>
+          </a:bodyPr>
+          <a:lstStyle/>
+          <a:p>
+            <a:pPr algn="l"/>
+            <a:r>
+              <a:rPr sz="1700" b="1">
+                <a:solidFill>
+                  <a:srgbClr val="1E3A8A"/>
+                </a:solidFill>
+                <a:latin typeface="Arial"/>
+              </a:rPr>
+              <a:t>🎯 NHIỆM VỤ DÀNH CHO EM:</a:t>
+            </a:r>
+          </a:p>
+        </p:txBody>
+      </p:sp>
+      <p:sp>
+        <p:nvSpPr>
+          <p:cNvPr id="8" name="TextBox 7"/>
+          <p:cNvSpPr txBox="1"/>
+          <p:nvPr/>
+        </p:nvSpPr>
+        <p:spPr>
+          <a:xfrm>
+            <a:off x="640080" y="2697480"/>
+            <a:ext cx="6400800" cy="1005840"/>
+          </a:xfrm>
+          <a:prstGeom prst="rect">
+            <a:avLst/>
+          </a:prstGeom>
+          <a:noFill/>
+        </p:spPr>
+        <p:txBody>
+          <a:bodyPr wrap="square" tIns="36576" bIns="36576" lIns="54864" rIns="54864">
+            <a:spAutoFit/>
+          </a:bodyPr>
+          <a:lstStyle/>
+          <a:p>
+            <a:pPr algn="l"/>
+            <a:r>
+              <a:rPr sz="1500" b="0">
+                <a:solidFill>
+                  <a:srgbClr val="0F172A"/>
+                </a:solidFill>
+                <a:latin typeface="Arial"/>
+              </a:rPr>
+              <a:t>Em hãy chọn một danh lam thắng cảnh ở quê hương em (hoặc "Văn Miếu - Quốc Tử Giám"), hãy:
+  1. Xác định từ khóa tìm kiếm phù hợp.
+  2. Sử dụng Google để tra cứu và ghi lại 2 thông tin thú vị em tìm được!</a:t>
+            </a:r>
+          </a:p>
+        </p:txBody>
+      </p:sp>
+      <p:sp>
+        <p:nvSpPr>
+          <p:cNvPr id="9" name="Rounded Rectangle 8"/>
+          <p:cNvSpPr/>
+          <p:nvPr/>
+        </p:nvSpPr>
+        <p:spPr>
+          <a:xfrm>
+            <a:off x="640080" y="3886200"/>
+            <a:ext cx="6400800" cy="1645919"/>
+          </a:xfrm>
+          <a:prstGeom prst="roundRect">
+            <a:avLst/>
+          </a:prstGeom>
+          <a:solidFill>
+            <a:srgbClr val="DBEAFE"/>
+          </a:solidFill>
+          <a:ln w="12700">
+            <a:solidFill>
+              <a:srgbClr val="1E3A8A"/>
+            </a:solidFill>
+          </a:ln>
+        </p:spPr>
+        <p:style>
+          <a:lnRef idx="1">
+            <a:schemeClr val="accent1"/>
+          </a:lnRef>
+          <a:fillRef idx="3">
+            <a:schemeClr val="accent1"/>
+          </a:fillRef>
+          <a:effectRef idx="2">
+            <a:schemeClr val="accent1"/>
+          </a:effectRef>
+          <a:fontRef idx="minor">
+            <a:schemeClr val="lt1"/>
+          </a:fontRef>
+        </p:style>
+        <p:txBody>
+          <a:bodyPr rtlCol="0" anchor="ctr"/>
+          <a:lstStyle/>
+          <a:p>
+            <a:pPr algn="ctr"/>
+          </a:p>
+        </p:txBody>
+      </p:sp>
+      <p:sp>
+        <p:nvSpPr>
+          <p:cNvPr id="10" name="TextBox 9"/>
+          <p:cNvSpPr txBox="1"/>
+          <p:nvPr/>
+        </p:nvSpPr>
+        <p:spPr>
+          <a:xfrm>
+            <a:off x="822960" y="3977639"/>
+            <a:ext cx="6035040" cy="320039"/>
+          </a:xfrm>
+          <a:prstGeom prst="rect">
+            <a:avLst/>
+          </a:prstGeom>
+          <a:noFill/>
+        </p:spPr>
+        <p:txBody>
+          <a:bodyPr wrap="square" tIns="36576" bIns="36576" lIns="54864" rIns="54864">
+            <a:spAutoFit/>
+          </a:bodyPr>
+          <a:lstStyle/>
+          <a:p>
+            <a:pPr algn="l"/>
+            <a:r>
+              <a:rPr sz="1600" b="1">
+                <a:solidFill>
+                  <a:srgbClr val="1E3A8A"/>
+                </a:solidFill>
+                <a:latin typeface="Arial"/>
+              </a:rPr>
+              <a:t>🛡️ QUY TẮC VÀNG KHI TÌM KIẾM TRÊN MẠNG:</a:t>
+            </a:r>
+          </a:p>
+        </p:txBody>
+      </p:sp>
+      <p:sp>
+        <p:nvSpPr>
+          <p:cNvPr id="11" name="TextBox 10"/>
+          <p:cNvSpPr txBox="1"/>
+          <p:nvPr/>
+        </p:nvSpPr>
+        <p:spPr>
+          <a:xfrm>
+            <a:off x="822960" y="4343400"/>
+            <a:ext cx="6035040" cy="1097280"/>
+          </a:xfrm>
+          <a:prstGeom prst="rect">
+            <a:avLst/>
+          </a:prstGeom>
+          <a:noFill/>
+        </p:spPr>
+        <p:txBody>
+          <a:bodyPr wrap="square" tIns="36576" bIns="36576" lIns="54864" rIns="54864">
+            <a:spAutoFit/>
+          </a:bodyPr>
+          <a:lstStyle/>
+          <a:p>
+            <a:pPr algn="l"/>
+            <a:r>
+              <a:rPr sz="1400" b="0">
+                <a:solidFill>
+                  <a:srgbClr val="0F172A"/>
+                </a:solidFill>
+                <a:latin typeface="Arial"/>
+              </a:rPr>
+              <a:t>✅ Chỉ truy cập các trang web có nội dung lành mạnh, phục vụ học tập.
+❌ Tuyệt đối không bấm vào các đường link lạ, quảng cáo nhấp nháy.
+🤝 Báo ngay với thầy cô giáo hoặc bố mẹ khi gặp nội dung không an toàn.</a:t>
+            </a:r>
+          </a:p>
+        </p:txBody>
+      </p:sp>
+      <p:sp>
+        <p:nvSpPr>
+          <p:cNvPr id="12" name="Rounded Rectangle 11"/>
+          <p:cNvSpPr/>
+          <p:nvPr/>
+        </p:nvSpPr>
+        <p:spPr>
+          <a:xfrm>
+            <a:off x="7452360" y="2194560"/>
+            <a:ext cx="4325112" cy="3520440"/>
+          </a:xfrm>
+          <a:prstGeom prst="roundRect">
+            <a:avLst/>
+          </a:prstGeom>
+          <a:solidFill>
+            <a:srgbClr val="FFFFFF"/>
+          </a:solidFill>
+          <a:ln w="12700">
+            <a:solidFill>
+              <a:srgbClr val="CBD5E1"/>
+            </a:solidFill>
+          </a:ln>
+        </p:spPr>
+        <p:style>
+          <a:lnRef idx="1">
+            <a:schemeClr val="accent1"/>
+          </a:lnRef>
+          <a:fillRef idx="3">
+            <a:schemeClr val="accent1"/>
+          </a:fillRef>
+          <a:effectRef idx="2">
+            <a:schemeClr val="accent1"/>
+          </a:effectRef>
+          <a:fontRef idx="minor">
+            <a:schemeClr val="lt1"/>
+          </a:fontRef>
+        </p:style>
+        <p:txBody>
+          <a:bodyPr rtlCol="0" anchor="ctr"/>
+          <a:lstStyle/>
+          <a:p>
+            <a:pPr algn="ctr"/>
+          </a:p>
+        </p:txBody>
+      </p:sp>
+      <p:pic>
+        <p:nvPicPr>
+          <p:cNvPr id="13" name="Picture 12" descr="safety_shield_mascot.jpg"/>
+          <p:cNvPicPr>
+            <a:picLocks noChangeAspect="1"/>
+          </p:cNvPicPr>
+          <p:nvPr/>
+        </p:nvPicPr>
+        <p:blipFill>
+          <a:blip r:embed="rId2"/>
+          <a:stretch>
+            <a:fillRect/>
+          </a:stretch>
+        </p:blipFill>
+        <p:spPr>
+          <a:xfrm>
+            <a:off x="7543800" y="2286000"/>
+            <a:ext cx="4142232" cy="3337560"/>
+          </a:xfrm>
+          <a:prstGeom prst="rect">
+            <a:avLst/>
+          </a:prstGeom>
+        </p:spPr>
+      </p:pic>
+    </p:spTree>
+  </p:cSld>
+  <p:clrMapOvr>
+    <a:masterClrMapping/>
+  </p:clrMapOvr>
+  <p:transition spd="med">
+    <p:push dir="l"/>
+  </p:transition>
 </p:sld>
 </file>
 
